--- a/source/MySEProject/Documentation/Fusion_CodersPPT.pptx
+++ b/source/MySEProject/Documentation/Fusion_CodersPPT.pptx
@@ -5,7 +5,8 @@
     <p:sldMasterId id="2147483725" r:id="rId1"/>
   </p:sldMasterIdLst>
   <p:sldIdLst>
-    <p:sldId id="256" r:id="rId2"/>
+    <p:sldId id="257" r:id="rId2"/>
+    <p:sldId id="256" r:id="rId3"/>
   </p:sldIdLst>
   <p:sldSz cx="12192000" cy="6858000"/>
   <p:notesSz cx="6858000" cy="9144000"/>
@@ -104,6 +105,11 @@
       </a:defRPr>
     </a:lvl9pPr>
   </p:defaultTextStyle>
+  <p:extLst>
+    <p:ext uri="{EFAFB233-063F-42B5-8137-9DF3F51BA10A}">
+      <p15:sldGuideLst xmlns:p15="http://schemas.microsoft.com/office/powerpoint/2012/main"/>
+    </p:ext>
+  </p:extLst>
 </p:presentation>
 </file>
 
@@ -364,7 +370,7 @@
           <a:p>
             <a:fld id="{3341EE12-F28E-4B03-A404-A8FCAE0F6316}" type="datetime1">
               <a:rPr lang="en-US" smtClean="0"/>
-              <a:t>3/3/2025</a:t>
+              <a:t>3/21/2025</a:t>
             </a:fld>
             <a:endParaRPr lang="en-US" dirty="0"/>
           </a:p>
@@ -649,7 +655,7 @@
           <a:p>
             <a:fld id="{B68B8189-0D9C-48A6-9FA3-862227B094CE}" type="datetime1">
               <a:rPr lang="en-US" smtClean="0"/>
-              <a:t>3/3/2025</a:t>
+              <a:t>3/21/2025</a:t>
             </a:fld>
             <a:endParaRPr lang="en-US"/>
           </a:p>
@@ -1013,7 +1019,7 @@
           <a:p>
             <a:fld id="{26ADDCAE-6443-42C3-9C19-F95985500186}" type="datetime1">
               <a:rPr lang="en-US" smtClean="0"/>
-              <a:t>3/3/2025</a:t>
+              <a:t>3/21/2025</a:t>
             </a:fld>
             <a:endParaRPr lang="en-US" dirty="0"/>
           </a:p>
@@ -1275,7 +1281,7 @@
           <a:p>
             <a:fld id="{1962799E-EB8E-4038-8063-81BB57C732D4}" type="datetime1">
               <a:rPr lang="en-US" smtClean="0"/>
-              <a:t>3/3/2025</a:t>
+              <a:t>3/21/2025</a:t>
             </a:fld>
             <a:endParaRPr lang="en-US"/>
           </a:p>
@@ -1705,7 +1711,7 @@
           <a:p>
             <a:fld id="{217A73C3-B243-44D3-809D-EF8FDFBD85D4}" type="datetime1">
               <a:rPr lang="en-US" smtClean="0"/>
-              <a:t>3/3/2025</a:t>
+              <a:t>3/21/2025</a:t>
             </a:fld>
             <a:endParaRPr lang="en-US" dirty="0"/>
           </a:p>
@@ -2036,7 +2042,7 @@
           <a:p>
             <a:fld id="{C9B6D3E3-28E2-4380-A113-67698215C5F8}" type="datetime1">
               <a:rPr lang="en-US" smtClean="0"/>
-              <a:t>3/3/2025</a:t>
+              <a:t>3/21/2025</a:t>
             </a:fld>
             <a:endParaRPr lang="en-US" dirty="0"/>
           </a:p>
@@ -2469,7 +2475,7 @@
           <a:p>
             <a:fld id="{A9EFCB61-04AD-47C9-BF79-2BD8B9CEC07A}" type="datetime1">
               <a:rPr lang="en-US" smtClean="0"/>
-              <a:t>3/3/2025</a:t>
+              <a:t>3/21/2025</a:t>
             </a:fld>
             <a:endParaRPr lang="en-US" dirty="0"/>
           </a:p>
@@ -2621,7 +2627,7 @@
           <a:p>
             <a:fld id="{A4535E0C-D585-492F-8146-7493F4086301}" type="datetime1">
               <a:rPr lang="en-US" smtClean="0"/>
-              <a:t>3/3/2025</a:t>
+              <a:t>3/21/2025</a:t>
             </a:fld>
             <a:endParaRPr lang="en-US"/>
           </a:p>
@@ -2784,7 +2790,7 @@
           <a:p>
             <a:fld id="{8CE48390-48B5-49AB-B019-A7C8FB8C31F6}" type="datetime1">
               <a:rPr lang="en-US" smtClean="0"/>
-              <a:t>3/3/2025</a:t>
+              <a:t>3/21/2025</a:t>
             </a:fld>
             <a:endParaRPr lang="en-US"/>
           </a:p>
@@ -3313,7 +3319,7 @@
           <a:p>
             <a:fld id="{962E767E-8A14-4E70-91B9-2101CBC4D7BD}" type="datetime1">
               <a:rPr lang="en-US" smtClean="0"/>
-              <a:t>3/3/2025</a:t>
+              <a:t>3/21/2025</a:t>
             </a:fld>
             <a:endParaRPr lang="en-US" dirty="0"/>
           </a:p>
@@ -3834,7 +3840,7 @@
           <a:p>
             <a:fld id="{01AF0C4B-5A4A-45CA-ABEC-10F107160D33}" type="datetime1">
               <a:rPr lang="en-US" smtClean="0"/>
-              <a:t>3/3/2025</a:t>
+              <a:t>3/21/2025</a:t>
             </a:fld>
             <a:endParaRPr lang="en-US" dirty="0"/>
           </a:p>
@@ -4384,7 +4390,7 @@
           <a:p>
             <a:fld id="{6989806E-8E94-473C-AEE7-BE6F15F85533}" type="datetime1">
               <a:rPr lang="en-US" smtClean="0"/>
-              <a:t>3/3/2025</a:t>
+              <a:t>3/21/2025</a:t>
             </a:fld>
             <a:endParaRPr lang="en-US" dirty="0"/>
           </a:p>
@@ -4874,6 +4880,138 @@
 <file path=ppt/slides/slide1.xml><?xml version="1.0" encoding="utf-8"?>
 <p:sld xmlns:a="http://schemas.openxmlformats.org/drawingml/2006/main" xmlns:r="http://schemas.openxmlformats.org/officeDocument/2006/relationships" xmlns:p="http://schemas.openxmlformats.org/presentationml/2006/main">
   <p:cSld>
+    <p:spTree>
+      <p:nvGrpSpPr>
+        <p:cNvPr id="1" name=""/>
+        <p:cNvGrpSpPr/>
+        <p:nvPr/>
+      </p:nvGrpSpPr>
+      <p:grpSpPr>
+        <a:xfrm>
+          <a:off x="0" y="0"/>
+          <a:ext cx="0" cy="0"/>
+          <a:chOff x="0" y="0"/>
+          <a:chExt cx="0" cy="0"/>
+        </a:xfrm>
+      </p:grpSpPr>
+      <p:pic>
+        <p:nvPicPr>
+          <p:cNvPr id="9" name="Picture 8" descr="A blue rectangle with lights&#10;&#10;AI-generated content may be incorrect.">
+            <a:extLst>
+              <a:ext uri="{FF2B5EF4-FFF2-40B4-BE49-F238E27FC236}">
+                <a16:creationId xmlns:a16="http://schemas.microsoft.com/office/drawing/2014/main" id="{C4DA5724-5B55-BDE7-2919-BC681D747413}"/>
+              </a:ext>
+            </a:extLst>
+          </p:cNvPr>
+          <p:cNvPicPr>
+            <a:picLocks noChangeAspect="1"/>
+          </p:cNvPicPr>
+          <p:nvPr/>
+        </p:nvPicPr>
+        <p:blipFill>
+          <a:blip r:embed="rId2">
+            <a:extLst>
+              <a:ext uri="{28A0092B-C50C-407E-A947-70E740481C1C}">
+                <a14:useLocalDpi xmlns:a14="http://schemas.microsoft.com/office/drawing/2010/main" val="0"/>
+              </a:ext>
+            </a:extLst>
+          </a:blip>
+          <a:stretch>
+            <a:fillRect/>
+          </a:stretch>
+        </p:blipFill>
+        <p:spPr>
+          <a:xfrm>
+            <a:off x="0" y="0"/>
+            <a:ext cx="12191999" cy="6858000"/>
+          </a:xfrm>
+          <a:prstGeom prst="rect">
+            <a:avLst/>
+          </a:prstGeom>
+        </p:spPr>
+      </p:pic>
+      <p:sp>
+        <p:nvSpPr>
+          <p:cNvPr id="10" name="TextBox 9">
+            <a:extLst>
+              <a:ext uri="{FF2B5EF4-FFF2-40B4-BE49-F238E27FC236}">
+                <a16:creationId xmlns:a16="http://schemas.microsoft.com/office/drawing/2014/main" id="{2A2989D5-5EFC-8EF4-868E-D5EC8A8A6C80}"/>
+              </a:ext>
+            </a:extLst>
+          </p:cNvPr>
+          <p:cNvSpPr txBox="1"/>
+          <p:nvPr/>
+        </p:nvSpPr>
+        <p:spPr>
+          <a:xfrm>
+            <a:off x="1711841" y="2424223"/>
+            <a:ext cx="8559209" cy="1323439"/>
+          </a:xfrm>
+          <a:prstGeom prst="rect">
+            <a:avLst/>
+          </a:prstGeom>
+          <a:noFill/>
+        </p:spPr>
+        <p:txBody>
+          <a:bodyPr wrap="square" rtlCol="0">
+            <a:spAutoFit/>
+          </a:bodyPr>
+          <a:lstStyle/>
+          <a:p>
+            <a:pPr algn="ctr"/>
+            <a:r>
+              <a:rPr lang="en-US" sz="4000" b="1" dirty="0">
+                <a:solidFill>
+                  <a:schemeClr val="bg1"/>
+                </a:solidFill>
+                <a:latin typeface="Arial" panose="020B0604020202020204" pitchFamily="34" charset="0"/>
+                <a:cs typeface="Arial" panose="020B0604020202020204" pitchFamily="34" charset="0"/>
+              </a:rPr>
+              <a:t>ML 24/25-09 Creating Text </a:t>
+            </a:r>
+            <a:br>
+              <a:rPr lang="en-US" sz="4000" b="1" dirty="0">
+                <a:solidFill>
+                  <a:schemeClr val="bg1"/>
+                </a:solidFill>
+                <a:latin typeface="Arial" panose="020B0604020202020204" pitchFamily="34" charset="0"/>
+                <a:cs typeface="Arial" panose="020B0604020202020204" pitchFamily="34" charset="0"/>
+              </a:rPr>
+            </a:br>
+            <a:r>
+              <a:rPr lang="en-US" sz="4000" b="1" dirty="0">
+                <a:solidFill>
+                  <a:schemeClr val="bg1"/>
+                </a:solidFill>
+                <a:latin typeface="Arial" panose="020B0604020202020204" pitchFamily="34" charset="0"/>
+                <a:cs typeface="Arial" panose="020B0604020202020204" pitchFamily="34" charset="0"/>
+              </a:rPr>
+              <a:t>from images with OCR API</a:t>
+            </a:r>
+            <a:endParaRPr lang="en-US" sz="4000" dirty="0">
+              <a:solidFill>
+                <a:schemeClr val="bg1"/>
+              </a:solidFill>
+            </a:endParaRPr>
+          </a:p>
+        </p:txBody>
+      </p:sp>
+    </p:spTree>
+    <p:extLst>
+      <p:ext uri="{BB962C8B-B14F-4D97-AF65-F5344CB8AC3E}">
+        <p14:creationId xmlns:p14="http://schemas.microsoft.com/office/powerpoint/2010/main" val="1047462580"/>
+      </p:ext>
+    </p:extLst>
+  </p:cSld>
+  <p:clrMapOvr>
+    <a:masterClrMapping/>
+  </p:clrMapOvr>
+</p:sld>
+</file>
+
+<file path=ppt/slides/slide2.xml><?xml version="1.0" encoding="utf-8"?>
+<p:sld xmlns:a="http://schemas.openxmlformats.org/drawingml/2006/main" xmlns:r="http://schemas.openxmlformats.org/officeDocument/2006/relationships" xmlns:p="http://schemas.openxmlformats.org/presentationml/2006/main">
+  <p:cSld>
     <p:bg>
       <p:bgPr>
         <a:solidFill>

--- a/source/MySEProject/Documentation/Fusion_CodersPPT.pptx
+++ b/source/MySEProject/Documentation/Fusion_CodersPPT.pptx
@@ -6,7 +6,16 @@
   </p:sldMasterIdLst>
   <p:sldIdLst>
     <p:sldId id="257" r:id="rId2"/>
-    <p:sldId id="256" r:id="rId3"/>
+    <p:sldId id="258" r:id="rId3"/>
+    <p:sldId id="259" r:id="rId4"/>
+    <p:sldId id="261" r:id="rId5"/>
+    <p:sldId id="262" r:id="rId6"/>
+    <p:sldId id="263" r:id="rId7"/>
+    <p:sldId id="264" r:id="rId8"/>
+    <p:sldId id="265" r:id="rId9"/>
+    <p:sldId id="268" r:id="rId10"/>
+    <p:sldId id="266" r:id="rId11"/>
+    <p:sldId id="267" r:id="rId12"/>
   </p:sldIdLst>
   <p:sldSz cx="12192000" cy="6858000"/>
   <p:notesSz cx="6858000" cy="9144000"/>
@@ -370,7 +379,7 @@
           <a:p>
             <a:fld id="{3341EE12-F28E-4B03-A404-A8FCAE0F6316}" type="datetime1">
               <a:rPr lang="en-US" smtClean="0"/>
-              <a:t>3/21/2025</a:t>
+              <a:t>3/22/2025</a:t>
             </a:fld>
             <a:endParaRPr lang="en-US" dirty="0"/>
           </a:p>
@@ -655,7 +664,7 @@
           <a:p>
             <a:fld id="{B68B8189-0D9C-48A6-9FA3-862227B094CE}" type="datetime1">
               <a:rPr lang="en-US" smtClean="0"/>
-              <a:t>3/21/2025</a:t>
+              <a:t>3/22/2025</a:t>
             </a:fld>
             <a:endParaRPr lang="en-US"/>
           </a:p>
@@ -1019,7 +1028,7 @@
           <a:p>
             <a:fld id="{26ADDCAE-6443-42C3-9C19-F95985500186}" type="datetime1">
               <a:rPr lang="en-US" smtClean="0"/>
-              <a:t>3/21/2025</a:t>
+              <a:t>3/22/2025</a:t>
             </a:fld>
             <a:endParaRPr lang="en-US" dirty="0"/>
           </a:p>
@@ -1281,7 +1290,7 @@
           <a:p>
             <a:fld id="{1962799E-EB8E-4038-8063-81BB57C732D4}" type="datetime1">
               <a:rPr lang="en-US" smtClean="0"/>
-              <a:t>3/21/2025</a:t>
+              <a:t>3/22/2025</a:t>
             </a:fld>
             <a:endParaRPr lang="en-US"/>
           </a:p>
@@ -1711,7 +1720,7 @@
           <a:p>
             <a:fld id="{217A73C3-B243-44D3-809D-EF8FDFBD85D4}" type="datetime1">
               <a:rPr lang="en-US" smtClean="0"/>
-              <a:t>3/21/2025</a:t>
+              <a:t>3/22/2025</a:t>
             </a:fld>
             <a:endParaRPr lang="en-US" dirty="0"/>
           </a:p>
@@ -2042,7 +2051,7 @@
           <a:p>
             <a:fld id="{C9B6D3E3-28E2-4380-A113-67698215C5F8}" type="datetime1">
               <a:rPr lang="en-US" smtClean="0"/>
-              <a:t>3/21/2025</a:t>
+              <a:t>3/22/2025</a:t>
             </a:fld>
             <a:endParaRPr lang="en-US" dirty="0"/>
           </a:p>
@@ -2475,7 +2484,7 @@
           <a:p>
             <a:fld id="{A9EFCB61-04AD-47C9-BF79-2BD8B9CEC07A}" type="datetime1">
               <a:rPr lang="en-US" smtClean="0"/>
-              <a:t>3/21/2025</a:t>
+              <a:t>3/22/2025</a:t>
             </a:fld>
             <a:endParaRPr lang="en-US" dirty="0"/>
           </a:p>
@@ -2627,7 +2636,7 @@
           <a:p>
             <a:fld id="{A4535E0C-D585-492F-8146-7493F4086301}" type="datetime1">
               <a:rPr lang="en-US" smtClean="0"/>
-              <a:t>3/21/2025</a:t>
+              <a:t>3/22/2025</a:t>
             </a:fld>
             <a:endParaRPr lang="en-US"/>
           </a:p>
@@ -2790,7 +2799,7 @@
           <a:p>
             <a:fld id="{8CE48390-48B5-49AB-B019-A7C8FB8C31F6}" type="datetime1">
               <a:rPr lang="en-US" smtClean="0"/>
-              <a:t>3/21/2025</a:t>
+              <a:t>3/22/2025</a:t>
             </a:fld>
             <a:endParaRPr lang="en-US"/>
           </a:p>
@@ -3319,7 +3328,7 @@
           <a:p>
             <a:fld id="{962E767E-8A14-4E70-91B9-2101CBC4D7BD}" type="datetime1">
               <a:rPr lang="en-US" smtClean="0"/>
-              <a:t>3/21/2025</a:t>
+              <a:t>3/22/2025</a:t>
             </a:fld>
             <a:endParaRPr lang="en-US" dirty="0"/>
           </a:p>
@@ -3840,7 +3849,7 @@
           <a:p>
             <a:fld id="{01AF0C4B-5A4A-45CA-ABEC-10F107160D33}" type="datetime1">
               <a:rPr lang="en-US" smtClean="0"/>
-              <a:t>3/21/2025</a:t>
+              <a:t>3/22/2025</a:t>
             </a:fld>
             <a:endParaRPr lang="en-US" dirty="0"/>
           </a:p>
@@ -4390,7 +4399,7 @@
           <a:p>
             <a:fld id="{6989806E-8E94-473C-AEE7-BE6F15F85533}" type="datetime1">
               <a:rPr lang="en-US" smtClean="0"/>
-              <a:t>3/21/2025</a:t>
+              <a:t>3/22/2025</a:t>
             </a:fld>
             <a:endParaRPr lang="en-US" dirty="0"/>
           </a:p>
@@ -4894,12 +4903,61 @@
           <a:chExt cx="0" cy="0"/>
         </a:xfrm>
       </p:grpSpPr>
+      <p:sp>
+        <p:nvSpPr>
+          <p:cNvPr id="6" name="Rectangle 5">
+            <a:extLst>
+              <a:ext uri="{FF2B5EF4-FFF2-40B4-BE49-F238E27FC236}">
+                <a16:creationId xmlns:a16="http://schemas.microsoft.com/office/drawing/2014/main" id="{E73608F1-1F9E-C999-585E-EB12261C5F3A}"/>
+              </a:ext>
+            </a:extLst>
+          </p:cNvPr>
+          <p:cNvSpPr/>
+          <p:nvPr/>
+        </p:nvSpPr>
+        <p:spPr>
+          <a:xfrm>
+            <a:off x="0" y="0"/>
+            <a:ext cx="12192000" cy="6858000"/>
+          </a:xfrm>
+          <a:prstGeom prst="rect">
+            <a:avLst/>
+          </a:prstGeom>
+          <a:solidFill>
+            <a:srgbClr val="010811"/>
+          </a:solidFill>
+        </p:spPr>
+        <p:style>
+          <a:lnRef idx="2">
+            <a:schemeClr val="accent1">
+              <a:shade val="15000"/>
+            </a:schemeClr>
+          </a:lnRef>
+          <a:fillRef idx="1">
+            <a:schemeClr val="accent1"/>
+          </a:fillRef>
+          <a:effectRef idx="0">
+            <a:schemeClr val="accent1"/>
+          </a:effectRef>
+          <a:fontRef idx="minor">
+            <a:schemeClr val="lt1"/>
+          </a:fontRef>
+        </p:style>
+        <p:txBody>
+          <a:bodyPr rtlCol="0" anchor="ctr"/>
+          <a:lstStyle/>
+          <a:p>
+            <a:pPr algn="ctr"/>
+            <a:endParaRPr lang="en-US"/>
+          </a:p>
+        </p:txBody>
+      </p:sp>
       <p:pic>
         <p:nvPicPr>
-          <p:cNvPr id="9" name="Picture 8" descr="A blue rectangle with lights&#10;&#10;AI-generated content may be incorrect.">
-            <a:extLst>
-              <a:ext uri="{FF2B5EF4-FFF2-40B4-BE49-F238E27FC236}">
-                <a16:creationId xmlns:a16="http://schemas.microsoft.com/office/drawing/2014/main" id="{C4DA5724-5B55-BDE7-2919-BC681D747413}"/>
+          <p:cNvPr id="8" name="Picture 7" descr="A group of women working on computers&#10;&#10;AI-generated content may be incorrect.">
+            <a:extLst>
+              <a:ext uri="{FF2B5EF4-FFF2-40B4-BE49-F238E27FC236}">
+                <a16:creationId xmlns:a16="http://schemas.microsoft.com/office/drawing/2014/main" id="{BAEA4822-6F97-2D79-F20C-5D76D9C01DB3}"/>
               </a:ext>
             </a:extLst>
           </p:cNvPr>
@@ -4922,8 +4980,8 @@
         </p:blipFill>
         <p:spPr>
           <a:xfrm>
-            <a:off x="0" y="0"/>
-            <a:ext cx="12191999" cy="6858000"/>
+            <a:off x="6096001" y="1338147"/>
+            <a:ext cx="5850674" cy="4605453"/>
           </a:xfrm>
           <a:prstGeom prst="rect">
             <a:avLst/>
@@ -4932,10 +4990,10 @@
       </p:pic>
       <p:sp>
         <p:nvSpPr>
-          <p:cNvPr id="10" name="TextBox 9">
-            <a:extLst>
-              <a:ext uri="{FF2B5EF4-FFF2-40B4-BE49-F238E27FC236}">
-                <a16:creationId xmlns:a16="http://schemas.microsoft.com/office/drawing/2014/main" id="{2A2989D5-5EFC-8EF4-868E-D5EC8A8A6C80}"/>
+          <p:cNvPr id="9" name="TextBox 8">
+            <a:extLst>
+              <a:ext uri="{FF2B5EF4-FFF2-40B4-BE49-F238E27FC236}">
+                <a16:creationId xmlns:a16="http://schemas.microsoft.com/office/drawing/2014/main" id="{E51B2FD8-7D6C-172E-9B3D-0179B556FACC}"/>
               </a:ext>
             </a:extLst>
           </p:cNvPr>
@@ -4944,8 +5002,8 @@
         </p:nvSpPr>
         <p:spPr>
           <a:xfrm>
-            <a:off x="1711841" y="2424223"/>
-            <a:ext cx="8559209" cy="1323439"/>
+            <a:off x="245325" y="2459503"/>
+            <a:ext cx="6523465" cy="1384995"/>
           </a:xfrm>
           <a:prstGeom prst="rect">
             <a:avLst/>
@@ -4958,48 +5016,537 @@
           </a:bodyPr>
           <a:lstStyle/>
           <a:p>
-            <a:pPr algn="ctr"/>
-            <a:r>
-              <a:rPr lang="en-US" sz="4000" b="1" dirty="0">
-                <a:solidFill>
-                  <a:schemeClr val="bg1"/>
-                </a:solidFill>
-                <a:latin typeface="Arial" panose="020B0604020202020204" pitchFamily="34" charset="0"/>
-                <a:cs typeface="Arial" panose="020B0604020202020204" pitchFamily="34" charset="0"/>
-              </a:rPr>
-              <a:t>ML 24/25-09 Creating Text </a:t>
-            </a:r>
-            <a:br>
-              <a:rPr lang="en-US" sz="4000" b="1" dirty="0">
-                <a:solidFill>
-                  <a:schemeClr val="bg1"/>
-                </a:solidFill>
-                <a:latin typeface="Arial" panose="020B0604020202020204" pitchFamily="34" charset="0"/>
-                <a:cs typeface="Arial" panose="020B0604020202020204" pitchFamily="34" charset="0"/>
-              </a:rPr>
-            </a:br>
-            <a:r>
-              <a:rPr lang="en-US" sz="4000" b="1" dirty="0">
-                <a:solidFill>
-                  <a:schemeClr val="bg1"/>
-                </a:solidFill>
-                <a:latin typeface="Arial" panose="020B0604020202020204" pitchFamily="34" charset="0"/>
-                <a:cs typeface="Arial" panose="020B0604020202020204" pitchFamily="34" charset="0"/>
-              </a:rPr>
-              <a:t>from images with OCR API</a:t>
-            </a:r>
-            <a:endParaRPr lang="en-US" sz="4000" dirty="0">
+            <a:r>
+              <a:rPr lang="en-US" sz="2800" b="1" dirty="0">
+                <a:solidFill>
+                  <a:schemeClr val="bg1"/>
+                </a:solidFill>
+              </a:rPr>
+              <a:t>Group Name: </a:t>
+            </a:r>
+            <a:r>
+              <a:rPr lang="en-US" sz="2400" dirty="0" err="1">
+                <a:solidFill>
+                  <a:schemeClr val="bg1"/>
+                </a:solidFill>
+              </a:rPr>
+              <a:t>Fusion_Coders</a:t>
+            </a:r>
+            <a:endParaRPr lang="en-US" sz="2400" dirty="0">
               <a:solidFill>
                 <a:schemeClr val="bg1"/>
               </a:solidFill>
             </a:endParaRPr>
           </a:p>
+          <a:p>
+            <a:r>
+              <a:rPr lang="en-US" sz="2800" b="1" dirty="0">
+                <a:solidFill>
+                  <a:schemeClr val="bg1"/>
+                </a:solidFill>
+              </a:rPr>
+              <a:t>Group Members: </a:t>
+            </a:r>
+            <a:r>
+              <a:rPr lang="en-US" sz="2400" dirty="0">
+                <a:solidFill>
+                  <a:schemeClr val="bg1"/>
+                </a:solidFill>
+              </a:rPr>
+              <a:t>Fiza Akram(1564248)</a:t>
+            </a:r>
+          </a:p>
+          <a:p>
+            <a:r>
+              <a:rPr lang="en-US" sz="2800" dirty="0">
+                <a:solidFill>
+                  <a:schemeClr val="bg1"/>
+                </a:solidFill>
+              </a:rPr>
+              <a:t>                                   </a:t>
+            </a:r>
+            <a:r>
+              <a:rPr lang="en-US" sz="2400" dirty="0">
+                <a:solidFill>
+                  <a:schemeClr val="bg1"/>
+                </a:solidFill>
+              </a:rPr>
+              <a:t>Romesa</a:t>
+            </a:r>
+          </a:p>
+        </p:txBody>
+      </p:sp>
+      <p:sp>
+        <p:nvSpPr>
+          <p:cNvPr id="10" name="TextBox 9">
+            <a:extLst>
+              <a:ext uri="{FF2B5EF4-FFF2-40B4-BE49-F238E27FC236}">
+                <a16:creationId xmlns:a16="http://schemas.microsoft.com/office/drawing/2014/main" id="{51B9C18F-CAA4-C090-267A-AE68402BA26A}"/>
+              </a:ext>
+            </a:extLst>
+          </p:cNvPr>
+          <p:cNvSpPr txBox="1"/>
+          <p:nvPr/>
+        </p:nvSpPr>
+        <p:spPr>
+          <a:xfrm>
+            <a:off x="1353016" y="485082"/>
+            <a:ext cx="10593659" cy="584775"/>
+          </a:xfrm>
+          <a:prstGeom prst="rect">
+            <a:avLst/>
+          </a:prstGeom>
+          <a:noFill/>
+        </p:spPr>
+        <p:txBody>
+          <a:bodyPr wrap="square" rtlCol="0">
+            <a:spAutoFit/>
+          </a:bodyPr>
+          <a:lstStyle/>
+          <a:p>
+            <a:r>
+              <a:rPr lang="en-US" sz="3200" b="1" dirty="0">
+                <a:solidFill>
+                  <a:schemeClr val="bg1"/>
+                </a:solidFill>
+              </a:rPr>
+              <a:t>ML 24/25-09 Creating Text from images with OCR API</a:t>
+            </a:r>
+          </a:p>
         </p:txBody>
       </p:sp>
     </p:spTree>
     <p:extLst>
       <p:ext uri="{BB962C8B-B14F-4D97-AF65-F5344CB8AC3E}">
-        <p14:creationId xmlns:p14="http://schemas.microsoft.com/office/powerpoint/2010/main" val="1047462580"/>
+        <p14:creationId xmlns:p14="http://schemas.microsoft.com/office/powerpoint/2010/main" val="214723757"/>
+      </p:ext>
+    </p:extLst>
+  </p:cSld>
+  <p:clrMapOvr>
+    <a:masterClrMapping/>
+  </p:clrMapOvr>
+</p:sld>
+</file>
+
+<file path=ppt/slides/slide10.xml><?xml version="1.0" encoding="utf-8"?>
+<p:sld xmlns:a="http://schemas.openxmlformats.org/drawingml/2006/main" xmlns:r="http://schemas.openxmlformats.org/officeDocument/2006/relationships" xmlns:p="http://schemas.openxmlformats.org/presentationml/2006/main">
+  <p:cSld>
+    <p:spTree>
+      <p:nvGrpSpPr>
+        <p:cNvPr id="1" name="">
+          <a:extLst>
+            <a:ext uri="{FF2B5EF4-FFF2-40B4-BE49-F238E27FC236}">
+              <a16:creationId xmlns:a16="http://schemas.microsoft.com/office/drawing/2014/main" id="{1F73DCAC-A9F4-C44C-C1FB-C74763EFC06C}"/>
+            </a:ext>
+          </a:extLst>
+        </p:cNvPr>
+        <p:cNvGrpSpPr/>
+        <p:nvPr/>
+      </p:nvGrpSpPr>
+      <p:grpSpPr>
+        <a:xfrm>
+          <a:off x="0" y="0"/>
+          <a:ext cx="0" cy="0"/>
+          <a:chOff x="0" y="0"/>
+          <a:chExt cx="0" cy="0"/>
+        </a:xfrm>
+      </p:grpSpPr>
+      <p:pic>
+        <p:nvPicPr>
+          <p:cNvPr id="5" name="Picture 4" descr="A computer screen with a blue background&#10;&#10;AI-generated content may be incorrect.">
+            <a:extLst>
+              <a:ext uri="{FF2B5EF4-FFF2-40B4-BE49-F238E27FC236}">
+                <a16:creationId xmlns:a16="http://schemas.microsoft.com/office/drawing/2014/main" id="{C068A0AB-7C4F-6E7D-7AB6-5AA2C14E6927}"/>
+              </a:ext>
+            </a:extLst>
+          </p:cNvPr>
+          <p:cNvPicPr>
+            <a:picLocks noChangeAspect="1"/>
+          </p:cNvPicPr>
+          <p:nvPr/>
+        </p:nvPicPr>
+        <p:blipFill>
+          <a:blip r:embed="rId2">
+            <a:extLst>
+              <a:ext uri="{28A0092B-C50C-407E-A947-70E740481C1C}">
+                <a14:useLocalDpi xmlns:a14="http://schemas.microsoft.com/office/drawing/2010/main" val="0"/>
+              </a:ext>
+            </a:extLst>
+          </a:blip>
+          <a:stretch>
+            <a:fillRect/>
+          </a:stretch>
+        </p:blipFill>
+        <p:spPr>
+          <a:xfrm>
+            <a:off x="0" y="0"/>
+            <a:ext cx="12192000" cy="6858000"/>
+          </a:xfrm>
+          <a:prstGeom prst="rect">
+            <a:avLst/>
+          </a:prstGeom>
+        </p:spPr>
+      </p:pic>
+      <p:sp>
+        <p:nvSpPr>
+          <p:cNvPr id="2" name="TextBox 1">
+            <a:extLst>
+              <a:ext uri="{FF2B5EF4-FFF2-40B4-BE49-F238E27FC236}">
+                <a16:creationId xmlns:a16="http://schemas.microsoft.com/office/drawing/2014/main" id="{BE735607-73AA-8F34-A1FD-C542DBC0245D}"/>
+              </a:ext>
+            </a:extLst>
+          </p:cNvPr>
+          <p:cNvSpPr txBox="1"/>
+          <p:nvPr/>
+        </p:nvSpPr>
+        <p:spPr>
+          <a:xfrm>
+            <a:off x="301083" y="435117"/>
+            <a:ext cx="7125629" cy="646331"/>
+          </a:xfrm>
+          <a:prstGeom prst="rect">
+            <a:avLst/>
+          </a:prstGeom>
+          <a:noFill/>
+        </p:spPr>
+        <p:txBody>
+          <a:bodyPr wrap="square" rtlCol="0">
+            <a:spAutoFit/>
+          </a:bodyPr>
+          <a:lstStyle/>
+          <a:p>
+            <a:r>
+              <a:rPr lang="en-US" sz="3600" b="1" dirty="0">
+                <a:solidFill>
+                  <a:schemeClr val="bg1"/>
+                </a:solidFill>
+              </a:rPr>
+              <a:t>Unit Testing for Image Processing</a:t>
+            </a:r>
+          </a:p>
+        </p:txBody>
+      </p:sp>
+      <p:sp>
+        <p:nvSpPr>
+          <p:cNvPr id="3" name="TextBox 2">
+            <a:extLst>
+              <a:ext uri="{FF2B5EF4-FFF2-40B4-BE49-F238E27FC236}">
+                <a16:creationId xmlns:a16="http://schemas.microsoft.com/office/drawing/2014/main" id="{589D67E9-3F90-38CA-81A3-D884320F49E9}"/>
+              </a:ext>
+            </a:extLst>
+          </p:cNvPr>
+          <p:cNvSpPr txBox="1"/>
+          <p:nvPr/>
+        </p:nvSpPr>
+        <p:spPr>
+          <a:xfrm>
+            <a:off x="364273" y="1683834"/>
+            <a:ext cx="5731727" cy="3816429"/>
+          </a:xfrm>
+          <a:prstGeom prst="rect">
+            <a:avLst/>
+          </a:prstGeom>
+          <a:noFill/>
+        </p:spPr>
+        <p:txBody>
+          <a:bodyPr wrap="square" rtlCol="0">
+            <a:spAutoFit/>
+          </a:bodyPr>
+          <a:lstStyle/>
+          <a:p>
+            <a:pPr algn="just"/>
+            <a:r>
+              <a:rPr lang="en-US" sz="2000" b="1" dirty="0" err="1">
+                <a:solidFill>
+                  <a:schemeClr val="bg1"/>
+                </a:solidFill>
+              </a:rPr>
+              <a:t>AdvancedImageProcessorTests</a:t>
+            </a:r>
+            <a:r>
+              <a:rPr lang="en-US" sz="2000" dirty="0">
+                <a:solidFill>
+                  <a:schemeClr val="bg1"/>
+                </a:solidFill>
+              </a:rPr>
+              <a:t>:</a:t>
+            </a:r>
+          </a:p>
+          <a:p>
+            <a:pPr marL="285750" indent="-285750" algn="just">
+              <a:buFont typeface="Wingdings" panose="05000000000000000000" pitchFamily="2" charset="2"/>
+              <a:buChar char="Ø"/>
+            </a:pPr>
+            <a:r>
+              <a:rPr lang="en-US" b="1" dirty="0">
+                <a:solidFill>
+                  <a:schemeClr val="bg1"/>
+                </a:solidFill>
+              </a:rPr>
+              <a:t>Save Processed Images</a:t>
+            </a:r>
+            <a:r>
+              <a:rPr lang="en-US" dirty="0">
+                <a:solidFill>
+                  <a:schemeClr val="bg1"/>
+                </a:solidFill>
+              </a:rPr>
+              <a:t>: Verifies images are saved correctly</a:t>
+            </a:r>
+            <a:r>
+              <a:rPr lang="en-US" sz="2000" dirty="0">
+                <a:solidFill>
+                  <a:schemeClr val="bg1"/>
+                </a:solidFill>
+              </a:rPr>
+              <a:t>.</a:t>
+            </a:r>
+          </a:p>
+          <a:p>
+            <a:pPr marL="285750" indent="-285750" algn="just">
+              <a:buFont typeface="Wingdings" panose="05000000000000000000" pitchFamily="2" charset="2"/>
+              <a:buChar char="Ø"/>
+            </a:pPr>
+            <a:r>
+              <a:rPr lang="en-US" b="1" dirty="0">
+                <a:solidFill>
+                  <a:schemeClr val="bg1"/>
+                </a:solidFill>
+              </a:rPr>
+              <a:t>Invalid Path Handling</a:t>
+            </a:r>
+            <a:r>
+              <a:rPr lang="en-US" dirty="0">
+                <a:solidFill>
+                  <a:schemeClr val="bg1"/>
+                </a:solidFill>
+              </a:rPr>
+              <a:t>: Ensures invalid image paths throw an error.</a:t>
+            </a:r>
+          </a:p>
+          <a:p>
+            <a:pPr marL="285750" indent="-285750" algn="just">
+              <a:buFont typeface="Wingdings" panose="05000000000000000000" pitchFamily="2" charset="2"/>
+              <a:buChar char="Ø"/>
+            </a:pPr>
+            <a:endParaRPr lang="en-US" dirty="0">
+              <a:solidFill>
+                <a:schemeClr val="bg1"/>
+              </a:solidFill>
+            </a:endParaRPr>
+          </a:p>
+          <a:p>
+            <a:pPr algn="just"/>
+            <a:r>
+              <a:rPr lang="en-US" sz="2000" b="1" dirty="0" err="1">
+                <a:solidFill>
+                  <a:schemeClr val="bg1"/>
+                </a:solidFill>
+              </a:rPr>
+              <a:t>ExperimentalImageProcessorTests</a:t>
+            </a:r>
+            <a:r>
+              <a:rPr lang="en-US" sz="2000" b="1" dirty="0">
+                <a:solidFill>
+                  <a:schemeClr val="bg1"/>
+                </a:solidFill>
+              </a:rPr>
+              <a:t>:</a:t>
+            </a:r>
+          </a:p>
+          <a:p>
+            <a:pPr marL="285750" indent="-285750" algn="just">
+              <a:buFont typeface="Wingdings" panose="05000000000000000000" pitchFamily="2" charset="2"/>
+              <a:buChar char="Ø"/>
+            </a:pPr>
+            <a:r>
+              <a:rPr lang="en-US" b="1" dirty="0">
+                <a:solidFill>
+                  <a:schemeClr val="bg1"/>
+                </a:solidFill>
+              </a:rPr>
+              <a:t>Apply All Techniques</a:t>
+            </a:r>
+            <a:r>
+              <a:rPr lang="en-US" dirty="0">
+                <a:solidFill>
+                  <a:schemeClr val="bg1"/>
+                </a:solidFill>
+              </a:rPr>
+              <a:t>: Ensures all processing techniques are applied and saved.</a:t>
+            </a:r>
+          </a:p>
+          <a:p>
+            <a:pPr marL="285750" indent="-285750" algn="just">
+              <a:buFont typeface="Wingdings" panose="05000000000000000000" pitchFamily="2" charset="2"/>
+              <a:buChar char="Ø"/>
+            </a:pPr>
+            <a:endParaRPr lang="en-US" b="1" dirty="0">
+              <a:solidFill>
+                <a:schemeClr val="bg1"/>
+              </a:solidFill>
+            </a:endParaRPr>
+          </a:p>
+          <a:p>
+            <a:pPr algn="just"/>
+            <a:r>
+              <a:rPr lang="en-US" sz="2000" b="1" dirty="0" err="1">
+                <a:solidFill>
+                  <a:schemeClr val="bg1"/>
+                </a:solidFill>
+              </a:rPr>
+              <a:t>ImageBatchProcessorTests</a:t>
+            </a:r>
+            <a:r>
+              <a:rPr lang="en-US" sz="2000" b="1" dirty="0">
+                <a:solidFill>
+                  <a:schemeClr val="bg1"/>
+                </a:solidFill>
+              </a:rPr>
+              <a:t>:</a:t>
+            </a:r>
+          </a:p>
+          <a:p>
+            <a:pPr marL="285750" indent="-285750" algn="just">
+              <a:buFont typeface="Wingdings" panose="05000000000000000000" pitchFamily="2" charset="2"/>
+              <a:buChar char="Ø"/>
+            </a:pPr>
+            <a:r>
+              <a:rPr lang="en-US" b="1" dirty="0">
+                <a:solidFill>
+                  <a:schemeClr val="bg1"/>
+                </a:solidFill>
+              </a:rPr>
+              <a:t>Batch Processing</a:t>
+            </a:r>
+            <a:r>
+              <a:rPr lang="en-US" dirty="0">
+                <a:solidFill>
+                  <a:schemeClr val="bg1"/>
+                </a:solidFill>
+              </a:rPr>
+              <a:t>: Verifies batch processing of images and text extraction.</a:t>
+            </a:r>
+            <a:endParaRPr lang="en-US" b="1" dirty="0">
+              <a:solidFill>
+                <a:schemeClr val="bg1"/>
+              </a:solidFill>
+            </a:endParaRPr>
+          </a:p>
+        </p:txBody>
+      </p:sp>
+      <p:pic>
+        <p:nvPicPr>
+          <p:cNvPr id="9" name="Picture 8" descr="A screenshot of a computer&#10;&#10;AI-generated content may be incorrect.">
+            <a:extLst>
+              <a:ext uri="{FF2B5EF4-FFF2-40B4-BE49-F238E27FC236}">
+                <a16:creationId xmlns:a16="http://schemas.microsoft.com/office/drawing/2014/main" id="{0429DBE2-48C7-7E6B-B37D-D06F491C417B}"/>
+              </a:ext>
+            </a:extLst>
+          </p:cNvPr>
+          <p:cNvPicPr>
+            <a:picLocks noChangeAspect="1"/>
+          </p:cNvPicPr>
+          <p:nvPr/>
+        </p:nvPicPr>
+        <p:blipFill>
+          <a:blip r:embed="rId3">
+            <a:extLst>
+              <a:ext uri="{28A0092B-C50C-407E-A947-70E740481C1C}">
+                <a14:useLocalDpi xmlns:a14="http://schemas.microsoft.com/office/drawing/2010/main" val="0"/>
+              </a:ext>
+            </a:extLst>
+          </a:blip>
+          <a:stretch>
+            <a:fillRect/>
+          </a:stretch>
+        </p:blipFill>
+        <p:spPr>
+          <a:xfrm>
+            <a:off x="6203795" y="1683834"/>
+            <a:ext cx="5880409" cy="3816429"/>
+          </a:xfrm>
+          <a:prstGeom prst="rect">
+            <a:avLst/>
+          </a:prstGeom>
+        </p:spPr>
+      </p:pic>
+    </p:spTree>
+    <p:extLst>
+      <p:ext uri="{BB962C8B-B14F-4D97-AF65-F5344CB8AC3E}">
+        <p14:creationId xmlns:p14="http://schemas.microsoft.com/office/powerpoint/2010/main" val="1079327904"/>
+      </p:ext>
+    </p:extLst>
+  </p:cSld>
+  <p:clrMapOvr>
+    <a:masterClrMapping/>
+  </p:clrMapOvr>
+</p:sld>
+</file>
+
+<file path=ppt/slides/slide11.xml><?xml version="1.0" encoding="utf-8"?>
+<p:sld xmlns:a="http://schemas.openxmlformats.org/drawingml/2006/main" xmlns:r="http://schemas.openxmlformats.org/officeDocument/2006/relationships" xmlns:p="http://schemas.openxmlformats.org/presentationml/2006/main">
+  <p:cSld>
+    <p:spTree>
+      <p:nvGrpSpPr>
+        <p:cNvPr id="1" name="">
+          <a:extLst>
+            <a:ext uri="{FF2B5EF4-FFF2-40B4-BE49-F238E27FC236}">
+              <a16:creationId xmlns:a16="http://schemas.microsoft.com/office/drawing/2014/main" id="{7FC33792-DF3B-58F0-7300-800F0EBC0CB4}"/>
+            </a:ext>
+          </a:extLst>
+        </p:cNvPr>
+        <p:cNvGrpSpPr/>
+        <p:nvPr/>
+      </p:nvGrpSpPr>
+      <p:grpSpPr>
+        <a:xfrm>
+          <a:off x="0" y="0"/>
+          <a:ext cx="0" cy="0"/>
+          <a:chOff x="0" y="0"/>
+          <a:chExt cx="0" cy="0"/>
+        </a:xfrm>
+      </p:grpSpPr>
+      <p:pic>
+        <p:nvPicPr>
+          <p:cNvPr id="5" name="Picture 4" descr="A computer screen with a blue background&#10;&#10;AI-generated content may be incorrect.">
+            <a:extLst>
+              <a:ext uri="{FF2B5EF4-FFF2-40B4-BE49-F238E27FC236}">
+                <a16:creationId xmlns:a16="http://schemas.microsoft.com/office/drawing/2014/main" id="{0985DE3E-77B6-9546-2717-B28750CECAAD}"/>
+              </a:ext>
+            </a:extLst>
+          </p:cNvPr>
+          <p:cNvPicPr>
+            <a:picLocks noChangeAspect="1"/>
+          </p:cNvPicPr>
+          <p:nvPr/>
+        </p:nvPicPr>
+        <p:blipFill>
+          <a:blip r:embed="rId2">
+            <a:extLst>
+              <a:ext uri="{28A0092B-C50C-407E-A947-70E740481C1C}">
+                <a14:useLocalDpi xmlns:a14="http://schemas.microsoft.com/office/drawing/2010/main" val="0"/>
+              </a:ext>
+            </a:extLst>
+          </a:blip>
+          <a:stretch>
+            <a:fillRect/>
+          </a:stretch>
+        </p:blipFill>
+        <p:spPr>
+          <a:xfrm>
+            <a:off x="0" y="0"/>
+            <a:ext cx="12192000" cy="6858000"/>
+          </a:xfrm>
+          <a:prstGeom prst="rect">
+            <a:avLst/>
+          </a:prstGeom>
+        </p:spPr>
+      </p:pic>
+    </p:spTree>
+    <p:extLst>
+      <p:ext uri="{BB962C8B-B14F-4D97-AF65-F5344CB8AC3E}">
+        <p14:creationId xmlns:p14="http://schemas.microsoft.com/office/powerpoint/2010/main" val="3320475402"/>
       </p:ext>
     </p:extLst>
   </p:cSld>
@@ -5012,14 +5559,6 @@
 <file path=ppt/slides/slide2.xml><?xml version="1.0" encoding="utf-8"?>
 <p:sld xmlns:a="http://schemas.openxmlformats.org/drawingml/2006/main" xmlns:r="http://schemas.openxmlformats.org/officeDocument/2006/relationships" xmlns:p="http://schemas.openxmlformats.org/presentationml/2006/main">
   <p:cSld>
-    <p:bg>
-      <p:bgPr>
-        <a:solidFill>
-          <a:schemeClr val="bg1"/>
-        </a:solidFill>
-        <a:effectLst/>
-      </p:bgPr>
-    </p:bg>
     <p:spTree>
       <p:nvGrpSpPr>
         <p:cNvPr id="1" name=""/>
@@ -5034,137 +5573,12 @@
           <a:chExt cx="0" cy="0"/>
         </a:xfrm>
       </p:grpSpPr>
-      <p:sp useBgFill="1">
-        <p:nvSpPr>
-          <p:cNvPr id="9" name="Rectangle 8">
-            <a:extLst>
-              <a:ext uri="{FF2B5EF4-FFF2-40B4-BE49-F238E27FC236}">
-                <a16:creationId xmlns:a16="http://schemas.microsoft.com/office/drawing/2014/main" id="{3899DA5E-794D-4391-A67B-C734D18C5EED}"/>
-              </a:ext>
-              <a:ext uri="{C183D7F6-B498-43B3-948B-1728B52AA6E4}">
-                <adec:decorative xmlns:adec="http://schemas.microsoft.com/office/drawing/2017/decorative" val="1"/>
-              </a:ext>
-            </a:extLst>
-          </p:cNvPr>
-          <p:cNvSpPr>
-            <a:spLocks noGrp="1" noRot="1" noChangeAspect="1" noMove="1" noResize="1" noEditPoints="1" noAdjustHandles="1" noChangeArrowheads="1" noChangeShapeType="1" noTextEdit="1"/>
-          </p:cNvSpPr>
-          <p:nvPr>
-            <p:extLst>
-              <p:ext uri="{386F3935-93C4-4BCD-93E2-E3B085C9AB24}">
-                <p16:designElem xmlns:p16="http://schemas.microsoft.com/office/powerpoint/2015/main" val="1"/>
-              </p:ext>
-            </p:extLst>
-          </p:nvPr>
-        </p:nvSpPr>
-        <p:spPr>
-          <a:xfrm>
-            <a:off x="0" y="0"/>
-            <a:ext cx="12192000" cy="6858000"/>
-          </a:xfrm>
-          <a:prstGeom prst="rect">
-            <a:avLst/>
-          </a:prstGeom>
-          <a:ln>
-            <a:noFill/>
-          </a:ln>
-        </p:spPr>
-        <p:style>
-          <a:lnRef idx="2">
-            <a:schemeClr val="accent1">
-              <a:shade val="50000"/>
-            </a:schemeClr>
-          </a:lnRef>
-          <a:fillRef idx="1">
-            <a:schemeClr val="accent1"/>
-          </a:fillRef>
-          <a:effectRef idx="0">
-            <a:schemeClr val="accent1"/>
-          </a:effectRef>
-          <a:fontRef idx="minor">
-            <a:schemeClr val="lt1"/>
-          </a:fontRef>
-        </p:style>
-        <p:txBody>
-          <a:bodyPr rtlCol="0" anchor="ctr"/>
-          <a:lstStyle/>
-          <a:p>
-            <a:pPr algn="ctr"/>
-            <a:endParaRPr lang="en-US"/>
-          </a:p>
-        </p:txBody>
-      </p:sp>
-      <p:sp>
-        <p:nvSpPr>
-          <p:cNvPr id="11" name="tint">
-            <a:extLst>
-              <a:ext uri="{FF2B5EF4-FFF2-40B4-BE49-F238E27FC236}">
-                <a16:creationId xmlns:a16="http://schemas.microsoft.com/office/drawing/2014/main" id="{DF8D6DF5-7A00-4A9D-BD50-E8BCC8F4D30E}"/>
-              </a:ext>
-              <a:ext uri="{C183D7F6-B498-43B3-948B-1728B52AA6E4}">
-                <adec:decorative xmlns:adec="http://schemas.microsoft.com/office/drawing/2017/decorative" val="1"/>
-              </a:ext>
-            </a:extLst>
-          </p:cNvPr>
-          <p:cNvSpPr>
-            <a:spLocks noGrp="1" noRot="1" noChangeAspect="1" noMove="1" noResize="1" noEditPoints="1" noAdjustHandles="1" noChangeArrowheads="1" noChangeShapeType="1" noTextEdit="1"/>
-          </p:cNvSpPr>
-          <p:nvPr>
-            <p:extLst>
-              <p:ext uri="{386F3935-93C4-4BCD-93E2-E3B085C9AB24}">
-                <p16:designElem xmlns:p16="http://schemas.microsoft.com/office/powerpoint/2015/main" val="1"/>
-              </p:ext>
-            </p:extLst>
-          </p:nvPr>
-        </p:nvSpPr>
-        <p:spPr>
-          <a:xfrm>
-            <a:off x="0" y="0"/>
-            <a:ext cx="12188952" cy="6858000"/>
-          </a:xfrm>
-          <a:prstGeom prst="rect">
-            <a:avLst/>
-          </a:prstGeom>
-          <a:solidFill>
-            <a:schemeClr val="bg2">
-              <a:alpha val="40000"/>
-            </a:schemeClr>
-          </a:solidFill>
-          <a:ln>
-            <a:noFill/>
-          </a:ln>
-        </p:spPr>
-        <p:style>
-          <a:lnRef idx="2">
-            <a:schemeClr val="accent1">
-              <a:shade val="50000"/>
-            </a:schemeClr>
-          </a:lnRef>
-          <a:fillRef idx="1">
-            <a:schemeClr val="accent1"/>
-          </a:fillRef>
-          <a:effectRef idx="0">
-            <a:schemeClr val="accent1"/>
-          </a:effectRef>
-          <a:fontRef idx="minor">
-            <a:schemeClr val="lt1"/>
-          </a:fontRef>
-        </p:style>
-        <p:txBody>
-          <a:bodyPr rtlCol="0" anchor="ctr"/>
-          <a:lstStyle/>
-          <a:p>
-            <a:pPr algn="ctr"/>
-            <a:endParaRPr lang="en-US" dirty="0"/>
-          </a:p>
-        </p:txBody>
-      </p:sp>
       <p:pic>
         <p:nvPicPr>
-          <p:cNvPr id="5" name="Picture 4">
-            <a:extLst>
-              <a:ext uri="{FF2B5EF4-FFF2-40B4-BE49-F238E27FC236}">
-                <a16:creationId xmlns:a16="http://schemas.microsoft.com/office/drawing/2014/main" id="{4EF46603-BA93-1AC5-F8FE-5322F7D70BFA}"/>
+          <p:cNvPr id="5" name="Picture 4" descr="A computer screen with a blue background&#10;&#10;AI-generated content may be incorrect.">
+            <a:extLst>
+              <a:ext uri="{FF2B5EF4-FFF2-40B4-BE49-F238E27FC236}">
+                <a16:creationId xmlns:a16="http://schemas.microsoft.com/office/drawing/2014/main" id="{3040E560-AD97-C943-3330-32D7CA30297E}"/>
               </a:ext>
             </a:extLst>
           </p:cNvPr>
@@ -5181,452 +5595,2033 @@
               </a:ext>
             </a:extLst>
           </a:blip>
-          <a:srcRect t="14817" b="14817"/>
-          <a:stretch/>
+          <a:stretch>
+            <a:fillRect/>
+          </a:stretch>
         </p:blipFill>
         <p:spPr>
           <a:xfrm>
-            <a:off x="6121757" y="2570072"/>
-            <a:ext cx="6095999" cy="4289479"/>
+            <a:off x="0" y="0"/>
+            <a:ext cx="12192000" cy="6858000"/>
           </a:xfrm>
           <a:prstGeom prst="rect">
             <a:avLst/>
           </a:prstGeom>
-          <a:effectLst/>
         </p:spPr>
       </p:pic>
-      <p:sp useBgFill="1">
-        <p:nvSpPr>
-          <p:cNvPr id="13" name="Rectangle 12">
-            <a:extLst>
-              <a:ext uri="{FF2B5EF4-FFF2-40B4-BE49-F238E27FC236}">
-                <a16:creationId xmlns:a16="http://schemas.microsoft.com/office/drawing/2014/main" id="{B30B727F-99CD-48A5-9962-6F0C0EA62625}"/>
-              </a:ext>
-              <a:ext uri="{C183D7F6-B498-43B3-948B-1728B52AA6E4}">
-                <adec:decorative xmlns:adec="http://schemas.microsoft.com/office/drawing/2017/decorative" val="1"/>
-              </a:ext>
-            </a:extLst>
-          </p:cNvPr>
-          <p:cNvSpPr>
-            <a:spLocks noGrp="1" noRot="1" noChangeAspect="1" noMove="1" noResize="1" noEditPoints="1" noAdjustHandles="1" noChangeArrowheads="1" noChangeShapeType="1" noTextEdit="1"/>
-          </p:cNvSpPr>
-          <p:nvPr>
-            <p:extLst>
-              <p:ext uri="{386F3935-93C4-4BCD-93E2-E3B085C9AB24}">
-                <p16:designElem xmlns:p16="http://schemas.microsoft.com/office/powerpoint/2015/main" val="1"/>
-              </p:ext>
-            </p:extLst>
-          </p:nvPr>
-        </p:nvSpPr>
-        <p:spPr>
-          <a:xfrm>
-            <a:off x="0" y="-2"/>
-            <a:ext cx="12192000" cy="2570074"/>
-          </a:xfrm>
-          <a:prstGeom prst="rect">
-            <a:avLst/>
-          </a:prstGeom>
-          <a:ln>
-            <a:noFill/>
-          </a:ln>
-          <a:effectLst>
-            <a:outerShdw blurRad="254000" dist="152400" dir="5460000" sx="90000" sy="90000" algn="t" rotWithShape="0">
-              <a:srgbClr val="000000">
-                <a:alpha val="30000"/>
-              </a:srgbClr>
-            </a:outerShdw>
-          </a:effectLst>
-        </p:spPr>
-        <p:style>
-          <a:lnRef idx="2">
-            <a:schemeClr val="accent1">
-              <a:shade val="50000"/>
-            </a:schemeClr>
-          </a:lnRef>
-          <a:fillRef idx="1">
-            <a:schemeClr val="accent1"/>
-          </a:fillRef>
-          <a:effectRef idx="0">
-            <a:schemeClr val="accent1"/>
-          </a:effectRef>
-          <a:fontRef idx="minor">
-            <a:schemeClr val="lt1"/>
-          </a:fontRef>
-        </p:style>
-        <p:txBody>
-          <a:bodyPr rtlCol="0" anchor="ctr"/>
-          <a:lstStyle/>
-          <a:p>
-            <a:pPr algn="ctr"/>
-            <a:endParaRPr lang="en-US" dirty="0"/>
-          </a:p>
-        </p:txBody>
-      </p:sp>
-      <p:sp>
-        <p:nvSpPr>
-          <p:cNvPr id="2" name="Title 1">
-            <a:extLst>
-              <a:ext uri="{FF2B5EF4-FFF2-40B4-BE49-F238E27FC236}">
-                <a16:creationId xmlns:a16="http://schemas.microsoft.com/office/drawing/2014/main" id="{BD5DF3F0-AFB0-4823-4B15-33C5501A2DFA}"/>
-              </a:ext>
-            </a:extLst>
-          </p:cNvPr>
-          <p:cNvSpPr>
-            <a:spLocks noGrp="1"/>
-          </p:cNvSpPr>
-          <p:nvPr>
-            <p:ph type="ctrTitle"/>
-          </p:nvPr>
-        </p:nvSpPr>
-        <p:spPr>
-          <a:xfrm>
-            <a:off x="761802" y="754336"/>
-            <a:ext cx="10426434" cy="1287816"/>
-          </a:xfrm>
-        </p:spPr>
-        <p:txBody>
-          <a:bodyPr>
-            <a:normAutofit fontScale="90000"/>
-          </a:bodyPr>
-          <a:lstStyle/>
-          <a:p>
-            <a:br>
-              <a:rPr lang="en-US" dirty="0"/>
-            </a:br>
-            <a:r>
-              <a:rPr lang="en-US" sz="4800" b="1" dirty="0">
-                <a:latin typeface="Arial" panose="020B0604020202020204" pitchFamily="34" charset="0"/>
-                <a:cs typeface="Arial" panose="020B0604020202020204" pitchFamily="34" charset="0"/>
-              </a:rPr>
-              <a:t>ML 24/25-09 Creating Text </a:t>
-            </a:r>
-            <a:br>
-              <a:rPr lang="en-US" sz="4800" b="1" dirty="0">
-                <a:latin typeface="Arial" panose="020B0604020202020204" pitchFamily="34" charset="0"/>
-                <a:cs typeface="Arial" panose="020B0604020202020204" pitchFamily="34" charset="0"/>
-              </a:rPr>
-            </a:br>
-            <a:r>
-              <a:rPr lang="en-US" sz="4800" b="1" dirty="0">
-                <a:latin typeface="Arial" panose="020B0604020202020204" pitchFamily="34" charset="0"/>
-                <a:cs typeface="Arial" panose="020B0604020202020204" pitchFamily="34" charset="0"/>
-              </a:rPr>
-              <a:t>from images with OCR API</a:t>
-            </a:r>
-            <a:endParaRPr lang="en-US" dirty="0">
-              <a:latin typeface="Arial" panose="020B0604020202020204" pitchFamily="34" charset="0"/>
-              <a:cs typeface="Arial" panose="020B0604020202020204" pitchFamily="34" charset="0"/>
-            </a:endParaRPr>
-          </a:p>
-        </p:txBody>
-      </p:sp>
-      <p:cxnSp>
-        <p:nvCxnSpPr>
-          <p:cNvPr id="15" name="Straight Connector 14">
-            <a:extLst>
-              <a:ext uri="{FF2B5EF4-FFF2-40B4-BE49-F238E27FC236}">
-                <a16:creationId xmlns:a16="http://schemas.microsoft.com/office/drawing/2014/main" id="{2C4AD1A6-4D2B-4BD2-A7D5-B3F27077C471}"/>
-              </a:ext>
-              <a:ext uri="{C183D7F6-B498-43B3-948B-1728B52AA6E4}">
-                <adec:decorative xmlns:adec="http://schemas.microsoft.com/office/drawing/2017/decorative" val="1"/>
-              </a:ext>
-            </a:extLst>
-          </p:cNvPr>
-          <p:cNvCxnSpPr>
-            <a:cxnSpLocks noGrp="1" noRot="1" noChangeAspect="1" noMove="1" noResize="1" noEditPoints="1" noAdjustHandles="1" noChangeArrowheads="1" noChangeShapeType="1"/>
-          </p:cNvCxnSpPr>
-          <p:nvPr>
-            <p:extLst>
-              <p:ext uri="{386F3935-93C4-4BCD-93E2-E3B085C9AB24}">
-                <p16:designElem xmlns:p16="http://schemas.microsoft.com/office/powerpoint/2015/main" val="1"/>
-              </p:ext>
-            </p:extLst>
-          </p:nvPr>
-        </p:nvCxnSpPr>
-        <p:spPr>
-          <a:xfrm>
-            <a:off x="11668155" y="1443083"/>
-            <a:ext cx="0" cy="599069"/>
-          </a:xfrm>
-          <a:prstGeom prst="line">
-            <a:avLst/>
-          </a:prstGeom>
-          <a:ln w="38100">
-            <a:solidFill>
-              <a:schemeClr val="tx1"/>
-            </a:solidFill>
-          </a:ln>
-        </p:spPr>
-        <p:style>
-          <a:lnRef idx="1">
-            <a:schemeClr val="accent1"/>
-          </a:lnRef>
-          <a:fillRef idx="0">
-            <a:schemeClr val="accent1"/>
-          </a:fillRef>
-          <a:effectRef idx="0">
-            <a:schemeClr val="accent1"/>
-          </a:effectRef>
-          <a:fontRef idx="minor">
-            <a:schemeClr val="tx1"/>
-          </a:fontRef>
-        </p:style>
-      </p:cxnSp>
-      <p:sp>
-        <p:nvSpPr>
-          <p:cNvPr id="7" name="Rectangle 2">
-            <a:extLst>
-              <a:ext uri="{FF2B5EF4-FFF2-40B4-BE49-F238E27FC236}">
-                <a16:creationId xmlns:a16="http://schemas.microsoft.com/office/drawing/2014/main" id="{0C0778E0-0AD7-53F0-6465-C65F269ED2DB}"/>
-              </a:ext>
-            </a:extLst>
-          </p:cNvPr>
-          <p:cNvSpPr>
-            <a:spLocks noGrp="1" noChangeArrowheads="1"/>
-          </p:cNvSpPr>
-          <p:nvPr>
-            <p:ph type="subTitle" idx="1"/>
-          </p:nvPr>
-        </p:nvSpPr>
-        <p:spPr bwMode="auto">
-          <a:xfrm>
-            <a:off x="762001" y="2534745"/>
-            <a:ext cx="4614040" cy="3642023"/>
+      <p:sp>
+        <p:nvSpPr>
+          <p:cNvPr id="10" name="TextBox 9">
+            <a:extLst>
+              <a:ext uri="{FF2B5EF4-FFF2-40B4-BE49-F238E27FC236}">
+                <a16:creationId xmlns:a16="http://schemas.microsoft.com/office/drawing/2014/main" id="{C2C1E52C-7BFE-3783-F16F-53F934F632DC}"/>
+              </a:ext>
+            </a:extLst>
+          </p:cNvPr>
+          <p:cNvSpPr txBox="1"/>
+          <p:nvPr/>
+        </p:nvSpPr>
+        <p:spPr>
+          <a:xfrm>
+            <a:off x="434898" y="869795"/>
+            <a:ext cx="8430322" cy="646331"/>
           </a:xfrm>
           <a:prstGeom prst="rect">
             <a:avLst/>
           </a:prstGeom>
           <a:noFill/>
-          <a:ln>
-            <a:noFill/>
-          </a:ln>
-          <a:effectLst/>
-          <a:extLst>
-            <a:ext uri="{909E8E84-426E-40DD-AFC4-6F175D3DCCD1}">
-              <a14:hiddenFill xmlns:a14="http://schemas.microsoft.com/office/drawing/2010/main">
-                <a:solidFill>
-                  <a:schemeClr val="accent1"/>
-                </a:solidFill>
-              </a14:hiddenFill>
-            </a:ext>
-            <a:ext uri="{91240B29-F687-4F45-9708-019B960494DF}">
-              <a14:hiddenLine xmlns:a14="http://schemas.microsoft.com/office/drawing/2010/main" w="9525">
-                <a:solidFill>
-                  <a:schemeClr val="tx1"/>
-                </a:solidFill>
-                <a:miter lim="800000"/>
-                <a:headEnd/>
-                <a:tailEnd/>
-              </a14:hiddenLine>
-            </a:ext>
-            <a:ext uri="{AF507438-7753-43E0-B8FC-AC1667EBCBE1}">
-              <a14:hiddenEffects xmlns:a14="http://schemas.microsoft.com/office/drawing/2010/main">
-                <a:effectLst>
-                  <a:outerShdw dist="35921" dir="2700000" algn="ctr" rotWithShape="0">
-                    <a:schemeClr val="bg2"/>
-                  </a:outerShdw>
-                </a:effectLst>
-              </a14:hiddenEffects>
-            </a:ext>
-          </a:extLst>
-        </p:spPr>
-        <p:txBody>
-          <a:bodyPr vert="horz" wrap="square" lIns="91440" tIns="45720" rIns="91440" bIns="45720" numCol="1" anchor="ctr" anchorCtr="0" compatLnSpc="1">
-            <a:prstTxWarp prst="textNoShape">
-              <a:avLst/>
-            </a:prstTxWarp>
+        </p:spPr>
+        <p:txBody>
+          <a:bodyPr wrap="square" rtlCol="0">
             <a:spAutoFit/>
           </a:bodyPr>
           <a:lstStyle/>
           <a:p>
-            <a:pPr marL="0" marR="0" lvl="0" indent="0" algn="l" defTabSz="914400" rtl="0" eaLnBrk="0" fontAlgn="base" latinLnBrk="0" hangingPunct="0">
-              <a:lnSpc>
-                <a:spcPct val="100000"/>
-              </a:lnSpc>
-              <a:spcBef>
-                <a:spcPct val="0"/>
-              </a:spcBef>
-              <a:spcAft>
-                <a:spcPct val="0"/>
-              </a:spcAft>
-              <a:buClrTx/>
-              <a:buSzTx/>
-              <a:buFontTx/>
-              <a:buNone/>
-              <a:tabLst/>
+            <a:r>
+              <a:rPr lang="en-US" sz="3600" b="1" dirty="0">
+                <a:solidFill>
+                  <a:schemeClr val="bg1"/>
+                </a:solidFill>
+              </a:rPr>
+              <a:t>Introduction</a:t>
+            </a:r>
+          </a:p>
+        </p:txBody>
+      </p:sp>
+      <p:sp>
+        <p:nvSpPr>
+          <p:cNvPr id="11" name="TextBox 10">
+            <a:extLst>
+              <a:ext uri="{FF2B5EF4-FFF2-40B4-BE49-F238E27FC236}">
+                <a16:creationId xmlns:a16="http://schemas.microsoft.com/office/drawing/2014/main" id="{A9F69CC7-DDF6-9C67-2B01-7CBA3AB31581}"/>
+              </a:ext>
+            </a:extLst>
+          </p:cNvPr>
+          <p:cNvSpPr txBox="1"/>
+          <p:nvPr/>
+        </p:nvSpPr>
+        <p:spPr>
+          <a:xfrm>
+            <a:off x="434898" y="2155737"/>
+            <a:ext cx="11117765" cy="3262432"/>
+          </a:xfrm>
+          <a:prstGeom prst="rect">
+            <a:avLst/>
+          </a:prstGeom>
+          <a:noFill/>
+        </p:spPr>
+        <p:txBody>
+          <a:bodyPr wrap="square" rtlCol="0">
+            <a:spAutoFit/>
+          </a:bodyPr>
+          <a:lstStyle/>
+          <a:p>
+            <a:pPr marL="285750" indent="-285750">
+              <a:buFont typeface="Wingdings" panose="05000000000000000000" pitchFamily="2" charset="2"/>
+              <a:buChar char="Ø"/>
             </a:pPr>
-            <a:endParaRPr kumimoji="0" lang="en-US" altLang="en-US" sz="1800" b="0" i="0" u="none" strike="noStrike" cap="none" normalizeH="0" baseline="0" dirty="0">
-              <a:ln>
-                <a:noFill/>
-              </a:ln>
+            <a:r>
+              <a:rPr lang="en-US" sz="2000" b="1" dirty="0">
+                <a:solidFill>
+                  <a:schemeClr val="bg1"/>
+                </a:solidFill>
+              </a:rPr>
+              <a:t>Text extraction from images faces several challenges: </a:t>
+            </a:r>
+          </a:p>
+          <a:p>
+            <a:pPr>
+              <a:buFont typeface="Arial" panose="020B0604020202020204" pitchFamily="34" charset="0"/>
+              <a:buChar char="•"/>
+            </a:pPr>
+            <a:r>
+              <a:rPr lang="en-US" dirty="0">
+                <a:solidFill>
+                  <a:schemeClr val="bg1"/>
+                </a:solidFill>
+              </a:rPr>
+              <a:t>Varied image quality and resolution</a:t>
+            </a:r>
+          </a:p>
+          <a:p>
+            <a:pPr>
+              <a:buFont typeface="Arial" panose="020B0604020202020204" pitchFamily="34" charset="0"/>
+              <a:buChar char="•"/>
+            </a:pPr>
+            <a:r>
+              <a:rPr lang="en-US" dirty="0">
+                <a:solidFill>
+                  <a:schemeClr val="bg1"/>
+                </a:solidFill>
+              </a:rPr>
+              <a:t>Different text orientations</a:t>
+            </a:r>
+          </a:p>
+          <a:p>
+            <a:pPr>
+              <a:buFont typeface="Arial" panose="020B0604020202020204" pitchFamily="34" charset="0"/>
+              <a:buChar char="•"/>
+            </a:pPr>
+            <a:r>
+              <a:rPr lang="en-US" dirty="0">
+                <a:solidFill>
+                  <a:schemeClr val="bg1"/>
+                </a:solidFill>
+              </a:rPr>
+              <a:t>Complex backgrounds and noise</a:t>
+            </a:r>
+          </a:p>
+          <a:p>
+            <a:pPr>
+              <a:buFont typeface="Arial" panose="020B0604020202020204" pitchFamily="34" charset="0"/>
+              <a:buChar char="•"/>
+            </a:pPr>
+            <a:r>
+              <a:rPr lang="en-US" dirty="0">
+                <a:solidFill>
+                  <a:schemeClr val="bg1"/>
+                </a:solidFill>
+              </a:rPr>
+              <a:t>Diverse font styles and sizes</a:t>
+            </a:r>
+          </a:p>
+          <a:p>
+            <a:pPr>
+              <a:buFont typeface="Arial" panose="020B0604020202020204" pitchFamily="34" charset="0"/>
+              <a:buChar char="•"/>
+            </a:pPr>
+            <a:r>
+              <a:rPr lang="en-US" dirty="0">
+                <a:solidFill>
+                  <a:schemeClr val="bg1"/>
+                </a:solidFill>
+              </a:rPr>
+              <a:t>Lighting variations and shadow</a:t>
+            </a:r>
+          </a:p>
+          <a:p>
+            <a:endParaRPr lang="en-US" dirty="0">
               <a:solidFill>
-                <a:schemeClr val="tx1"/>
+                <a:schemeClr val="bg1"/>
               </a:solidFill>
-              <a:effectLst/>
-              <a:latin typeface="Arial" panose="020B0604020202020204" pitchFamily="34" charset="0"/>
             </a:endParaRPr>
           </a:p>
           <a:p>
-            <a:pPr marL="0" marR="0" lvl="0" indent="0" defTabSz="914400" rtl="0" eaLnBrk="0" fontAlgn="base" latinLnBrk="0" hangingPunct="0">
-              <a:lnSpc>
-                <a:spcPct val="150000"/>
-              </a:lnSpc>
-              <a:spcBef>
-                <a:spcPct val="0"/>
-              </a:spcBef>
-              <a:spcAft>
-                <a:spcPct val="0"/>
-              </a:spcAft>
-              <a:buClrTx/>
-              <a:buSzTx/>
-              <a:buFontTx/>
-              <a:buChar char="•"/>
-              <a:tabLst/>
+            <a:pPr marL="342900" indent="-342900">
+              <a:buFont typeface="Wingdings" panose="05000000000000000000" pitchFamily="2" charset="2"/>
+              <a:buChar char="Ø"/>
             </a:pPr>
             <a:r>
-              <a:rPr kumimoji="0" lang="en-US" altLang="en-US" sz="1800" b="0" i="0" u="none" strike="noStrike" cap="none" normalizeH="0" baseline="0" dirty="0">
-                <a:ln>
-                  <a:noFill/>
-                </a:ln>
-                <a:solidFill>
-                  <a:schemeClr val="tx1"/>
-                </a:solidFill>
-                <a:effectLst/>
-                <a:latin typeface="Arial" panose="020B0604020202020204" pitchFamily="34" charset="0"/>
-              </a:rPr>
-              <a:t>C# OCR solution using Tesseract SDK </a:t>
-            </a:r>
-          </a:p>
-          <a:p>
-            <a:pPr marL="0" marR="0" lvl="0" indent="0" defTabSz="914400" rtl="0" eaLnBrk="0" fontAlgn="base" latinLnBrk="0" hangingPunct="0">
-              <a:lnSpc>
-                <a:spcPct val="150000"/>
-              </a:lnSpc>
-              <a:spcBef>
-                <a:spcPct val="0"/>
-              </a:spcBef>
-              <a:spcAft>
-                <a:spcPct val="0"/>
-              </a:spcAft>
-              <a:buClrTx/>
-              <a:buSzTx/>
-              <a:buFontTx/>
-              <a:buChar char="•"/>
-              <a:tabLst/>
-            </a:pPr>
-            <a:r>
-              <a:rPr kumimoji="0" lang="en-US" altLang="en-US" sz="1800" b="0" i="0" u="none" strike="noStrike" cap="none" normalizeH="0" baseline="0" dirty="0">
-                <a:ln>
-                  <a:noFill/>
-                </a:ln>
-                <a:solidFill>
-                  <a:schemeClr val="tx1"/>
-                </a:solidFill>
-                <a:effectLst/>
-                <a:latin typeface="Arial" panose="020B0604020202020204" pitchFamily="34" charset="0"/>
-              </a:rPr>
-              <a:t>Image preprocessing with various transformations </a:t>
-            </a:r>
-          </a:p>
-          <a:p>
-            <a:pPr marL="0" marR="0" lvl="0" indent="0" defTabSz="914400" rtl="0" eaLnBrk="0" fontAlgn="base" latinLnBrk="0" hangingPunct="0">
-              <a:lnSpc>
-                <a:spcPct val="150000"/>
-              </a:lnSpc>
-              <a:spcBef>
-                <a:spcPct val="0"/>
-              </a:spcBef>
-              <a:spcAft>
-                <a:spcPct val="0"/>
-              </a:spcAft>
-              <a:buClrTx/>
-              <a:buSzTx/>
-              <a:buFontTx/>
-              <a:buChar char="•"/>
-              <a:tabLst/>
-            </a:pPr>
-            <a:r>
-              <a:rPr kumimoji="0" lang="en-US" altLang="en-US" sz="1800" b="0" i="0" u="none" strike="noStrike" cap="none" normalizeH="0" baseline="0" dirty="0">
-                <a:ln>
-                  <a:noFill/>
-                </a:ln>
-                <a:solidFill>
-                  <a:schemeClr val="tx1"/>
-                </a:solidFill>
-                <a:effectLst/>
-                <a:latin typeface="Arial" panose="020B0604020202020204" pitchFamily="34" charset="0"/>
-              </a:rPr>
-              <a:t>Flexible console application with parameters </a:t>
-            </a:r>
-          </a:p>
-          <a:p>
-            <a:pPr marL="0" marR="0" lvl="0" indent="0" defTabSz="914400" rtl="0" eaLnBrk="0" fontAlgn="base" latinLnBrk="0" hangingPunct="0">
-              <a:lnSpc>
-                <a:spcPct val="150000"/>
-              </a:lnSpc>
-              <a:spcBef>
-                <a:spcPct val="0"/>
-              </a:spcBef>
-              <a:spcAft>
-                <a:spcPct val="0"/>
-              </a:spcAft>
-              <a:buClrTx/>
-              <a:buSzTx/>
-              <a:buFontTx/>
-              <a:buChar char="•"/>
-              <a:tabLst/>
-            </a:pPr>
-            <a:r>
-              <a:rPr kumimoji="0" lang="en-US" altLang="en-US" sz="1800" b="0" i="0" u="none" strike="noStrike" cap="none" normalizeH="0" baseline="0" dirty="0">
-                <a:ln>
-                  <a:noFill/>
-                </a:ln>
-                <a:solidFill>
-                  <a:schemeClr val="tx1"/>
-                </a:solidFill>
-                <a:effectLst/>
-                <a:latin typeface="Arial" panose="020B0604020202020204" pitchFamily="34" charset="0"/>
-              </a:rPr>
-              <a:t>Quality comparison of preprocessing methods </a:t>
-            </a:r>
-          </a:p>
-          <a:p>
-            <a:pPr marL="0" marR="0" lvl="0" indent="0" defTabSz="914400" rtl="0" eaLnBrk="0" fontAlgn="base" latinLnBrk="0" hangingPunct="0">
-              <a:lnSpc>
-                <a:spcPct val="150000"/>
-              </a:lnSpc>
-              <a:spcBef>
-                <a:spcPct val="0"/>
-              </a:spcBef>
-              <a:spcAft>
-                <a:spcPct val="0"/>
-              </a:spcAft>
-              <a:buClrTx/>
-              <a:buSzTx/>
-              <a:buFontTx/>
-              <a:buChar char="•"/>
-              <a:tabLst/>
-            </a:pPr>
-            <a:r>
-              <a:rPr kumimoji="0" lang="en-US" altLang="en-US" sz="1800" b="0" i="0" u="none" strike="noStrike" cap="none" normalizeH="0" baseline="0" dirty="0">
-                <a:ln>
-                  <a:noFill/>
-                </a:ln>
-                <a:solidFill>
-                  <a:schemeClr val="tx1"/>
-                </a:solidFill>
-                <a:effectLst/>
-                <a:latin typeface="Arial" panose="020B0604020202020204" pitchFamily="34" charset="0"/>
-              </a:rPr>
-              <a:t>Structured output with extraction results </a:t>
-            </a:r>
+              <a:rPr lang="en-US" sz="2000" b="1" dirty="0">
+                <a:solidFill>
+                  <a:schemeClr val="bg1"/>
+                </a:solidFill>
+              </a:rPr>
+              <a:t>Project Objective:</a:t>
+            </a:r>
+            <a:r>
+              <a:rPr lang="en-US" sz="2000" dirty="0">
+                <a:solidFill>
+                  <a:schemeClr val="bg1"/>
+                </a:solidFill>
+              </a:rPr>
+              <a:t> </a:t>
+            </a:r>
+          </a:p>
+          <a:p>
+            <a:pPr algn="just"/>
+            <a:r>
+              <a:rPr lang="en-US" dirty="0">
+                <a:solidFill>
+                  <a:schemeClr val="bg1"/>
+                </a:solidFill>
+              </a:rPr>
+              <a:t>Develop a robust system that uses multiple image processing </a:t>
+            </a:r>
+          </a:p>
+          <a:p>
+            <a:pPr algn="just"/>
+            <a:r>
+              <a:rPr lang="en-US" dirty="0">
+                <a:solidFill>
+                  <a:schemeClr val="bg1"/>
+                </a:solidFill>
+              </a:rPr>
+              <a:t>techniques to improve OCR accuracy</a:t>
+            </a:r>
+          </a:p>
+          <a:p>
+            <a:endParaRPr lang="en-US" dirty="0"/>
           </a:p>
         </p:txBody>
       </p:sp>
     </p:spTree>
     <p:extLst>
       <p:ext uri="{BB962C8B-B14F-4D97-AF65-F5344CB8AC3E}">
-        <p14:creationId xmlns:p14="http://schemas.microsoft.com/office/powerpoint/2010/main" val="3899250809"/>
+        <p14:creationId xmlns:p14="http://schemas.microsoft.com/office/powerpoint/2010/main" val="1611073301"/>
+      </p:ext>
+    </p:extLst>
+  </p:cSld>
+  <p:clrMapOvr>
+    <a:masterClrMapping/>
+  </p:clrMapOvr>
+</p:sld>
+</file>
+
+<file path=ppt/slides/slide3.xml><?xml version="1.0" encoding="utf-8"?>
+<p:sld xmlns:a="http://schemas.openxmlformats.org/drawingml/2006/main" xmlns:r="http://schemas.openxmlformats.org/officeDocument/2006/relationships" xmlns:p="http://schemas.openxmlformats.org/presentationml/2006/main">
+  <p:cSld>
+    <p:spTree>
+      <p:nvGrpSpPr>
+        <p:cNvPr id="1" name=""/>
+        <p:cNvGrpSpPr/>
+        <p:nvPr/>
+      </p:nvGrpSpPr>
+      <p:grpSpPr>
+        <a:xfrm>
+          <a:off x="0" y="0"/>
+          <a:ext cx="0" cy="0"/>
+          <a:chOff x="0" y="0"/>
+          <a:chExt cx="0" cy="0"/>
+        </a:xfrm>
+      </p:grpSpPr>
+      <p:pic>
+        <p:nvPicPr>
+          <p:cNvPr id="5" name="Picture 4" descr="A computer screen with a blue background&#10;&#10;AI-generated content may be incorrect.">
+            <a:extLst>
+              <a:ext uri="{FF2B5EF4-FFF2-40B4-BE49-F238E27FC236}">
+                <a16:creationId xmlns:a16="http://schemas.microsoft.com/office/drawing/2014/main" id="{45D60923-C011-5256-668C-B0E36EBDD39D}"/>
+              </a:ext>
+            </a:extLst>
+          </p:cNvPr>
+          <p:cNvPicPr>
+            <a:picLocks noChangeAspect="1"/>
+          </p:cNvPicPr>
+          <p:nvPr/>
+        </p:nvPicPr>
+        <p:blipFill>
+          <a:blip r:embed="rId2">
+            <a:extLst>
+              <a:ext uri="{28A0092B-C50C-407E-A947-70E740481C1C}">
+                <a14:useLocalDpi xmlns:a14="http://schemas.microsoft.com/office/drawing/2010/main" val="0"/>
+              </a:ext>
+            </a:extLst>
+          </a:blip>
+          <a:stretch>
+            <a:fillRect/>
+          </a:stretch>
+        </p:blipFill>
+        <p:spPr>
+          <a:xfrm>
+            <a:off x="0" y="0"/>
+            <a:ext cx="12192000" cy="6858000"/>
+          </a:xfrm>
+          <a:prstGeom prst="rect">
+            <a:avLst/>
+          </a:prstGeom>
+        </p:spPr>
+      </p:pic>
+      <p:sp>
+        <p:nvSpPr>
+          <p:cNvPr id="7" name="TextBox 6">
+            <a:extLst>
+              <a:ext uri="{FF2B5EF4-FFF2-40B4-BE49-F238E27FC236}">
+                <a16:creationId xmlns:a16="http://schemas.microsoft.com/office/drawing/2014/main" id="{A9DC6126-C3FF-33EE-50B9-88C0AEDF3264}"/>
+              </a:ext>
+            </a:extLst>
+          </p:cNvPr>
+          <p:cNvSpPr txBox="1"/>
+          <p:nvPr/>
+        </p:nvSpPr>
+        <p:spPr>
+          <a:xfrm>
+            <a:off x="401444" y="652347"/>
+            <a:ext cx="8430322" cy="646331"/>
+          </a:xfrm>
+          <a:prstGeom prst="rect">
+            <a:avLst/>
+          </a:prstGeom>
+          <a:noFill/>
+        </p:spPr>
+        <p:txBody>
+          <a:bodyPr wrap="square" rtlCol="0">
+            <a:spAutoFit/>
+          </a:bodyPr>
+          <a:lstStyle/>
+          <a:p>
+            <a:r>
+              <a:rPr lang="en-US" sz="3600" b="1" dirty="0">
+                <a:solidFill>
+                  <a:schemeClr val="bg1"/>
+                </a:solidFill>
+              </a:rPr>
+              <a:t>System Architecture</a:t>
+            </a:r>
+          </a:p>
+        </p:txBody>
+      </p:sp>
+      <p:pic>
+        <p:nvPicPr>
+          <p:cNvPr id="9" name="Picture 8" descr="A diagram of a project flow diagram&#10;&#10;AI-generated content may be incorrect.">
+            <a:extLst>
+              <a:ext uri="{FF2B5EF4-FFF2-40B4-BE49-F238E27FC236}">
+                <a16:creationId xmlns:a16="http://schemas.microsoft.com/office/drawing/2014/main" id="{A9835158-30A7-D4A2-C57E-3F84F610EBE6}"/>
+              </a:ext>
+            </a:extLst>
+          </p:cNvPr>
+          <p:cNvPicPr>
+            <a:picLocks noChangeAspect="1"/>
+          </p:cNvPicPr>
+          <p:nvPr/>
+        </p:nvPicPr>
+        <p:blipFill>
+          <a:blip r:embed="rId3">
+            <a:extLst>
+              <a:ext uri="{28A0092B-C50C-407E-A947-70E740481C1C}">
+                <a14:useLocalDpi xmlns:a14="http://schemas.microsoft.com/office/drawing/2010/main" val="0"/>
+              </a:ext>
+            </a:extLst>
+          </a:blip>
+          <a:stretch>
+            <a:fillRect/>
+          </a:stretch>
+        </p:blipFill>
+        <p:spPr>
+          <a:xfrm>
+            <a:off x="6322742" y="1805834"/>
+            <a:ext cx="5664819" cy="4399819"/>
+          </a:xfrm>
+          <a:prstGeom prst="rect">
+            <a:avLst/>
+          </a:prstGeom>
+        </p:spPr>
+      </p:pic>
+      <p:sp>
+        <p:nvSpPr>
+          <p:cNvPr id="10" name="TextBox 9">
+            <a:extLst>
+              <a:ext uri="{FF2B5EF4-FFF2-40B4-BE49-F238E27FC236}">
+                <a16:creationId xmlns:a16="http://schemas.microsoft.com/office/drawing/2014/main" id="{0D75FCFF-DF68-BEF4-82ED-DB3E96C081AE}"/>
+              </a:ext>
+            </a:extLst>
+          </p:cNvPr>
+          <p:cNvSpPr txBox="1"/>
+          <p:nvPr/>
+        </p:nvSpPr>
+        <p:spPr>
+          <a:xfrm>
+            <a:off x="401444" y="2228671"/>
+            <a:ext cx="5118410" cy="2862322"/>
+          </a:xfrm>
+          <a:prstGeom prst="rect">
+            <a:avLst/>
+          </a:prstGeom>
+          <a:noFill/>
+        </p:spPr>
+        <p:txBody>
+          <a:bodyPr wrap="square" rtlCol="0">
+            <a:spAutoFit/>
+          </a:bodyPr>
+          <a:lstStyle/>
+          <a:p>
+            <a:pPr>
+              <a:buNone/>
+            </a:pPr>
+            <a:r>
+              <a:rPr lang="en-US" sz="2400" b="1" dirty="0">
+                <a:solidFill>
+                  <a:schemeClr val="bg1"/>
+                </a:solidFill>
+              </a:rPr>
+              <a:t>Three Main Components:</a:t>
+            </a:r>
+          </a:p>
+          <a:p>
+            <a:pPr>
+              <a:buNone/>
+            </a:pPr>
+            <a:endParaRPr lang="en-US" sz="2400" b="1" dirty="0">
+              <a:solidFill>
+                <a:schemeClr val="bg1"/>
+              </a:solidFill>
+            </a:endParaRPr>
+          </a:p>
+          <a:p>
+            <a:pPr marL="457200" indent="-457200" algn="just">
+              <a:buFont typeface="+mj-lt"/>
+              <a:buAutoNum type="arabicParenR"/>
+            </a:pPr>
+            <a:r>
+              <a:rPr lang="en-US" sz="2000" b="1" dirty="0">
+                <a:solidFill>
+                  <a:schemeClr val="bg1"/>
+                </a:solidFill>
+              </a:rPr>
+              <a:t>Image Processors:</a:t>
+            </a:r>
+            <a:r>
+              <a:rPr lang="en-US" sz="2000" dirty="0">
+                <a:solidFill>
+                  <a:schemeClr val="bg1"/>
+                </a:solidFill>
+              </a:rPr>
+              <a:t> </a:t>
+            </a:r>
+            <a:r>
+              <a:rPr lang="en-US" dirty="0">
+                <a:solidFill>
+                  <a:schemeClr val="bg1"/>
+                </a:solidFill>
+              </a:rPr>
+              <a:t>Apply transformations to optimize images</a:t>
+            </a:r>
+          </a:p>
+          <a:p>
+            <a:pPr marL="457200" indent="-457200" algn="just">
+              <a:buFont typeface="+mj-lt"/>
+              <a:buAutoNum type="arabicParenR"/>
+            </a:pPr>
+            <a:r>
+              <a:rPr lang="en-US" sz="2000" b="1" dirty="0">
+                <a:solidFill>
+                  <a:schemeClr val="bg1"/>
+                </a:solidFill>
+              </a:rPr>
+              <a:t>Text Extractor:</a:t>
+            </a:r>
+            <a:r>
+              <a:rPr lang="en-US" sz="2000" dirty="0">
+                <a:solidFill>
+                  <a:schemeClr val="bg1"/>
+                </a:solidFill>
+              </a:rPr>
+              <a:t> </a:t>
+            </a:r>
+            <a:r>
+              <a:rPr lang="en-US" dirty="0">
+                <a:solidFill>
+                  <a:schemeClr val="bg1"/>
+                </a:solidFill>
+              </a:rPr>
+              <a:t>Uses Tesseract OCR to extract text</a:t>
+            </a:r>
+          </a:p>
+          <a:p>
+            <a:pPr marL="457200" indent="-457200" algn="just">
+              <a:buFont typeface="+mj-lt"/>
+              <a:buAutoNum type="arabicParenR"/>
+            </a:pPr>
+            <a:r>
+              <a:rPr lang="en-US" sz="2000" b="1" dirty="0">
+                <a:solidFill>
+                  <a:schemeClr val="bg1"/>
+                </a:solidFill>
+              </a:rPr>
+              <a:t>Batch Processor:</a:t>
+            </a:r>
+            <a:r>
+              <a:rPr lang="en-US" sz="2000" dirty="0">
+                <a:solidFill>
+                  <a:schemeClr val="bg1"/>
+                </a:solidFill>
+              </a:rPr>
+              <a:t> </a:t>
+            </a:r>
+            <a:r>
+              <a:rPr lang="en-US" dirty="0">
+                <a:solidFill>
+                  <a:schemeClr val="bg1"/>
+                </a:solidFill>
+              </a:rPr>
+              <a:t>Coordinates workflow for multiple images</a:t>
+            </a:r>
+          </a:p>
+          <a:p>
+            <a:endParaRPr lang="en-US" dirty="0"/>
+          </a:p>
+        </p:txBody>
+      </p:sp>
+    </p:spTree>
+    <p:extLst>
+      <p:ext uri="{BB962C8B-B14F-4D97-AF65-F5344CB8AC3E}">
+        <p14:creationId xmlns:p14="http://schemas.microsoft.com/office/powerpoint/2010/main" val="697871414"/>
+      </p:ext>
+    </p:extLst>
+  </p:cSld>
+  <p:clrMapOvr>
+    <a:masterClrMapping/>
+  </p:clrMapOvr>
+</p:sld>
+</file>
+
+<file path=ppt/slides/slide4.xml><?xml version="1.0" encoding="utf-8"?>
+<p:sld xmlns:a="http://schemas.openxmlformats.org/drawingml/2006/main" xmlns:r="http://schemas.openxmlformats.org/officeDocument/2006/relationships" xmlns:p="http://schemas.openxmlformats.org/presentationml/2006/main">
+  <p:cSld>
+    <p:spTree>
+      <p:nvGrpSpPr>
+        <p:cNvPr id="1" name="">
+          <a:extLst>
+            <a:ext uri="{FF2B5EF4-FFF2-40B4-BE49-F238E27FC236}">
+              <a16:creationId xmlns:a16="http://schemas.microsoft.com/office/drawing/2014/main" id="{33D722E9-7ACC-E452-7752-90CBFC98FC44}"/>
+            </a:ext>
+          </a:extLst>
+        </p:cNvPr>
+        <p:cNvGrpSpPr/>
+        <p:nvPr/>
+      </p:nvGrpSpPr>
+      <p:grpSpPr>
+        <a:xfrm>
+          <a:off x="0" y="0"/>
+          <a:ext cx="0" cy="0"/>
+          <a:chOff x="0" y="0"/>
+          <a:chExt cx="0" cy="0"/>
+        </a:xfrm>
+      </p:grpSpPr>
+      <p:pic>
+        <p:nvPicPr>
+          <p:cNvPr id="5" name="Picture 4" descr="A computer screen with a blue background&#10;&#10;AI-generated content may be incorrect.">
+            <a:extLst>
+              <a:ext uri="{FF2B5EF4-FFF2-40B4-BE49-F238E27FC236}">
+                <a16:creationId xmlns:a16="http://schemas.microsoft.com/office/drawing/2014/main" id="{0D6C378B-59CA-0393-8034-ECFAFB4BA65E}"/>
+              </a:ext>
+            </a:extLst>
+          </p:cNvPr>
+          <p:cNvPicPr>
+            <a:picLocks noChangeAspect="1"/>
+          </p:cNvPicPr>
+          <p:nvPr/>
+        </p:nvPicPr>
+        <p:blipFill>
+          <a:blip r:embed="rId2">
+            <a:extLst>
+              <a:ext uri="{28A0092B-C50C-407E-A947-70E740481C1C}">
+                <a14:useLocalDpi xmlns:a14="http://schemas.microsoft.com/office/drawing/2010/main" val="0"/>
+              </a:ext>
+            </a:extLst>
+          </a:blip>
+          <a:stretch>
+            <a:fillRect/>
+          </a:stretch>
+        </p:blipFill>
+        <p:spPr>
+          <a:xfrm>
+            <a:off x="0" y="0"/>
+            <a:ext cx="12192000" cy="6858000"/>
+          </a:xfrm>
+          <a:prstGeom prst="rect">
+            <a:avLst/>
+          </a:prstGeom>
+        </p:spPr>
+      </p:pic>
+      <p:sp>
+        <p:nvSpPr>
+          <p:cNvPr id="2" name="TextBox 1">
+            <a:extLst>
+              <a:ext uri="{FF2B5EF4-FFF2-40B4-BE49-F238E27FC236}">
+                <a16:creationId xmlns:a16="http://schemas.microsoft.com/office/drawing/2014/main" id="{F85067AD-592C-BDD4-D6EB-5DFEDF3A1CB7}"/>
+              </a:ext>
+            </a:extLst>
+          </p:cNvPr>
+          <p:cNvSpPr txBox="1"/>
+          <p:nvPr/>
+        </p:nvSpPr>
+        <p:spPr>
+          <a:xfrm>
+            <a:off x="144966" y="301302"/>
+            <a:ext cx="8552986" cy="646331"/>
+          </a:xfrm>
+          <a:prstGeom prst="rect">
+            <a:avLst/>
+          </a:prstGeom>
+          <a:noFill/>
+        </p:spPr>
+        <p:txBody>
+          <a:bodyPr wrap="square" rtlCol="0">
+            <a:spAutoFit/>
+          </a:bodyPr>
+          <a:lstStyle/>
+          <a:p>
+            <a:r>
+              <a:rPr lang="en-US" sz="3600" b="1" dirty="0">
+                <a:solidFill>
+                  <a:schemeClr val="bg1"/>
+                </a:solidFill>
+              </a:rPr>
+              <a:t>Implementation - Image Processing</a:t>
+            </a:r>
+          </a:p>
+        </p:txBody>
+      </p:sp>
+      <p:pic>
+        <p:nvPicPr>
+          <p:cNvPr id="4" name="Picture 3" descr="A computer screen shot of a program&#10;&#10;AI-generated content may be incorrect.">
+            <a:extLst>
+              <a:ext uri="{FF2B5EF4-FFF2-40B4-BE49-F238E27FC236}">
+                <a16:creationId xmlns:a16="http://schemas.microsoft.com/office/drawing/2014/main" id="{ED90DF35-8D26-A2D5-B479-00E553777F13}"/>
+              </a:ext>
+            </a:extLst>
+          </p:cNvPr>
+          <p:cNvPicPr>
+            <a:picLocks noChangeAspect="1"/>
+          </p:cNvPicPr>
+          <p:nvPr/>
+        </p:nvPicPr>
+        <p:blipFill>
+          <a:blip r:embed="rId3">
+            <a:extLst>
+              <a:ext uri="{28A0092B-C50C-407E-A947-70E740481C1C}">
+                <a14:useLocalDpi xmlns:a14="http://schemas.microsoft.com/office/drawing/2010/main" val="0"/>
+              </a:ext>
+            </a:extLst>
+          </a:blip>
+          <a:stretch>
+            <a:fillRect/>
+          </a:stretch>
+        </p:blipFill>
+        <p:spPr>
+          <a:xfrm>
+            <a:off x="413408" y="1622330"/>
+            <a:ext cx="5374075" cy="5046099"/>
+          </a:xfrm>
+          <a:prstGeom prst="rect">
+            <a:avLst/>
+          </a:prstGeom>
+        </p:spPr>
+      </p:pic>
+      <p:pic>
+        <p:nvPicPr>
+          <p:cNvPr id="7" name="Picture 6" descr="A computer screen shot of a program code&#10;&#10;AI-generated content may be incorrect.">
+            <a:extLst>
+              <a:ext uri="{FF2B5EF4-FFF2-40B4-BE49-F238E27FC236}">
+                <a16:creationId xmlns:a16="http://schemas.microsoft.com/office/drawing/2014/main" id="{D96C60AF-067B-A92D-CE79-0A1AD812765A}"/>
+              </a:ext>
+            </a:extLst>
+          </p:cNvPr>
+          <p:cNvPicPr>
+            <a:picLocks noChangeAspect="1"/>
+          </p:cNvPicPr>
+          <p:nvPr/>
+        </p:nvPicPr>
+        <p:blipFill>
+          <a:blip r:embed="rId4">
+            <a:extLst>
+              <a:ext uri="{28A0092B-C50C-407E-A947-70E740481C1C}">
+                <a14:useLocalDpi xmlns:a14="http://schemas.microsoft.com/office/drawing/2010/main" val="0"/>
+              </a:ext>
+            </a:extLst>
+          </a:blip>
+          <a:stretch>
+            <a:fillRect/>
+          </a:stretch>
+        </p:blipFill>
+        <p:spPr>
+          <a:xfrm>
+            <a:off x="6200891" y="1622329"/>
+            <a:ext cx="5374075" cy="5046100"/>
+          </a:xfrm>
+          <a:prstGeom prst="rect">
+            <a:avLst/>
+          </a:prstGeom>
+        </p:spPr>
+      </p:pic>
+    </p:spTree>
+    <p:extLst>
+      <p:ext uri="{BB962C8B-B14F-4D97-AF65-F5344CB8AC3E}">
+        <p14:creationId xmlns:p14="http://schemas.microsoft.com/office/powerpoint/2010/main" val="332038390"/>
+      </p:ext>
+    </p:extLst>
+  </p:cSld>
+  <p:clrMapOvr>
+    <a:masterClrMapping/>
+  </p:clrMapOvr>
+</p:sld>
+</file>
+
+<file path=ppt/slides/slide5.xml><?xml version="1.0" encoding="utf-8"?>
+<p:sld xmlns:a="http://schemas.openxmlformats.org/drawingml/2006/main" xmlns:r="http://schemas.openxmlformats.org/officeDocument/2006/relationships" xmlns:p="http://schemas.openxmlformats.org/presentationml/2006/main">
+  <p:cSld>
+    <p:spTree>
+      <p:nvGrpSpPr>
+        <p:cNvPr id="1" name="">
+          <a:extLst>
+            <a:ext uri="{FF2B5EF4-FFF2-40B4-BE49-F238E27FC236}">
+              <a16:creationId xmlns:a16="http://schemas.microsoft.com/office/drawing/2014/main" id="{C5818EDC-6D24-DD0D-35CE-32CEA2A51C2E}"/>
+            </a:ext>
+          </a:extLst>
+        </p:cNvPr>
+        <p:cNvGrpSpPr/>
+        <p:nvPr/>
+      </p:nvGrpSpPr>
+      <p:grpSpPr>
+        <a:xfrm>
+          <a:off x="0" y="0"/>
+          <a:ext cx="0" cy="0"/>
+          <a:chOff x="0" y="0"/>
+          <a:chExt cx="0" cy="0"/>
+        </a:xfrm>
+      </p:grpSpPr>
+      <p:pic>
+        <p:nvPicPr>
+          <p:cNvPr id="5" name="Picture 4" descr="A computer screen with a blue background&#10;&#10;AI-generated content may be incorrect.">
+            <a:extLst>
+              <a:ext uri="{FF2B5EF4-FFF2-40B4-BE49-F238E27FC236}">
+                <a16:creationId xmlns:a16="http://schemas.microsoft.com/office/drawing/2014/main" id="{5910292E-C48B-8662-5B31-C504AACB9C03}"/>
+              </a:ext>
+            </a:extLst>
+          </p:cNvPr>
+          <p:cNvPicPr>
+            <a:picLocks noChangeAspect="1"/>
+          </p:cNvPicPr>
+          <p:nvPr/>
+        </p:nvPicPr>
+        <p:blipFill>
+          <a:blip r:embed="rId2">
+            <a:extLst>
+              <a:ext uri="{28A0092B-C50C-407E-A947-70E740481C1C}">
+                <a14:useLocalDpi xmlns:a14="http://schemas.microsoft.com/office/drawing/2010/main" val="0"/>
+              </a:ext>
+            </a:extLst>
+          </a:blip>
+          <a:stretch>
+            <a:fillRect/>
+          </a:stretch>
+        </p:blipFill>
+        <p:spPr>
+          <a:xfrm>
+            <a:off x="0" y="0"/>
+            <a:ext cx="12192000" cy="6858000"/>
+          </a:xfrm>
+          <a:prstGeom prst="rect">
+            <a:avLst/>
+          </a:prstGeom>
+        </p:spPr>
+      </p:pic>
+      <p:sp>
+        <p:nvSpPr>
+          <p:cNvPr id="2" name="TextBox 1">
+            <a:extLst>
+              <a:ext uri="{FF2B5EF4-FFF2-40B4-BE49-F238E27FC236}">
+                <a16:creationId xmlns:a16="http://schemas.microsoft.com/office/drawing/2014/main" id="{7DDDA549-37D7-29DA-78E5-4DA0689AB13C}"/>
+              </a:ext>
+            </a:extLst>
+          </p:cNvPr>
+          <p:cNvSpPr txBox="1"/>
+          <p:nvPr/>
+        </p:nvSpPr>
+        <p:spPr>
+          <a:xfrm>
+            <a:off x="234175" y="323385"/>
+            <a:ext cx="10047249" cy="646331"/>
+          </a:xfrm>
+          <a:prstGeom prst="rect">
+            <a:avLst/>
+          </a:prstGeom>
+          <a:noFill/>
+        </p:spPr>
+        <p:txBody>
+          <a:bodyPr wrap="square" rtlCol="0">
+            <a:spAutoFit/>
+          </a:bodyPr>
+          <a:lstStyle/>
+          <a:p>
+            <a:r>
+              <a:rPr lang="en-US" sz="3600" b="1" dirty="0">
+                <a:solidFill>
+                  <a:schemeClr val="bg1"/>
+                </a:solidFill>
+              </a:rPr>
+              <a:t>Image Processing Transformations</a:t>
+            </a:r>
+            <a:endParaRPr lang="en-US" sz="3600" dirty="0">
+              <a:solidFill>
+                <a:schemeClr val="bg1"/>
+              </a:solidFill>
+            </a:endParaRPr>
+          </a:p>
+        </p:txBody>
+      </p:sp>
+      <p:sp>
+        <p:nvSpPr>
+          <p:cNvPr id="6" name="TextBox 5">
+            <a:extLst>
+              <a:ext uri="{FF2B5EF4-FFF2-40B4-BE49-F238E27FC236}">
+                <a16:creationId xmlns:a16="http://schemas.microsoft.com/office/drawing/2014/main" id="{220648C9-5724-8148-9819-5460B2B263AA}"/>
+              </a:ext>
+            </a:extLst>
+          </p:cNvPr>
+          <p:cNvSpPr txBox="1"/>
+          <p:nvPr/>
+        </p:nvSpPr>
+        <p:spPr>
+          <a:xfrm>
+            <a:off x="367990" y="1204332"/>
+            <a:ext cx="7705493" cy="5632311"/>
+          </a:xfrm>
+          <a:prstGeom prst="rect">
+            <a:avLst/>
+          </a:prstGeom>
+          <a:noFill/>
+        </p:spPr>
+        <p:txBody>
+          <a:bodyPr wrap="square" rtlCol="0">
+            <a:spAutoFit/>
+          </a:bodyPr>
+          <a:lstStyle/>
+          <a:p>
+            <a:pPr algn="just">
+              <a:buNone/>
+            </a:pPr>
+            <a:r>
+              <a:rPr lang="en-US" dirty="0">
+                <a:solidFill>
+                  <a:schemeClr val="bg1"/>
+                </a:solidFill>
+              </a:rPr>
+              <a:t>This code defines a list of transformations that are applied sequentially to an image:</a:t>
+            </a:r>
+          </a:p>
+          <a:p>
+            <a:pPr algn="just">
+              <a:buFont typeface="+mj-lt"/>
+              <a:buAutoNum type="arabicPeriod"/>
+            </a:pPr>
+            <a:r>
+              <a:rPr lang="en-US" b="1" dirty="0">
+                <a:solidFill>
+                  <a:schemeClr val="bg1"/>
+                </a:solidFill>
+              </a:rPr>
+              <a:t>No Transformation (Grayscale)</a:t>
+            </a:r>
+            <a:r>
+              <a:rPr lang="en-US" dirty="0">
+                <a:solidFill>
+                  <a:schemeClr val="bg1"/>
+                </a:solidFill>
+              </a:rPr>
+              <a:t>: Converts the image to grayscale.</a:t>
+            </a:r>
+          </a:p>
+          <a:p>
+            <a:pPr algn="just">
+              <a:buFont typeface="+mj-lt"/>
+              <a:buAutoNum type="arabicPeriod"/>
+            </a:pPr>
+            <a:r>
+              <a:rPr lang="en-US" b="1" dirty="0">
+                <a:solidFill>
+                  <a:schemeClr val="bg1"/>
+                </a:solidFill>
+              </a:rPr>
+              <a:t>Rotate 90°</a:t>
+            </a:r>
+            <a:r>
+              <a:rPr lang="en-US" dirty="0">
+                <a:solidFill>
+                  <a:schemeClr val="bg1"/>
+                </a:solidFill>
+              </a:rPr>
+              <a:t>: Converts to grayscale, then rotates the image 90°.</a:t>
+            </a:r>
+          </a:p>
+          <a:p>
+            <a:pPr algn="just">
+              <a:buFont typeface="+mj-lt"/>
+              <a:buAutoNum type="arabicPeriod"/>
+            </a:pPr>
+            <a:r>
+              <a:rPr lang="en-US" b="1" dirty="0">
+                <a:solidFill>
+                  <a:schemeClr val="bg1"/>
+                </a:solidFill>
+              </a:rPr>
+              <a:t>Rotate -90° (270°)</a:t>
+            </a:r>
+            <a:r>
+              <a:rPr lang="en-US" dirty="0">
+                <a:solidFill>
+                  <a:schemeClr val="bg1"/>
+                </a:solidFill>
+              </a:rPr>
+              <a:t>: Converts to grayscale, then rotates the image -90° (270°).</a:t>
+            </a:r>
+          </a:p>
+          <a:p>
+            <a:pPr algn="just">
+              <a:buFont typeface="+mj-lt"/>
+              <a:buAutoNum type="arabicPeriod"/>
+            </a:pPr>
+            <a:r>
+              <a:rPr lang="en-US" b="1" dirty="0">
+                <a:solidFill>
+                  <a:schemeClr val="bg1"/>
+                </a:solidFill>
+              </a:rPr>
+              <a:t>Rotate 15°</a:t>
+            </a:r>
+            <a:r>
+              <a:rPr lang="en-US" dirty="0">
+                <a:solidFill>
+                  <a:schemeClr val="bg1"/>
+                </a:solidFill>
+              </a:rPr>
+              <a:t>: Converts to grayscale, then rotates slightly clockwise (15°).</a:t>
+            </a:r>
+          </a:p>
+          <a:p>
+            <a:pPr algn="just">
+              <a:buFont typeface="+mj-lt"/>
+              <a:buAutoNum type="arabicPeriod"/>
+            </a:pPr>
+            <a:r>
+              <a:rPr lang="en-US" b="1" dirty="0">
+                <a:solidFill>
+                  <a:schemeClr val="bg1"/>
+                </a:solidFill>
+              </a:rPr>
+              <a:t>Rotate -15°</a:t>
+            </a:r>
+            <a:r>
+              <a:rPr lang="en-US" dirty="0">
+                <a:solidFill>
+                  <a:schemeClr val="bg1"/>
+                </a:solidFill>
+              </a:rPr>
+              <a:t>: Converts to grayscale, then rotates slightly counter-clockwise (-15°).</a:t>
+            </a:r>
+          </a:p>
+          <a:p>
+            <a:pPr algn="just">
+              <a:buFont typeface="+mj-lt"/>
+              <a:buAutoNum type="arabicPeriod"/>
+            </a:pPr>
+            <a:r>
+              <a:rPr lang="en-US" b="1" dirty="0">
+                <a:solidFill>
+                  <a:schemeClr val="bg1"/>
+                </a:solidFill>
+              </a:rPr>
+              <a:t>Horizontal Shift</a:t>
+            </a:r>
+            <a:r>
+              <a:rPr lang="en-US" dirty="0">
+                <a:solidFill>
+                  <a:schemeClr val="bg1"/>
+                </a:solidFill>
+              </a:rPr>
+              <a:t>: Converts to grayscale and shifts the image horizontally by cropping sides.</a:t>
+            </a:r>
+          </a:p>
+          <a:p>
+            <a:pPr algn="just">
+              <a:buFont typeface="+mj-lt"/>
+              <a:buAutoNum type="arabicPeriod"/>
+            </a:pPr>
+            <a:r>
+              <a:rPr lang="en-US" b="1" dirty="0">
+                <a:solidFill>
+                  <a:schemeClr val="bg1"/>
+                </a:solidFill>
+              </a:rPr>
+              <a:t>Vertical Shift</a:t>
+            </a:r>
+            <a:r>
+              <a:rPr lang="en-US" dirty="0">
+                <a:solidFill>
+                  <a:schemeClr val="bg1"/>
+                </a:solidFill>
+              </a:rPr>
+              <a:t>: Converts to grayscale and shifts the image vertically by cropping top and bottom.</a:t>
+            </a:r>
+          </a:p>
+          <a:p>
+            <a:pPr algn="just">
+              <a:buFont typeface="+mj-lt"/>
+              <a:buAutoNum type="arabicPeriod"/>
+            </a:pPr>
+            <a:r>
+              <a:rPr lang="en-US" b="1" dirty="0">
+                <a:solidFill>
+                  <a:schemeClr val="bg1"/>
+                </a:solidFill>
+              </a:rPr>
+              <a:t>Enhanced Contrast</a:t>
+            </a:r>
+            <a:r>
+              <a:rPr lang="en-US" dirty="0">
+                <a:solidFill>
+                  <a:schemeClr val="bg1"/>
+                </a:solidFill>
+              </a:rPr>
+              <a:t>: Converts to grayscale and enhances the contrast (1.5x).</a:t>
+            </a:r>
+          </a:p>
+          <a:p>
+            <a:pPr algn="just">
+              <a:buFont typeface="+mj-lt"/>
+              <a:buAutoNum type="arabicPeriod"/>
+            </a:pPr>
+            <a:r>
+              <a:rPr lang="en-US" b="1" dirty="0">
+                <a:solidFill>
+                  <a:schemeClr val="bg1"/>
+                </a:solidFill>
+              </a:rPr>
+              <a:t>Brightness Adjustment</a:t>
+            </a:r>
+            <a:r>
+              <a:rPr lang="en-US" dirty="0">
+                <a:solidFill>
+                  <a:schemeClr val="bg1"/>
+                </a:solidFill>
+              </a:rPr>
+              <a:t>: Converts to grayscale and adjusts the brightness (+20%).</a:t>
+            </a:r>
+          </a:p>
+          <a:p>
+            <a:pPr algn="just">
+              <a:buFont typeface="+mj-lt"/>
+              <a:buAutoNum type="arabicPeriod"/>
+            </a:pPr>
+            <a:r>
+              <a:rPr lang="en-US" b="1" dirty="0">
+                <a:solidFill>
+                  <a:schemeClr val="bg1"/>
+                </a:solidFill>
+              </a:rPr>
+              <a:t>Slight Skew</a:t>
+            </a:r>
+            <a:r>
+              <a:rPr lang="en-US" dirty="0">
+                <a:solidFill>
+                  <a:schemeClr val="bg1"/>
+                </a:solidFill>
+              </a:rPr>
+              <a:t>: Converts to grayscale and applies a slight 5° rotation as an alternative to skewing.</a:t>
+            </a:r>
+          </a:p>
+          <a:p>
+            <a:endParaRPr lang="en-US" dirty="0"/>
+          </a:p>
+        </p:txBody>
+      </p:sp>
+    </p:spTree>
+    <p:extLst>
+      <p:ext uri="{BB962C8B-B14F-4D97-AF65-F5344CB8AC3E}">
+        <p14:creationId xmlns:p14="http://schemas.microsoft.com/office/powerpoint/2010/main" val="2208408078"/>
+      </p:ext>
+    </p:extLst>
+  </p:cSld>
+  <p:clrMapOvr>
+    <a:masterClrMapping/>
+  </p:clrMapOvr>
+</p:sld>
+</file>
+
+<file path=ppt/slides/slide6.xml><?xml version="1.0" encoding="utf-8"?>
+<p:sld xmlns:a="http://schemas.openxmlformats.org/drawingml/2006/main" xmlns:r="http://schemas.openxmlformats.org/officeDocument/2006/relationships" xmlns:p="http://schemas.openxmlformats.org/presentationml/2006/main">
+  <p:cSld>
+    <p:spTree>
+      <p:nvGrpSpPr>
+        <p:cNvPr id="1" name="">
+          <a:extLst>
+            <a:ext uri="{FF2B5EF4-FFF2-40B4-BE49-F238E27FC236}">
+              <a16:creationId xmlns:a16="http://schemas.microsoft.com/office/drawing/2014/main" id="{02D15E8D-F10A-74A3-EB2C-C7CF5522360A}"/>
+            </a:ext>
+          </a:extLst>
+        </p:cNvPr>
+        <p:cNvGrpSpPr/>
+        <p:nvPr/>
+      </p:nvGrpSpPr>
+      <p:grpSpPr>
+        <a:xfrm>
+          <a:off x="0" y="0"/>
+          <a:ext cx="0" cy="0"/>
+          <a:chOff x="0" y="0"/>
+          <a:chExt cx="0" cy="0"/>
+        </a:xfrm>
+      </p:grpSpPr>
+      <p:pic>
+        <p:nvPicPr>
+          <p:cNvPr id="5" name="Picture 4" descr="A computer screen with a blue background&#10;&#10;AI-generated content may be incorrect.">
+            <a:extLst>
+              <a:ext uri="{FF2B5EF4-FFF2-40B4-BE49-F238E27FC236}">
+                <a16:creationId xmlns:a16="http://schemas.microsoft.com/office/drawing/2014/main" id="{82D79638-06B4-DA2F-CFF0-C01F361B7B01}"/>
+              </a:ext>
+            </a:extLst>
+          </p:cNvPr>
+          <p:cNvPicPr>
+            <a:picLocks noChangeAspect="1"/>
+          </p:cNvPicPr>
+          <p:nvPr/>
+        </p:nvPicPr>
+        <p:blipFill>
+          <a:blip r:embed="rId2">
+            <a:extLst>
+              <a:ext uri="{28A0092B-C50C-407E-A947-70E740481C1C}">
+                <a14:useLocalDpi xmlns:a14="http://schemas.microsoft.com/office/drawing/2010/main" val="0"/>
+              </a:ext>
+            </a:extLst>
+          </a:blip>
+          <a:stretch>
+            <a:fillRect/>
+          </a:stretch>
+        </p:blipFill>
+        <p:spPr>
+          <a:xfrm>
+            <a:off x="0" y="0"/>
+            <a:ext cx="12192000" cy="6858000"/>
+          </a:xfrm>
+          <a:prstGeom prst="rect">
+            <a:avLst/>
+          </a:prstGeom>
+        </p:spPr>
+      </p:pic>
+      <p:sp>
+        <p:nvSpPr>
+          <p:cNvPr id="2" name="TextBox 1">
+            <a:extLst>
+              <a:ext uri="{FF2B5EF4-FFF2-40B4-BE49-F238E27FC236}">
+                <a16:creationId xmlns:a16="http://schemas.microsoft.com/office/drawing/2014/main" id="{D6DC39EA-5577-661D-214B-8DE13D0661CE}"/>
+              </a:ext>
+            </a:extLst>
+          </p:cNvPr>
+          <p:cNvSpPr txBox="1"/>
+          <p:nvPr/>
+        </p:nvSpPr>
+        <p:spPr>
+          <a:xfrm>
+            <a:off x="356838" y="501804"/>
+            <a:ext cx="9244361" cy="646331"/>
+          </a:xfrm>
+          <a:prstGeom prst="rect">
+            <a:avLst/>
+          </a:prstGeom>
+          <a:noFill/>
+        </p:spPr>
+        <p:txBody>
+          <a:bodyPr wrap="square" rtlCol="0">
+            <a:spAutoFit/>
+          </a:bodyPr>
+          <a:lstStyle/>
+          <a:p>
+            <a:r>
+              <a:rPr lang="en-US" sz="3600" b="1" dirty="0">
+                <a:solidFill>
+                  <a:schemeClr val="bg1"/>
+                </a:solidFill>
+              </a:rPr>
+              <a:t>Text Extraction with Tesseract</a:t>
+            </a:r>
+          </a:p>
+        </p:txBody>
+      </p:sp>
+      <p:pic>
+        <p:nvPicPr>
+          <p:cNvPr id="6" name="Picture 5" descr="A screen shot of a computer program&#10;&#10;AI-generated content may be incorrect.">
+            <a:extLst>
+              <a:ext uri="{FF2B5EF4-FFF2-40B4-BE49-F238E27FC236}">
+                <a16:creationId xmlns:a16="http://schemas.microsoft.com/office/drawing/2014/main" id="{4CC8218E-2B00-CAAD-8B88-439D39EC3D58}"/>
+              </a:ext>
+            </a:extLst>
+          </p:cNvPr>
+          <p:cNvPicPr>
+            <a:picLocks noChangeAspect="1"/>
+          </p:cNvPicPr>
+          <p:nvPr/>
+        </p:nvPicPr>
+        <p:blipFill>
+          <a:blip r:embed="rId3">
+            <a:extLst>
+              <a:ext uri="{28A0092B-C50C-407E-A947-70E740481C1C}">
+                <a14:useLocalDpi xmlns:a14="http://schemas.microsoft.com/office/drawing/2010/main" val="0"/>
+              </a:ext>
+            </a:extLst>
+          </a:blip>
+          <a:stretch>
+            <a:fillRect/>
+          </a:stretch>
+        </p:blipFill>
+        <p:spPr>
+          <a:xfrm>
+            <a:off x="2059017" y="1386683"/>
+            <a:ext cx="7843266" cy="4835697"/>
+          </a:xfrm>
+          <a:prstGeom prst="rect">
+            <a:avLst/>
+          </a:prstGeom>
+        </p:spPr>
+      </p:pic>
+    </p:spTree>
+    <p:extLst>
+      <p:ext uri="{BB962C8B-B14F-4D97-AF65-F5344CB8AC3E}">
+        <p14:creationId xmlns:p14="http://schemas.microsoft.com/office/powerpoint/2010/main" val="4273845599"/>
+      </p:ext>
+    </p:extLst>
+  </p:cSld>
+  <p:clrMapOvr>
+    <a:masterClrMapping/>
+  </p:clrMapOvr>
+</p:sld>
+</file>
+
+<file path=ppt/slides/slide7.xml><?xml version="1.0" encoding="utf-8"?>
+<p:sld xmlns:a="http://schemas.openxmlformats.org/drawingml/2006/main" xmlns:r="http://schemas.openxmlformats.org/officeDocument/2006/relationships" xmlns:p="http://schemas.openxmlformats.org/presentationml/2006/main">
+  <p:cSld>
+    <p:spTree>
+      <p:nvGrpSpPr>
+        <p:cNvPr id="1" name="">
+          <a:extLst>
+            <a:ext uri="{FF2B5EF4-FFF2-40B4-BE49-F238E27FC236}">
+              <a16:creationId xmlns:a16="http://schemas.microsoft.com/office/drawing/2014/main" id="{46BD79A5-B3C3-33D5-49E5-521EA7562204}"/>
+            </a:ext>
+          </a:extLst>
+        </p:cNvPr>
+        <p:cNvGrpSpPr/>
+        <p:nvPr/>
+      </p:nvGrpSpPr>
+      <p:grpSpPr>
+        <a:xfrm>
+          <a:off x="0" y="0"/>
+          <a:ext cx="0" cy="0"/>
+          <a:chOff x="0" y="0"/>
+          <a:chExt cx="0" cy="0"/>
+        </a:xfrm>
+      </p:grpSpPr>
+      <p:pic>
+        <p:nvPicPr>
+          <p:cNvPr id="5" name="Picture 4" descr="A computer screen with a blue background&#10;&#10;AI-generated content may be incorrect.">
+            <a:extLst>
+              <a:ext uri="{FF2B5EF4-FFF2-40B4-BE49-F238E27FC236}">
+                <a16:creationId xmlns:a16="http://schemas.microsoft.com/office/drawing/2014/main" id="{04AA9D58-E244-B2E3-A042-10A7E1EC004B}"/>
+              </a:ext>
+            </a:extLst>
+          </p:cNvPr>
+          <p:cNvPicPr>
+            <a:picLocks noChangeAspect="1"/>
+          </p:cNvPicPr>
+          <p:nvPr/>
+        </p:nvPicPr>
+        <p:blipFill>
+          <a:blip r:embed="rId2">
+            <a:extLst>
+              <a:ext uri="{28A0092B-C50C-407E-A947-70E740481C1C}">
+                <a14:useLocalDpi xmlns:a14="http://schemas.microsoft.com/office/drawing/2010/main" val="0"/>
+              </a:ext>
+            </a:extLst>
+          </a:blip>
+          <a:stretch>
+            <a:fillRect/>
+          </a:stretch>
+        </p:blipFill>
+        <p:spPr>
+          <a:xfrm>
+            <a:off x="0" y="0"/>
+            <a:ext cx="12192000" cy="6858000"/>
+          </a:xfrm>
+          <a:prstGeom prst="rect">
+            <a:avLst/>
+          </a:prstGeom>
+        </p:spPr>
+      </p:pic>
+      <p:sp>
+        <p:nvSpPr>
+          <p:cNvPr id="2" name="TextBox 1">
+            <a:extLst>
+              <a:ext uri="{FF2B5EF4-FFF2-40B4-BE49-F238E27FC236}">
+                <a16:creationId xmlns:a16="http://schemas.microsoft.com/office/drawing/2014/main" id="{092BCD66-B492-1531-07D9-3002277EF275}"/>
+              </a:ext>
+            </a:extLst>
+          </p:cNvPr>
+          <p:cNvSpPr txBox="1"/>
+          <p:nvPr/>
+        </p:nvSpPr>
+        <p:spPr>
+          <a:xfrm>
+            <a:off x="323385" y="367990"/>
+            <a:ext cx="7616283" cy="646331"/>
+          </a:xfrm>
+          <a:prstGeom prst="rect">
+            <a:avLst/>
+          </a:prstGeom>
+          <a:noFill/>
+        </p:spPr>
+        <p:txBody>
+          <a:bodyPr wrap="square" rtlCol="0">
+            <a:spAutoFit/>
+          </a:bodyPr>
+          <a:lstStyle/>
+          <a:p>
+            <a:r>
+              <a:rPr lang="en-US" sz="3600" b="1" dirty="0">
+                <a:solidFill>
+                  <a:schemeClr val="bg1"/>
+                </a:solidFill>
+              </a:rPr>
+              <a:t>Tesseract OCR Configuration</a:t>
+            </a:r>
+          </a:p>
+        </p:txBody>
+      </p:sp>
+      <p:sp>
+        <p:nvSpPr>
+          <p:cNvPr id="9" name="TextBox 8">
+            <a:extLst>
+              <a:ext uri="{FF2B5EF4-FFF2-40B4-BE49-F238E27FC236}">
+                <a16:creationId xmlns:a16="http://schemas.microsoft.com/office/drawing/2014/main" id="{121EDC75-3499-2E6A-E1D0-E587CC31C3D7}"/>
+              </a:ext>
+            </a:extLst>
+          </p:cNvPr>
+          <p:cNvSpPr txBox="1"/>
+          <p:nvPr/>
+        </p:nvSpPr>
+        <p:spPr>
+          <a:xfrm>
+            <a:off x="490654" y="1650380"/>
+            <a:ext cx="8140390" cy="4339650"/>
+          </a:xfrm>
+          <a:prstGeom prst="rect">
+            <a:avLst/>
+          </a:prstGeom>
+          <a:noFill/>
+        </p:spPr>
+        <p:txBody>
+          <a:bodyPr wrap="square" rtlCol="0">
+            <a:spAutoFit/>
+          </a:bodyPr>
+          <a:lstStyle/>
+          <a:p>
+            <a:pPr algn="just">
+              <a:buNone/>
+            </a:pPr>
+            <a:r>
+              <a:rPr lang="en-US" sz="2000" b="1" dirty="0">
+                <a:solidFill>
+                  <a:schemeClr val="bg1"/>
+                </a:solidFill>
+              </a:rPr>
+              <a:t>Tesseract Engine Setup</a:t>
+            </a:r>
+            <a:r>
+              <a:rPr lang="en-US" sz="2000" dirty="0">
+                <a:solidFill>
+                  <a:schemeClr val="bg1"/>
+                </a:solidFill>
+              </a:rPr>
+              <a:t>:</a:t>
+            </a:r>
+          </a:p>
+          <a:p>
+            <a:pPr marL="285750" indent="-285750" algn="just">
+              <a:buFont typeface="Wingdings" panose="05000000000000000000" pitchFamily="2" charset="2"/>
+              <a:buChar char="§"/>
+            </a:pPr>
+            <a:r>
+              <a:rPr lang="en-US" dirty="0">
+                <a:solidFill>
+                  <a:schemeClr val="bg1"/>
+                </a:solidFill>
+              </a:rPr>
+              <a:t>Initializes with English language and </a:t>
+            </a:r>
+            <a:r>
+              <a:rPr lang="en-US" b="1" dirty="0">
+                <a:solidFill>
+                  <a:schemeClr val="bg1"/>
+                </a:solidFill>
+              </a:rPr>
+              <a:t>Default</a:t>
+            </a:r>
+            <a:r>
+              <a:rPr lang="en-US" dirty="0">
+                <a:solidFill>
+                  <a:schemeClr val="bg1"/>
+                </a:solidFill>
+              </a:rPr>
+              <a:t> mode.</a:t>
+            </a:r>
+          </a:p>
+          <a:p>
+            <a:pPr marL="285750" indent="-285750" algn="just">
+              <a:buFont typeface="Wingdings" panose="05000000000000000000" pitchFamily="2" charset="2"/>
+              <a:buChar char="§"/>
+            </a:pPr>
+            <a:r>
+              <a:rPr lang="en-US" dirty="0">
+                <a:solidFill>
+                  <a:schemeClr val="bg1"/>
+                </a:solidFill>
+              </a:rPr>
+              <a:t>Configures settings for better recognition (e.g., interworld spaces, allowed characters, 300 DPI, and OCR engine mode).</a:t>
+            </a:r>
+          </a:p>
+          <a:p>
+            <a:pPr algn="just"/>
+            <a:endParaRPr lang="en-US" dirty="0">
+              <a:solidFill>
+                <a:schemeClr val="bg1"/>
+              </a:solidFill>
+            </a:endParaRPr>
+          </a:p>
+          <a:p>
+            <a:pPr algn="just"/>
+            <a:r>
+              <a:rPr lang="en-US" sz="2000" b="1" dirty="0">
+                <a:solidFill>
+                  <a:schemeClr val="bg1"/>
+                </a:solidFill>
+              </a:rPr>
+              <a:t>Image Loading</a:t>
+            </a:r>
+            <a:r>
+              <a:rPr lang="en-US" sz="2000" dirty="0">
+                <a:solidFill>
+                  <a:schemeClr val="bg1"/>
+                </a:solidFill>
+              </a:rPr>
+              <a:t>:</a:t>
+            </a:r>
+          </a:p>
+          <a:p>
+            <a:pPr marL="285750" indent="-285750" algn="just">
+              <a:buFont typeface="Wingdings" panose="05000000000000000000" pitchFamily="2" charset="2"/>
+              <a:buChar char="§"/>
+            </a:pPr>
+            <a:r>
+              <a:rPr lang="en-US" dirty="0">
+                <a:solidFill>
+                  <a:schemeClr val="bg1"/>
+                </a:solidFill>
+              </a:rPr>
+              <a:t>Loads the image </a:t>
+            </a:r>
+            <a:r>
+              <a:rPr lang="en-US" b="1" dirty="0" err="1">
+                <a:solidFill>
+                  <a:schemeClr val="bg1"/>
+                </a:solidFill>
+              </a:rPr>
+              <a:t>usingPix.LoadFromFile</a:t>
+            </a:r>
+            <a:r>
+              <a:rPr lang="en-US" b="1" dirty="0">
+                <a:solidFill>
+                  <a:schemeClr val="bg1"/>
+                </a:solidFill>
+              </a:rPr>
+              <a:t>(</a:t>
+            </a:r>
+            <a:r>
+              <a:rPr lang="en-US" b="1" dirty="0" err="1">
+                <a:solidFill>
+                  <a:schemeClr val="bg1"/>
+                </a:solidFill>
+              </a:rPr>
+              <a:t>imagePath</a:t>
+            </a:r>
+            <a:r>
+              <a:rPr lang="en-US" b="1" dirty="0">
+                <a:solidFill>
+                  <a:schemeClr val="bg1"/>
+                </a:solidFill>
+              </a:rPr>
+              <a:t>). </a:t>
+            </a:r>
+            <a:r>
+              <a:rPr lang="en-US" dirty="0">
+                <a:solidFill>
+                  <a:schemeClr val="bg1"/>
+                </a:solidFill>
+              </a:rPr>
+              <a:t>Throws error if failed.</a:t>
+            </a:r>
+          </a:p>
+          <a:p>
+            <a:pPr marL="285750" indent="-285750" algn="just">
+              <a:buFont typeface="Wingdings" panose="05000000000000000000" pitchFamily="2" charset="2"/>
+              <a:buChar char="§"/>
+            </a:pPr>
+            <a:endParaRPr lang="en-US" dirty="0">
+              <a:solidFill>
+                <a:schemeClr val="bg1"/>
+              </a:solidFill>
+            </a:endParaRPr>
+          </a:p>
+          <a:p>
+            <a:pPr algn="just">
+              <a:buNone/>
+            </a:pPr>
+            <a:r>
+              <a:rPr lang="en-US" sz="2000" b="1" dirty="0">
+                <a:solidFill>
+                  <a:schemeClr val="bg1"/>
+                </a:solidFill>
+              </a:rPr>
+              <a:t>Text Extraction</a:t>
+            </a:r>
+            <a:r>
+              <a:rPr lang="en-US" sz="2000" dirty="0">
+                <a:solidFill>
+                  <a:schemeClr val="bg1"/>
+                </a:solidFill>
+              </a:rPr>
+              <a:t>:</a:t>
+            </a:r>
+          </a:p>
+          <a:p>
+            <a:pPr marL="285750" indent="-285750" algn="just">
+              <a:buFont typeface="Wingdings" panose="05000000000000000000" pitchFamily="2" charset="2"/>
+              <a:buChar char="§"/>
+            </a:pPr>
+            <a:r>
+              <a:rPr lang="en-US" dirty="0">
+                <a:solidFill>
+                  <a:schemeClr val="bg1"/>
+                </a:solidFill>
+              </a:rPr>
+              <a:t>Processes the image, extracts text, and calculates confidence.</a:t>
+            </a:r>
+          </a:p>
+          <a:p>
+            <a:pPr marL="285750" indent="-285750" algn="just">
+              <a:buFont typeface="Wingdings" panose="05000000000000000000" pitchFamily="2" charset="2"/>
+              <a:buChar char="§"/>
+            </a:pPr>
+            <a:r>
+              <a:rPr lang="en-US" dirty="0">
+                <a:solidFill>
+                  <a:schemeClr val="bg1"/>
+                </a:solidFill>
+              </a:rPr>
+              <a:t>If text is found, it’s post-processed, and a sample is displayed. If not, shows a warning.</a:t>
+            </a:r>
+          </a:p>
+          <a:p>
+            <a:pPr algn="just"/>
+            <a:endParaRPr lang="en-US" dirty="0">
+              <a:solidFill>
+                <a:schemeClr val="bg1"/>
+              </a:solidFill>
+            </a:endParaRPr>
+          </a:p>
+          <a:p>
+            <a:pPr algn="just"/>
+            <a:endParaRPr lang="en-US" sz="2000" dirty="0">
+              <a:solidFill>
+                <a:schemeClr val="bg1"/>
+              </a:solidFill>
+            </a:endParaRPr>
+          </a:p>
+          <a:p>
+            <a:pPr algn="just"/>
+            <a:endParaRPr lang="en-US" dirty="0"/>
+          </a:p>
+        </p:txBody>
+      </p:sp>
+    </p:spTree>
+    <p:extLst>
+      <p:ext uri="{BB962C8B-B14F-4D97-AF65-F5344CB8AC3E}">
+        <p14:creationId xmlns:p14="http://schemas.microsoft.com/office/powerpoint/2010/main" val="1406709416"/>
+      </p:ext>
+    </p:extLst>
+  </p:cSld>
+  <p:clrMapOvr>
+    <a:masterClrMapping/>
+  </p:clrMapOvr>
+</p:sld>
+</file>
+
+<file path=ppt/slides/slide8.xml><?xml version="1.0" encoding="utf-8"?>
+<p:sld xmlns:a="http://schemas.openxmlformats.org/drawingml/2006/main" xmlns:r="http://schemas.openxmlformats.org/officeDocument/2006/relationships" xmlns:p="http://schemas.openxmlformats.org/presentationml/2006/main">
+  <p:cSld>
+    <p:spTree>
+      <p:nvGrpSpPr>
+        <p:cNvPr id="1" name="">
+          <a:extLst>
+            <a:ext uri="{FF2B5EF4-FFF2-40B4-BE49-F238E27FC236}">
+              <a16:creationId xmlns:a16="http://schemas.microsoft.com/office/drawing/2014/main" id="{5890ECC2-A7A9-2510-295E-6C19ACA92931}"/>
+            </a:ext>
+          </a:extLst>
+        </p:cNvPr>
+        <p:cNvGrpSpPr/>
+        <p:nvPr/>
+      </p:nvGrpSpPr>
+      <p:grpSpPr>
+        <a:xfrm>
+          <a:off x="0" y="0"/>
+          <a:ext cx="0" cy="0"/>
+          <a:chOff x="0" y="0"/>
+          <a:chExt cx="0" cy="0"/>
+        </a:xfrm>
+      </p:grpSpPr>
+      <p:pic>
+        <p:nvPicPr>
+          <p:cNvPr id="5" name="Picture 4" descr="A computer screen with a blue background&#10;&#10;AI-generated content may be incorrect.">
+            <a:extLst>
+              <a:ext uri="{FF2B5EF4-FFF2-40B4-BE49-F238E27FC236}">
+                <a16:creationId xmlns:a16="http://schemas.microsoft.com/office/drawing/2014/main" id="{8CB6C4DB-4785-C3DB-16BD-7416CCC3A10F}"/>
+              </a:ext>
+            </a:extLst>
+          </p:cNvPr>
+          <p:cNvPicPr>
+            <a:picLocks noChangeAspect="1"/>
+          </p:cNvPicPr>
+          <p:nvPr/>
+        </p:nvPicPr>
+        <p:blipFill>
+          <a:blip r:embed="rId2">
+            <a:extLst>
+              <a:ext uri="{28A0092B-C50C-407E-A947-70E740481C1C}">
+                <a14:useLocalDpi xmlns:a14="http://schemas.microsoft.com/office/drawing/2010/main" val="0"/>
+              </a:ext>
+            </a:extLst>
+          </a:blip>
+          <a:stretch>
+            <a:fillRect/>
+          </a:stretch>
+        </p:blipFill>
+        <p:spPr>
+          <a:xfrm>
+            <a:off x="0" y="0"/>
+            <a:ext cx="12192000" cy="6858000"/>
+          </a:xfrm>
+          <a:prstGeom prst="rect">
+            <a:avLst/>
+          </a:prstGeom>
+        </p:spPr>
+      </p:pic>
+      <p:sp>
+        <p:nvSpPr>
+          <p:cNvPr id="2" name="TextBox 1">
+            <a:extLst>
+              <a:ext uri="{FF2B5EF4-FFF2-40B4-BE49-F238E27FC236}">
+                <a16:creationId xmlns:a16="http://schemas.microsoft.com/office/drawing/2014/main" id="{252A9FA7-A087-F644-FBD3-D33F29A8E6FB}"/>
+              </a:ext>
+            </a:extLst>
+          </p:cNvPr>
+          <p:cNvSpPr txBox="1"/>
+          <p:nvPr/>
+        </p:nvSpPr>
+        <p:spPr>
+          <a:xfrm>
+            <a:off x="323386" y="579863"/>
+            <a:ext cx="7460166" cy="646331"/>
+          </a:xfrm>
+          <a:prstGeom prst="rect">
+            <a:avLst/>
+          </a:prstGeom>
+          <a:noFill/>
+        </p:spPr>
+        <p:txBody>
+          <a:bodyPr wrap="square" rtlCol="0">
+            <a:spAutoFit/>
+          </a:bodyPr>
+          <a:lstStyle/>
+          <a:p>
+            <a:r>
+              <a:rPr lang="en-US" sz="3600" b="1" dirty="0">
+                <a:solidFill>
+                  <a:schemeClr val="bg1"/>
+                </a:solidFill>
+              </a:rPr>
+              <a:t>Batch Processing Workflow</a:t>
+            </a:r>
+          </a:p>
+        </p:txBody>
+      </p:sp>
+      <p:sp>
+        <p:nvSpPr>
+          <p:cNvPr id="3" name="TextBox 2">
+            <a:extLst>
+              <a:ext uri="{FF2B5EF4-FFF2-40B4-BE49-F238E27FC236}">
+                <a16:creationId xmlns:a16="http://schemas.microsoft.com/office/drawing/2014/main" id="{ED585CB4-86A5-4510-51F4-9F8756646B47}"/>
+              </a:ext>
+            </a:extLst>
+          </p:cNvPr>
+          <p:cNvSpPr txBox="1"/>
+          <p:nvPr/>
+        </p:nvSpPr>
+        <p:spPr>
+          <a:xfrm>
+            <a:off x="557561" y="1427356"/>
+            <a:ext cx="5765180" cy="2954655"/>
+          </a:xfrm>
+          <a:prstGeom prst="rect">
+            <a:avLst/>
+          </a:prstGeom>
+          <a:noFill/>
+        </p:spPr>
+        <p:txBody>
+          <a:bodyPr wrap="square" rtlCol="0">
+            <a:spAutoFit/>
+          </a:bodyPr>
+          <a:lstStyle/>
+          <a:p>
+            <a:pPr>
+              <a:buNone/>
+            </a:pPr>
+            <a:r>
+              <a:rPr lang="en-US" b="1" dirty="0">
+                <a:solidFill>
+                  <a:schemeClr val="bg1"/>
+                </a:solidFill>
+              </a:rPr>
+              <a:t>Process Fl</a:t>
+            </a:r>
+            <a:r>
+              <a:rPr lang="en-US" sz="2000" b="1" dirty="0">
+                <a:solidFill>
+                  <a:schemeClr val="bg1"/>
+                </a:solidFill>
+              </a:rPr>
+              <a:t>ow:</a:t>
+            </a:r>
+            <a:endParaRPr lang="en-US" sz="2000" dirty="0">
+              <a:solidFill>
+                <a:schemeClr val="bg1"/>
+              </a:solidFill>
+            </a:endParaRPr>
+          </a:p>
+          <a:p>
+            <a:pPr marL="285750" indent="-285750">
+              <a:buFont typeface="Wingdings" panose="05000000000000000000" pitchFamily="2" charset="2"/>
+              <a:buChar char="q"/>
+            </a:pPr>
+            <a:r>
+              <a:rPr lang="en-US" dirty="0">
+                <a:solidFill>
+                  <a:schemeClr val="bg1"/>
+                </a:solidFill>
+              </a:rPr>
+              <a:t>Load images from input folder</a:t>
+            </a:r>
+          </a:p>
+          <a:p>
+            <a:pPr marL="285750" indent="-285750">
+              <a:buFont typeface="Wingdings" panose="05000000000000000000" pitchFamily="2" charset="2"/>
+              <a:buChar char="q"/>
+            </a:pPr>
+            <a:r>
+              <a:rPr lang="en-US" dirty="0">
+                <a:solidFill>
+                  <a:schemeClr val="bg1"/>
+                </a:solidFill>
+              </a:rPr>
+              <a:t>Apply multiple transformations to each image</a:t>
+            </a:r>
+          </a:p>
+          <a:p>
+            <a:pPr marL="285750" indent="-285750">
+              <a:buFont typeface="Wingdings" panose="05000000000000000000" pitchFamily="2" charset="2"/>
+              <a:buChar char="q"/>
+            </a:pPr>
+            <a:r>
+              <a:rPr lang="en-US" dirty="0">
+                <a:solidFill>
+                  <a:schemeClr val="bg1"/>
+                </a:solidFill>
+              </a:rPr>
+              <a:t>Extract text from each processed version</a:t>
+            </a:r>
+          </a:p>
+          <a:p>
+            <a:pPr marL="285750" indent="-285750">
+              <a:buFont typeface="Wingdings" panose="05000000000000000000" pitchFamily="2" charset="2"/>
+              <a:buChar char="q"/>
+            </a:pPr>
+            <a:r>
+              <a:rPr lang="en-US" dirty="0">
+                <a:solidFill>
+                  <a:schemeClr val="bg1"/>
+                </a:solidFill>
+              </a:rPr>
+              <a:t>Save extracted text to output folder</a:t>
+            </a:r>
+          </a:p>
+          <a:p>
+            <a:pPr marL="285750" indent="-285750">
+              <a:buFont typeface="Wingdings" panose="05000000000000000000" pitchFamily="2" charset="2"/>
+              <a:buChar char="q"/>
+            </a:pPr>
+            <a:r>
+              <a:rPr lang="en-US" dirty="0">
+                <a:solidFill>
+                  <a:schemeClr val="bg1"/>
+                </a:solidFill>
+              </a:rPr>
+              <a:t>Fall back to original image if processing fails</a:t>
+            </a:r>
+          </a:p>
+          <a:p>
+            <a:endParaRPr lang="en-US" dirty="0">
+              <a:solidFill>
+                <a:schemeClr val="bg1"/>
+              </a:solidFill>
+            </a:endParaRPr>
+          </a:p>
+          <a:p>
+            <a:r>
+              <a:rPr lang="en-US" sz="2000" b="1" dirty="0">
+                <a:solidFill>
+                  <a:schemeClr val="bg1"/>
+                </a:solidFill>
+              </a:rPr>
+              <a:t>Error Handling:</a:t>
+            </a:r>
+          </a:p>
+          <a:p>
+            <a:endParaRPr lang="en-US" sz="2000" b="1" dirty="0">
+              <a:solidFill>
+                <a:schemeClr val="bg1"/>
+              </a:solidFill>
+            </a:endParaRPr>
+          </a:p>
+          <a:p>
+            <a:endParaRPr lang="en-US" dirty="0"/>
+          </a:p>
+        </p:txBody>
+      </p:sp>
+      <p:pic>
+        <p:nvPicPr>
+          <p:cNvPr id="6" name="Picture 5" descr="A screen shot of a computer&#10;&#10;AI-generated content may be incorrect.">
+            <a:extLst>
+              <a:ext uri="{FF2B5EF4-FFF2-40B4-BE49-F238E27FC236}">
+                <a16:creationId xmlns:a16="http://schemas.microsoft.com/office/drawing/2014/main" id="{F4D8F264-FECE-32B5-1BD4-43A4586D998D}"/>
+              </a:ext>
+            </a:extLst>
+          </p:cNvPr>
+          <p:cNvPicPr>
+            <a:picLocks noChangeAspect="1"/>
+          </p:cNvPicPr>
+          <p:nvPr/>
+        </p:nvPicPr>
+        <p:blipFill>
+          <a:blip r:embed="rId3">
+            <a:extLst>
+              <a:ext uri="{28A0092B-C50C-407E-A947-70E740481C1C}">
+                <a14:useLocalDpi xmlns:a14="http://schemas.microsoft.com/office/drawing/2010/main" val="0"/>
+              </a:ext>
+            </a:extLst>
+          </a:blip>
+          <a:stretch>
+            <a:fillRect/>
+          </a:stretch>
+        </p:blipFill>
+        <p:spPr>
+          <a:xfrm>
+            <a:off x="666711" y="3999084"/>
+            <a:ext cx="6536977" cy="1342350"/>
+          </a:xfrm>
+          <a:prstGeom prst="rect">
+            <a:avLst/>
+          </a:prstGeom>
+        </p:spPr>
+      </p:pic>
+    </p:spTree>
+    <p:extLst>
+      <p:ext uri="{BB962C8B-B14F-4D97-AF65-F5344CB8AC3E}">
+        <p14:creationId xmlns:p14="http://schemas.microsoft.com/office/powerpoint/2010/main" val="1140946794"/>
+      </p:ext>
+    </p:extLst>
+  </p:cSld>
+  <p:clrMapOvr>
+    <a:masterClrMapping/>
+  </p:clrMapOvr>
+</p:sld>
+</file>
+
+<file path=ppt/slides/slide9.xml><?xml version="1.0" encoding="utf-8"?>
+<p:sld xmlns:a="http://schemas.openxmlformats.org/drawingml/2006/main" xmlns:r="http://schemas.openxmlformats.org/officeDocument/2006/relationships" xmlns:p="http://schemas.openxmlformats.org/presentationml/2006/main">
+  <p:cSld>
+    <p:spTree>
+      <p:nvGrpSpPr>
+        <p:cNvPr id="1" name=""/>
+        <p:cNvGrpSpPr/>
+        <p:nvPr/>
+      </p:nvGrpSpPr>
+      <p:grpSpPr>
+        <a:xfrm>
+          <a:off x="0" y="0"/>
+          <a:ext cx="0" cy="0"/>
+          <a:chOff x="0" y="0"/>
+          <a:chExt cx="0" cy="0"/>
+        </a:xfrm>
+      </p:grpSpPr>
+      <p:pic>
+        <p:nvPicPr>
+          <p:cNvPr id="3" name="Picture 2" descr="A computer screen with a blue background&#10;&#10;AI-generated content may be incorrect.">
+            <a:extLst>
+              <a:ext uri="{FF2B5EF4-FFF2-40B4-BE49-F238E27FC236}">
+                <a16:creationId xmlns:a16="http://schemas.microsoft.com/office/drawing/2014/main" id="{CCAB805E-8BC0-187C-C05B-C1ABCE3BC391}"/>
+              </a:ext>
+            </a:extLst>
+          </p:cNvPr>
+          <p:cNvPicPr>
+            <a:picLocks noChangeAspect="1"/>
+          </p:cNvPicPr>
+          <p:nvPr/>
+        </p:nvPicPr>
+        <p:blipFill>
+          <a:blip r:embed="rId2">
+            <a:extLst>
+              <a:ext uri="{28A0092B-C50C-407E-A947-70E740481C1C}">
+                <a14:useLocalDpi xmlns:a14="http://schemas.microsoft.com/office/drawing/2010/main" val="0"/>
+              </a:ext>
+            </a:extLst>
+          </a:blip>
+          <a:stretch>
+            <a:fillRect/>
+          </a:stretch>
+        </p:blipFill>
+        <p:spPr>
+          <a:xfrm>
+            <a:off x="0" y="0"/>
+            <a:ext cx="12192000" cy="6958361"/>
+          </a:xfrm>
+          <a:prstGeom prst="rect">
+            <a:avLst/>
+          </a:prstGeom>
+        </p:spPr>
+      </p:pic>
+      <p:sp>
+        <p:nvSpPr>
+          <p:cNvPr id="4" name="TextBox 3">
+            <a:extLst>
+              <a:ext uri="{FF2B5EF4-FFF2-40B4-BE49-F238E27FC236}">
+                <a16:creationId xmlns:a16="http://schemas.microsoft.com/office/drawing/2014/main" id="{CCF86807-66AF-9FB0-9E5C-420F9854BE19}"/>
+              </a:ext>
+            </a:extLst>
+          </p:cNvPr>
+          <p:cNvSpPr txBox="1"/>
+          <p:nvPr/>
+        </p:nvSpPr>
+        <p:spPr>
+          <a:xfrm>
+            <a:off x="591015" y="557560"/>
+            <a:ext cx="5988205" cy="646331"/>
+          </a:xfrm>
+          <a:prstGeom prst="rect">
+            <a:avLst/>
+          </a:prstGeom>
+          <a:noFill/>
+        </p:spPr>
+        <p:txBody>
+          <a:bodyPr wrap="square" rtlCol="0">
+            <a:spAutoFit/>
+          </a:bodyPr>
+          <a:lstStyle/>
+          <a:p>
+            <a:r>
+              <a:rPr lang="en-US" sz="3600" b="1" dirty="0">
+                <a:solidFill>
+                  <a:schemeClr val="bg1"/>
+                </a:solidFill>
+              </a:rPr>
+              <a:t>Output of the Project:</a:t>
+            </a:r>
+          </a:p>
+        </p:txBody>
+      </p:sp>
+      <p:pic>
+        <p:nvPicPr>
+          <p:cNvPr id="6" name="Picture 5" descr="A screenshot of a computer program&#10;&#10;AI-generated content may be incorrect.">
+            <a:extLst>
+              <a:ext uri="{FF2B5EF4-FFF2-40B4-BE49-F238E27FC236}">
+                <a16:creationId xmlns:a16="http://schemas.microsoft.com/office/drawing/2014/main" id="{30AE157F-A35F-E44F-0D11-AAF92BF3F619}"/>
+              </a:ext>
+            </a:extLst>
+          </p:cNvPr>
+          <p:cNvPicPr>
+            <a:picLocks noChangeAspect="1"/>
+          </p:cNvPicPr>
+          <p:nvPr/>
+        </p:nvPicPr>
+        <p:blipFill>
+          <a:blip r:embed="rId3">
+            <a:extLst>
+              <a:ext uri="{28A0092B-C50C-407E-A947-70E740481C1C}">
+                <a14:useLocalDpi xmlns:a14="http://schemas.microsoft.com/office/drawing/2010/main" val="0"/>
+              </a:ext>
+            </a:extLst>
+          </a:blip>
+          <a:stretch>
+            <a:fillRect/>
+          </a:stretch>
+        </p:blipFill>
+        <p:spPr>
+          <a:xfrm>
+            <a:off x="1950697" y="1761451"/>
+            <a:ext cx="8290605" cy="4216617"/>
+          </a:xfrm>
+          <a:prstGeom prst="rect">
+            <a:avLst/>
+          </a:prstGeom>
+        </p:spPr>
+      </p:pic>
+    </p:spTree>
+    <p:extLst>
+      <p:ext uri="{BB962C8B-B14F-4D97-AF65-F5344CB8AC3E}">
+        <p14:creationId xmlns:p14="http://schemas.microsoft.com/office/powerpoint/2010/main" val="1294054836"/>
       </p:ext>
     </p:extLst>
   </p:cSld>

--- a/source/MySEProject/Documentation/Fusion_CodersPPT.pptx
+++ b/source/MySEProject/Documentation/Fusion_CodersPPT.pptx
@@ -5,7 +5,7 @@
     <p:sldMasterId id="2147483725" r:id="rId1"/>
   </p:sldMasterIdLst>
   <p:sldIdLst>
-    <p:sldId id="257" r:id="rId2"/>
+    <p:sldId id="269" r:id="rId2"/>
     <p:sldId id="258" r:id="rId3"/>
     <p:sldId id="259" r:id="rId4"/>
     <p:sldId id="261" r:id="rId5"/>
@@ -16,6 +16,7 @@
     <p:sldId id="268" r:id="rId10"/>
     <p:sldId id="266" r:id="rId11"/>
     <p:sldId id="267" r:id="rId12"/>
+    <p:sldId id="270" r:id="rId13"/>
   </p:sldIdLst>
   <p:sldSz cx="12192000" cy="6858000"/>
   <p:notesSz cx="6858000" cy="9144000"/>
@@ -4903,61 +4904,12 @@
           <a:chExt cx="0" cy="0"/>
         </a:xfrm>
       </p:grpSpPr>
-      <p:sp>
-        <p:nvSpPr>
-          <p:cNvPr id="6" name="Rectangle 5">
-            <a:extLst>
-              <a:ext uri="{FF2B5EF4-FFF2-40B4-BE49-F238E27FC236}">
-                <a16:creationId xmlns:a16="http://schemas.microsoft.com/office/drawing/2014/main" id="{E73608F1-1F9E-C999-585E-EB12261C5F3A}"/>
-              </a:ext>
-            </a:extLst>
-          </p:cNvPr>
-          <p:cNvSpPr/>
-          <p:nvPr/>
-        </p:nvSpPr>
-        <p:spPr>
-          <a:xfrm>
-            <a:off x="0" y="0"/>
-            <a:ext cx="12192000" cy="6858000"/>
-          </a:xfrm>
-          <a:prstGeom prst="rect">
-            <a:avLst/>
-          </a:prstGeom>
-          <a:solidFill>
-            <a:srgbClr val="010811"/>
-          </a:solidFill>
-        </p:spPr>
-        <p:style>
-          <a:lnRef idx="2">
-            <a:schemeClr val="accent1">
-              <a:shade val="15000"/>
-            </a:schemeClr>
-          </a:lnRef>
-          <a:fillRef idx="1">
-            <a:schemeClr val="accent1"/>
-          </a:fillRef>
-          <a:effectRef idx="0">
-            <a:schemeClr val="accent1"/>
-          </a:effectRef>
-          <a:fontRef idx="minor">
-            <a:schemeClr val="lt1"/>
-          </a:fontRef>
-        </p:style>
-        <p:txBody>
-          <a:bodyPr rtlCol="0" anchor="ctr"/>
-          <a:lstStyle/>
-          <a:p>
-            <a:pPr algn="ctr"/>
-            <a:endParaRPr lang="en-US"/>
-          </a:p>
-        </p:txBody>
-      </p:sp>
       <p:pic>
         <p:nvPicPr>
-          <p:cNvPr id="8" name="Picture 7" descr="A group of women working on computers&#10;&#10;AI-generated content may be incorrect.">
-            <a:extLst>
-              <a:ext uri="{FF2B5EF4-FFF2-40B4-BE49-F238E27FC236}">
-                <a16:creationId xmlns:a16="http://schemas.microsoft.com/office/drawing/2014/main" id="{BAEA4822-6F97-2D79-F20C-5D76D9C01DB3}"/>
+          <p:cNvPr id="7" name="Picture 6" descr="A screenshot of a phone&#10;&#10;AI-generated content may be incorrect.">
+            <a:extLst>
+              <a:ext uri="{FF2B5EF4-FFF2-40B4-BE49-F238E27FC236}">
+                <a16:creationId xmlns:a16="http://schemas.microsoft.com/office/drawing/2014/main" id="{76998AC3-6D37-0FBF-5ED2-25CAD30EE3CE}"/>
               </a:ext>
             </a:extLst>
           </p:cNvPr>
@@ -4980,151 +4932,178 @@
         </p:blipFill>
         <p:spPr>
           <a:xfrm>
-            <a:off x="6096001" y="1338147"/>
-            <a:ext cx="5850674" cy="4605453"/>
+            <a:off x="-1" y="-1"/>
+            <a:ext cx="10707659" cy="6966699"/>
           </a:xfrm>
           <a:prstGeom prst="rect">
             <a:avLst/>
           </a:prstGeom>
         </p:spPr>
       </p:pic>
-      <p:sp>
-        <p:nvSpPr>
-          <p:cNvPr id="9" name="TextBox 8">
-            <a:extLst>
-              <a:ext uri="{FF2B5EF4-FFF2-40B4-BE49-F238E27FC236}">
-                <a16:creationId xmlns:a16="http://schemas.microsoft.com/office/drawing/2014/main" id="{E51B2FD8-7D6C-172E-9B3D-0179B556FACC}"/>
-              </a:ext>
-            </a:extLst>
-          </p:cNvPr>
-          <p:cNvSpPr txBox="1"/>
+      <p:pic>
+        <p:nvPicPr>
+          <p:cNvPr id="9" name="Picture 8" descr="A group of women working on computers&#10;&#10;AI-generated content may be incorrect.">
+            <a:extLst>
+              <a:ext uri="{FF2B5EF4-FFF2-40B4-BE49-F238E27FC236}">
+                <a16:creationId xmlns:a16="http://schemas.microsoft.com/office/drawing/2014/main" id="{1535C25B-91BA-8E9F-134C-E41E069C9FEE}"/>
+              </a:ext>
+            </a:extLst>
+          </p:cNvPr>
+          <p:cNvPicPr>
+            <a:picLocks noChangeAspect="1"/>
+          </p:cNvPicPr>
           <p:nvPr/>
-        </p:nvSpPr>
-        <p:spPr>
-          <a:xfrm>
-            <a:off x="245325" y="2459503"/>
-            <a:ext cx="6523465" cy="1384995"/>
+        </p:nvPicPr>
+        <p:blipFill>
+          <a:blip r:embed="rId3">
+            <a:extLst>
+              <a:ext uri="{28A0092B-C50C-407E-A947-70E740481C1C}">
+                <a14:useLocalDpi xmlns:a14="http://schemas.microsoft.com/office/drawing/2010/main" val="0"/>
+              </a:ext>
+            </a:extLst>
+          </a:blip>
+          <a:stretch>
+            <a:fillRect/>
+          </a:stretch>
+        </p:blipFill>
+        <p:spPr>
+          <a:xfrm>
+            <a:off x="6094612" y="-1"/>
+            <a:ext cx="6182882" cy="6954157"/>
           </a:xfrm>
           <a:prstGeom prst="rect">
             <a:avLst/>
           </a:prstGeom>
-          <a:noFill/>
-        </p:spPr>
-        <p:txBody>
-          <a:bodyPr wrap="square" rtlCol="0">
-            <a:spAutoFit/>
-          </a:bodyPr>
-          <a:lstStyle/>
-          <a:p>
-            <a:r>
-              <a:rPr lang="en-US" sz="2800" b="1" dirty="0">
-                <a:solidFill>
-                  <a:schemeClr val="bg1"/>
-                </a:solidFill>
-              </a:rPr>
-              <a:t>Group Name: </a:t>
-            </a:r>
-            <a:r>
-              <a:rPr lang="en-US" sz="2400" dirty="0" err="1">
-                <a:solidFill>
-                  <a:schemeClr val="bg1"/>
-                </a:solidFill>
-              </a:rPr>
-              <a:t>Fusion_Coders</a:t>
-            </a:r>
-            <a:endParaRPr lang="en-US" sz="2400" dirty="0">
-              <a:solidFill>
-                <a:schemeClr val="bg1"/>
-              </a:solidFill>
-            </a:endParaRPr>
-          </a:p>
-          <a:p>
-            <a:r>
-              <a:rPr lang="en-US" sz="2800" b="1" dirty="0">
-                <a:solidFill>
-                  <a:schemeClr val="bg1"/>
-                </a:solidFill>
-              </a:rPr>
-              <a:t>Group Members: </a:t>
-            </a:r>
-            <a:r>
-              <a:rPr lang="en-US" sz="2400" dirty="0">
-                <a:solidFill>
-                  <a:schemeClr val="bg1"/>
-                </a:solidFill>
-              </a:rPr>
-              <a:t>Fiza Akram(1564248)</a:t>
-            </a:r>
-          </a:p>
-          <a:p>
-            <a:r>
-              <a:rPr lang="en-US" sz="2800" dirty="0">
-                <a:solidFill>
-                  <a:schemeClr val="bg1"/>
-                </a:solidFill>
-              </a:rPr>
-              <a:t>                                   </a:t>
-            </a:r>
-            <a:r>
-              <a:rPr lang="en-US" sz="2400" dirty="0">
-                <a:solidFill>
-                  <a:schemeClr val="bg1"/>
-                </a:solidFill>
-              </a:rPr>
-              <a:t>Romesa</a:t>
-            </a:r>
-          </a:p>
-        </p:txBody>
-      </p:sp>
-      <p:sp>
-        <p:nvSpPr>
-          <p:cNvPr id="10" name="TextBox 9">
-            <a:extLst>
-              <a:ext uri="{FF2B5EF4-FFF2-40B4-BE49-F238E27FC236}">
-                <a16:creationId xmlns:a16="http://schemas.microsoft.com/office/drawing/2014/main" id="{51B9C18F-CAA4-C090-267A-AE68402BA26A}"/>
-              </a:ext>
-            </a:extLst>
-          </p:cNvPr>
-          <p:cNvSpPr txBox="1"/>
-          <p:nvPr/>
-        </p:nvSpPr>
-        <p:spPr>
-          <a:xfrm>
-            <a:off x="1353016" y="485082"/>
-            <a:ext cx="10593659" cy="584775"/>
-          </a:xfrm>
-          <a:prstGeom prst="rect">
-            <a:avLst/>
-          </a:prstGeom>
-          <a:noFill/>
-        </p:spPr>
-        <p:txBody>
-          <a:bodyPr wrap="square" rtlCol="0">
-            <a:spAutoFit/>
-          </a:bodyPr>
-          <a:lstStyle/>
-          <a:p>
-            <a:r>
-              <a:rPr lang="en-US" sz="3200" b="1" dirty="0">
-                <a:solidFill>
-                  <a:schemeClr val="bg1"/>
-                </a:solidFill>
-              </a:rPr>
-              <a:t>ML 24/25-09 Creating Text from images with OCR API</a:t>
-            </a:r>
-          </a:p>
-        </p:txBody>
-      </p:sp>
+        </p:spPr>
+      </p:pic>
     </p:spTree>
     <p:extLst>
       <p:ext uri="{BB962C8B-B14F-4D97-AF65-F5344CB8AC3E}">
-        <p14:creationId xmlns:p14="http://schemas.microsoft.com/office/powerpoint/2010/main" val="214723757"/>
+        <p14:creationId xmlns:p14="http://schemas.microsoft.com/office/powerpoint/2010/main" val="3641864967"/>
       </p:ext>
     </p:extLst>
   </p:cSld>
   <p:clrMapOvr>
     <a:masterClrMapping/>
   </p:clrMapOvr>
+  <p:timing>
+    <p:tnLst>
+      <p:par>
+        <p:cTn id="1" dur="indefinite" restart="never" nodeType="tmRoot">
+          <p:childTnLst>
+            <p:seq concurrent="1" nextAc="seek">
+              <p:cTn id="2" dur="indefinite" nodeType="mainSeq">
+                <p:childTnLst>
+                  <p:par>
+                    <p:cTn id="3" fill="hold">
+                      <p:stCondLst>
+                        <p:cond delay="indefinite"/>
+                      </p:stCondLst>
+                      <p:childTnLst>
+                        <p:par>
+                          <p:cTn id="4" fill="hold">
+                            <p:stCondLst>
+                              <p:cond delay="0"/>
+                            </p:stCondLst>
+                            <p:childTnLst>
+                              <p:par>
+                                <p:cTn id="5" presetID="10" presetClass="entr" presetSubtype="0" fill="hold" nodeType="clickEffect">
+                                  <p:stCondLst>
+                                    <p:cond delay="0"/>
+                                  </p:stCondLst>
+                                  <p:childTnLst>
+                                    <p:set>
+                                      <p:cBhvr>
+                                        <p:cTn id="6" dur="1" fill="hold">
+                                          <p:stCondLst>
+                                            <p:cond delay="0"/>
+                                          </p:stCondLst>
+                                        </p:cTn>
+                                        <p:tgtEl>
+                                          <p:spTgt spid="9"/>
+                                        </p:tgtEl>
+                                        <p:attrNameLst>
+                                          <p:attrName>style.visibility</p:attrName>
+                                        </p:attrNameLst>
+                                      </p:cBhvr>
+                                      <p:to>
+                                        <p:strVal val="visible"/>
+                                      </p:to>
+                                    </p:set>
+                                    <p:animEffect transition="in" filter="fade">
+                                      <p:cBhvr>
+                                        <p:cTn id="7" dur="500"/>
+                                        <p:tgtEl>
+                                          <p:spTgt spid="9"/>
+                                        </p:tgtEl>
+                                      </p:cBhvr>
+                                    </p:animEffect>
+                                  </p:childTnLst>
+                                </p:cTn>
+                              </p:par>
+                              <p:par>
+                                <p:cTn id="8" presetID="10" presetClass="entr" presetSubtype="0" fill="hold" nodeType="withEffect">
+                                  <p:stCondLst>
+                                    <p:cond delay="0"/>
+                                  </p:stCondLst>
+                                  <p:childTnLst>
+                                    <p:set>
+                                      <p:cBhvr>
+                                        <p:cTn id="9" dur="1" fill="hold">
+                                          <p:stCondLst>
+                                            <p:cond delay="0"/>
+                                          </p:stCondLst>
+                                        </p:cTn>
+                                        <p:tgtEl>
+                                          <p:spTgt spid="7"/>
+                                        </p:tgtEl>
+                                        <p:attrNameLst>
+                                          <p:attrName>style.visibility</p:attrName>
+                                        </p:attrNameLst>
+                                      </p:cBhvr>
+                                      <p:to>
+                                        <p:strVal val="visible"/>
+                                      </p:to>
+                                    </p:set>
+                                    <p:animEffect transition="in" filter="fade">
+                                      <p:cBhvr>
+                                        <p:cTn id="10" dur="500"/>
+                                        <p:tgtEl>
+                                          <p:spTgt spid="7"/>
+                                        </p:tgtEl>
+                                      </p:cBhvr>
+                                    </p:animEffect>
+                                  </p:childTnLst>
+                                </p:cTn>
+                              </p:par>
+                            </p:childTnLst>
+                          </p:cTn>
+                        </p:par>
+                      </p:childTnLst>
+                    </p:cTn>
+                  </p:par>
+                </p:childTnLst>
+              </p:cTn>
+              <p:prevCondLst>
+                <p:cond evt="onPrev" delay="0">
+                  <p:tgtEl>
+                    <p:sldTgt/>
+                  </p:tgtEl>
+                </p:cond>
+              </p:prevCondLst>
+              <p:nextCondLst>
+                <p:cond evt="onNext" delay="0">
+                  <p:tgtEl>
+                    <p:sldTgt/>
+                  </p:tgtEl>
+                </p:cond>
+              </p:nextCondLst>
+            </p:seq>
+          </p:childTnLst>
+        </p:cTn>
+      </p:par>
+    </p:tnLst>
+  </p:timing>
 </p:sld>
 </file>
 
@@ -5481,6 +5460,301 @@
   <p:clrMapOvr>
     <a:masterClrMapping/>
   </p:clrMapOvr>
+  <p:timing>
+    <p:tnLst>
+      <p:par>
+        <p:cTn id="1" dur="indefinite" restart="never" nodeType="tmRoot">
+          <p:childTnLst>
+            <p:seq concurrent="1" nextAc="seek">
+              <p:cTn id="2" dur="indefinite" nodeType="mainSeq">
+                <p:childTnLst>
+                  <p:par>
+                    <p:cTn id="3" fill="hold">
+                      <p:stCondLst>
+                        <p:cond delay="indefinite"/>
+                      </p:stCondLst>
+                      <p:childTnLst>
+                        <p:par>
+                          <p:cTn id="4" fill="hold">
+                            <p:stCondLst>
+                              <p:cond delay="0"/>
+                            </p:stCondLst>
+                            <p:childTnLst>
+                              <p:par>
+                                <p:cTn id="5" presetID="42" presetClass="entr" presetSubtype="0" fill="hold" grpId="0" nodeType="clickEffect">
+                                  <p:stCondLst>
+                                    <p:cond delay="0"/>
+                                  </p:stCondLst>
+                                  <p:childTnLst>
+                                    <p:set>
+                                      <p:cBhvr>
+                                        <p:cTn id="6" dur="1" fill="hold">
+                                          <p:stCondLst>
+                                            <p:cond delay="0"/>
+                                          </p:stCondLst>
+                                        </p:cTn>
+                                        <p:tgtEl>
+                                          <p:spTgt spid="2"/>
+                                        </p:tgtEl>
+                                        <p:attrNameLst>
+                                          <p:attrName>style.visibility</p:attrName>
+                                        </p:attrNameLst>
+                                      </p:cBhvr>
+                                      <p:to>
+                                        <p:strVal val="visible"/>
+                                      </p:to>
+                                    </p:set>
+                                    <p:animEffect transition="in" filter="fade">
+                                      <p:cBhvr>
+                                        <p:cTn id="7" dur="1000"/>
+                                        <p:tgtEl>
+                                          <p:spTgt spid="2"/>
+                                        </p:tgtEl>
+                                      </p:cBhvr>
+                                    </p:animEffect>
+                                    <p:anim calcmode="lin" valueType="num">
+                                      <p:cBhvr>
+                                        <p:cTn id="8" dur="1000" fill="hold"/>
+                                        <p:tgtEl>
+                                          <p:spTgt spid="2"/>
+                                        </p:tgtEl>
+                                        <p:attrNameLst>
+                                          <p:attrName>ppt_x</p:attrName>
+                                        </p:attrNameLst>
+                                      </p:cBhvr>
+                                      <p:tavLst>
+                                        <p:tav tm="0">
+                                          <p:val>
+                                            <p:strVal val="#ppt_x"/>
+                                          </p:val>
+                                        </p:tav>
+                                        <p:tav tm="100000">
+                                          <p:val>
+                                            <p:strVal val="#ppt_x"/>
+                                          </p:val>
+                                        </p:tav>
+                                      </p:tavLst>
+                                    </p:anim>
+                                    <p:anim calcmode="lin" valueType="num">
+                                      <p:cBhvr>
+                                        <p:cTn id="9" dur="1000" fill="hold"/>
+                                        <p:tgtEl>
+                                          <p:spTgt spid="2"/>
+                                        </p:tgtEl>
+                                        <p:attrNameLst>
+                                          <p:attrName>ppt_y</p:attrName>
+                                        </p:attrNameLst>
+                                      </p:cBhvr>
+                                      <p:tavLst>
+                                        <p:tav tm="0">
+                                          <p:val>
+                                            <p:strVal val="#ppt_y+.1"/>
+                                          </p:val>
+                                        </p:tav>
+                                        <p:tav tm="100000">
+                                          <p:val>
+                                            <p:strVal val="#ppt_y"/>
+                                          </p:val>
+                                        </p:tav>
+                                      </p:tavLst>
+                                    </p:anim>
+                                  </p:childTnLst>
+                                </p:cTn>
+                              </p:par>
+                              <p:par>
+                                <p:cTn id="10" presetID="42" presetClass="entr" presetSubtype="0" fill="hold" grpId="0" nodeType="withEffect">
+                                  <p:stCondLst>
+                                    <p:cond delay="0"/>
+                                  </p:stCondLst>
+                                  <p:childTnLst>
+                                    <p:set>
+                                      <p:cBhvr>
+                                        <p:cTn id="11" dur="1" fill="hold">
+                                          <p:stCondLst>
+                                            <p:cond delay="0"/>
+                                          </p:stCondLst>
+                                        </p:cTn>
+                                        <p:tgtEl>
+                                          <p:spTgt spid="3"/>
+                                        </p:tgtEl>
+                                        <p:attrNameLst>
+                                          <p:attrName>style.visibility</p:attrName>
+                                        </p:attrNameLst>
+                                      </p:cBhvr>
+                                      <p:to>
+                                        <p:strVal val="visible"/>
+                                      </p:to>
+                                    </p:set>
+                                    <p:animEffect transition="in" filter="fade">
+                                      <p:cBhvr>
+                                        <p:cTn id="12" dur="1000"/>
+                                        <p:tgtEl>
+                                          <p:spTgt spid="3"/>
+                                        </p:tgtEl>
+                                      </p:cBhvr>
+                                    </p:animEffect>
+                                    <p:anim calcmode="lin" valueType="num">
+                                      <p:cBhvr>
+                                        <p:cTn id="13" dur="1000" fill="hold"/>
+                                        <p:tgtEl>
+                                          <p:spTgt spid="3"/>
+                                        </p:tgtEl>
+                                        <p:attrNameLst>
+                                          <p:attrName>ppt_x</p:attrName>
+                                        </p:attrNameLst>
+                                      </p:cBhvr>
+                                      <p:tavLst>
+                                        <p:tav tm="0">
+                                          <p:val>
+                                            <p:strVal val="#ppt_x"/>
+                                          </p:val>
+                                        </p:tav>
+                                        <p:tav tm="100000">
+                                          <p:val>
+                                            <p:strVal val="#ppt_x"/>
+                                          </p:val>
+                                        </p:tav>
+                                      </p:tavLst>
+                                    </p:anim>
+                                    <p:anim calcmode="lin" valueType="num">
+                                      <p:cBhvr>
+                                        <p:cTn id="14" dur="1000" fill="hold"/>
+                                        <p:tgtEl>
+                                          <p:spTgt spid="3"/>
+                                        </p:tgtEl>
+                                        <p:attrNameLst>
+                                          <p:attrName>ppt_y</p:attrName>
+                                        </p:attrNameLst>
+                                      </p:cBhvr>
+                                      <p:tavLst>
+                                        <p:tav tm="0">
+                                          <p:val>
+                                            <p:strVal val="#ppt_y+.1"/>
+                                          </p:val>
+                                        </p:tav>
+                                        <p:tav tm="100000">
+                                          <p:val>
+                                            <p:strVal val="#ppt_y"/>
+                                          </p:val>
+                                        </p:tav>
+                                      </p:tavLst>
+                                    </p:anim>
+                                  </p:childTnLst>
+                                </p:cTn>
+                              </p:par>
+                              <p:par>
+                                <p:cTn id="15" presetID="42" presetClass="entr" presetSubtype="0" fill="hold" nodeType="withEffect">
+                                  <p:stCondLst>
+                                    <p:cond delay="0"/>
+                                  </p:stCondLst>
+                                  <p:childTnLst>
+                                    <p:set>
+                                      <p:cBhvr>
+                                        <p:cTn id="16" dur="1" fill="hold">
+                                          <p:stCondLst>
+                                            <p:cond delay="0"/>
+                                          </p:stCondLst>
+                                        </p:cTn>
+                                        <p:tgtEl>
+                                          <p:spTgt spid="9"/>
+                                        </p:tgtEl>
+                                        <p:attrNameLst>
+                                          <p:attrName>style.visibility</p:attrName>
+                                        </p:attrNameLst>
+                                      </p:cBhvr>
+                                      <p:to>
+                                        <p:strVal val="visible"/>
+                                      </p:to>
+                                    </p:set>
+                                    <p:animEffect transition="in" filter="fade">
+                                      <p:cBhvr>
+                                        <p:cTn id="17" dur="1000"/>
+                                        <p:tgtEl>
+                                          <p:spTgt spid="9"/>
+                                        </p:tgtEl>
+                                      </p:cBhvr>
+                                    </p:animEffect>
+                                    <p:anim calcmode="lin" valueType="num">
+                                      <p:cBhvr>
+                                        <p:cTn id="18" dur="1000" fill="hold"/>
+                                        <p:tgtEl>
+                                          <p:spTgt spid="9"/>
+                                        </p:tgtEl>
+                                        <p:attrNameLst>
+                                          <p:attrName>ppt_x</p:attrName>
+                                        </p:attrNameLst>
+                                      </p:cBhvr>
+                                      <p:tavLst>
+                                        <p:tav tm="0">
+                                          <p:val>
+                                            <p:strVal val="#ppt_x"/>
+                                          </p:val>
+                                        </p:tav>
+                                        <p:tav tm="100000">
+                                          <p:val>
+                                            <p:strVal val="#ppt_x"/>
+                                          </p:val>
+                                        </p:tav>
+                                      </p:tavLst>
+                                    </p:anim>
+                                    <p:anim calcmode="lin" valueType="num">
+                                      <p:cBhvr>
+                                        <p:cTn id="19" dur="1000" fill="hold"/>
+                                        <p:tgtEl>
+                                          <p:spTgt spid="9"/>
+                                        </p:tgtEl>
+                                        <p:attrNameLst>
+                                          <p:attrName>ppt_y</p:attrName>
+                                        </p:attrNameLst>
+                                      </p:cBhvr>
+                                      <p:tavLst>
+                                        <p:tav tm="0">
+                                          <p:val>
+                                            <p:strVal val="#ppt_y+.1"/>
+                                          </p:val>
+                                        </p:tav>
+                                        <p:tav tm="100000">
+                                          <p:val>
+                                            <p:strVal val="#ppt_y"/>
+                                          </p:val>
+                                        </p:tav>
+                                      </p:tavLst>
+                                    </p:anim>
+                                  </p:childTnLst>
+                                </p:cTn>
+                              </p:par>
+                            </p:childTnLst>
+                          </p:cTn>
+                        </p:par>
+                      </p:childTnLst>
+                    </p:cTn>
+                  </p:par>
+                </p:childTnLst>
+              </p:cTn>
+              <p:prevCondLst>
+                <p:cond evt="onPrev" delay="0">
+                  <p:tgtEl>
+                    <p:sldTgt/>
+                  </p:tgtEl>
+                </p:cond>
+              </p:prevCondLst>
+              <p:nextCondLst>
+                <p:cond evt="onNext" delay="0">
+                  <p:tgtEl>
+                    <p:sldTgt/>
+                  </p:tgtEl>
+                </p:cond>
+              </p:nextCondLst>
+            </p:seq>
+          </p:childTnLst>
+        </p:cTn>
+      </p:par>
+    </p:tnLst>
+    <p:bldLst>
+      <p:bldP spid="2" grpId="0"/>
+      <p:bldP spid="3" grpId="0"/>
+    </p:bldLst>
+  </p:timing>
 </p:sld>
 </file>
 
@@ -5543,6 +5817,212 @@
           </a:prstGeom>
         </p:spPr>
       </p:pic>
+      <p:sp>
+        <p:nvSpPr>
+          <p:cNvPr id="2" name="TextBox 1">
+            <a:extLst>
+              <a:ext uri="{FF2B5EF4-FFF2-40B4-BE49-F238E27FC236}">
+                <a16:creationId xmlns:a16="http://schemas.microsoft.com/office/drawing/2014/main" id="{3F722503-D766-CCB4-BFD4-5AF2984F61DF}"/>
+              </a:ext>
+            </a:extLst>
+          </p:cNvPr>
+          <p:cNvSpPr txBox="1"/>
+          <p:nvPr/>
+        </p:nvSpPr>
+        <p:spPr>
+          <a:xfrm>
+            <a:off x="457200" y="390512"/>
+            <a:ext cx="8073483" cy="646331"/>
+          </a:xfrm>
+          <a:prstGeom prst="rect">
+            <a:avLst/>
+          </a:prstGeom>
+          <a:noFill/>
+        </p:spPr>
+        <p:txBody>
+          <a:bodyPr wrap="square" rtlCol="0">
+            <a:spAutoFit/>
+          </a:bodyPr>
+          <a:lstStyle/>
+          <a:p>
+            <a:r>
+              <a:rPr lang="en-US" sz="3600" b="1" dirty="0">
+                <a:solidFill>
+                  <a:schemeClr val="bg1"/>
+                </a:solidFill>
+              </a:rPr>
+              <a:t>Conclusion</a:t>
+            </a:r>
+          </a:p>
+        </p:txBody>
+      </p:sp>
+      <p:sp>
+        <p:nvSpPr>
+          <p:cNvPr id="3" name="TextBox 2">
+            <a:extLst>
+              <a:ext uri="{FF2B5EF4-FFF2-40B4-BE49-F238E27FC236}">
+                <a16:creationId xmlns:a16="http://schemas.microsoft.com/office/drawing/2014/main" id="{DC5ACC6E-FF9E-714C-4916-C54E784FBAB4}"/>
+              </a:ext>
+            </a:extLst>
+          </p:cNvPr>
+          <p:cNvSpPr txBox="1"/>
+          <p:nvPr/>
+        </p:nvSpPr>
+        <p:spPr>
+          <a:xfrm>
+            <a:off x="546410" y="1315932"/>
+            <a:ext cx="6891454" cy="4555093"/>
+          </a:xfrm>
+          <a:prstGeom prst="rect">
+            <a:avLst/>
+          </a:prstGeom>
+          <a:noFill/>
+        </p:spPr>
+        <p:txBody>
+          <a:bodyPr wrap="square" rtlCol="0">
+            <a:spAutoFit/>
+          </a:bodyPr>
+          <a:lstStyle/>
+          <a:p>
+            <a:pPr algn="just"/>
+            <a:r>
+              <a:rPr lang="en-US" dirty="0">
+                <a:solidFill>
+                  <a:schemeClr val="bg1"/>
+                </a:solidFill>
+              </a:rPr>
+              <a:t>This project successfully demonstrates the </a:t>
+            </a:r>
+            <a:r>
+              <a:rPr lang="en-US" b="1" dirty="0">
+                <a:solidFill>
+                  <a:schemeClr val="bg1"/>
+                </a:solidFill>
+              </a:rPr>
+              <a:t>importance of advanced image pre-processing</a:t>
+            </a:r>
+            <a:r>
+              <a:rPr lang="en-US" dirty="0">
+                <a:solidFill>
+                  <a:schemeClr val="bg1"/>
+                </a:solidFill>
+              </a:rPr>
+              <a:t> in improving OCR-based text extraction. By implementing a </a:t>
+            </a:r>
+            <a:r>
+              <a:rPr lang="en-US" b="1" dirty="0">
+                <a:solidFill>
+                  <a:schemeClr val="bg1"/>
+                </a:solidFill>
+              </a:rPr>
+              <a:t>modular and flexible system</a:t>
+            </a:r>
+            <a:r>
+              <a:rPr lang="en-US" dirty="0">
+                <a:solidFill>
+                  <a:schemeClr val="bg1"/>
+                </a:solidFill>
+              </a:rPr>
+              <a:t>, it allows seamless integration of additional transformations and alternative OCR engines, ensuring adaptability to diverse image conditions.</a:t>
+            </a:r>
+          </a:p>
+          <a:p>
+            <a:pPr algn="just"/>
+            <a:endParaRPr lang="en-US" dirty="0">
+              <a:solidFill>
+                <a:schemeClr val="bg1"/>
+              </a:solidFill>
+            </a:endParaRPr>
+          </a:p>
+          <a:p>
+            <a:pPr algn="just">
+              <a:buNone/>
+            </a:pPr>
+            <a:r>
+              <a:rPr lang="en-US" sz="2000" b="1" dirty="0">
+                <a:solidFill>
+                  <a:schemeClr val="bg1"/>
+                </a:solidFill>
+              </a:rPr>
+              <a:t>Key Contributions:</a:t>
+            </a:r>
+          </a:p>
+          <a:p>
+            <a:pPr marL="285750" indent="-285750" algn="just">
+              <a:buFont typeface="Wingdings" panose="05000000000000000000" pitchFamily="2" charset="2"/>
+              <a:buChar char="Ø"/>
+            </a:pPr>
+            <a:r>
+              <a:rPr lang="en-US" b="1" dirty="0">
+                <a:solidFill>
+                  <a:schemeClr val="bg1"/>
+                </a:solidFill>
+              </a:rPr>
+              <a:t>Enhanced OCR Accuracy</a:t>
+            </a:r>
+            <a:r>
+              <a:rPr lang="en-US" dirty="0">
+                <a:solidFill>
+                  <a:schemeClr val="bg1"/>
+                </a:solidFill>
+              </a:rPr>
+              <a:t> – Applying multiple pre-processing techniques to maximize text recognition success rates.</a:t>
+            </a:r>
+          </a:p>
+          <a:p>
+            <a:pPr marL="285750" indent="-285750" algn="just">
+              <a:buFont typeface="Wingdings" panose="05000000000000000000" pitchFamily="2" charset="2"/>
+              <a:buChar char="Ø"/>
+            </a:pPr>
+            <a:r>
+              <a:rPr lang="en-US" b="1" dirty="0">
+                <a:solidFill>
+                  <a:schemeClr val="bg1"/>
+                </a:solidFill>
+              </a:rPr>
+              <a:t>Modular System Architecture</a:t>
+            </a:r>
+            <a:r>
+              <a:rPr lang="en-US" dirty="0">
+                <a:solidFill>
+                  <a:schemeClr val="bg1"/>
+                </a:solidFill>
+              </a:rPr>
+              <a:t> – Ensuring clear separation between image processing and text extraction for better scalability.</a:t>
+            </a:r>
+          </a:p>
+          <a:p>
+            <a:pPr marL="285750" indent="-285750" algn="just">
+              <a:buFont typeface="Wingdings" panose="05000000000000000000" pitchFamily="2" charset="2"/>
+              <a:buChar char="Ø"/>
+            </a:pPr>
+            <a:r>
+              <a:rPr lang="en-US" b="1" dirty="0">
+                <a:solidFill>
+                  <a:schemeClr val="bg1"/>
+                </a:solidFill>
+              </a:rPr>
+              <a:t>Optimized Post-processing</a:t>
+            </a:r>
+            <a:r>
+              <a:rPr lang="en-US" dirty="0">
+                <a:solidFill>
+                  <a:schemeClr val="bg1"/>
+                </a:solidFill>
+              </a:rPr>
+              <a:t> – Refining extracted text to improve readability and accuracy.</a:t>
+            </a:r>
+          </a:p>
+          <a:p>
+            <a:pPr algn="just"/>
+            <a:endParaRPr lang="en-US" dirty="0">
+              <a:solidFill>
+                <a:schemeClr val="bg1"/>
+              </a:solidFill>
+            </a:endParaRPr>
+          </a:p>
+        </p:txBody>
+      </p:sp>
     </p:spTree>
     <p:extLst>
       <p:ext uri="{BB962C8B-B14F-4D97-AF65-F5344CB8AC3E}">
@@ -5553,6 +6033,358 @@
   <p:clrMapOvr>
     <a:masterClrMapping/>
   </p:clrMapOvr>
+  <p:timing>
+    <p:tnLst>
+      <p:par>
+        <p:cTn id="1" dur="indefinite" restart="never" nodeType="tmRoot">
+          <p:childTnLst>
+            <p:seq concurrent="1" nextAc="seek">
+              <p:cTn id="2" dur="indefinite" nodeType="mainSeq">
+                <p:childTnLst>
+                  <p:par>
+                    <p:cTn id="3" fill="hold">
+                      <p:stCondLst>
+                        <p:cond delay="indefinite"/>
+                      </p:stCondLst>
+                      <p:childTnLst>
+                        <p:par>
+                          <p:cTn id="4" fill="hold">
+                            <p:stCondLst>
+                              <p:cond delay="0"/>
+                            </p:stCondLst>
+                            <p:childTnLst>
+                              <p:par>
+                                <p:cTn id="5" presetID="10" presetClass="entr" presetSubtype="0" fill="hold" grpId="0" nodeType="clickEffect">
+                                  <p:stCondLst>
+                                    <p:cond delay="0"/>
+                                  </p:stCondLst>
+                                  <p:childTnLst>
+                                    <p:set>
+                                      <p:cBhvr>
+                                        <p:cTn id="6" dur="1" fill="hold">
+                                          <p:stCondLst>
+                                            <p:cond delay="0"/>
+                                          </p:stCondLst>
+                                        </p:cTn>
+                                        <p:tgtEl>
+                                          <p:spTgt spid="3"/>
+                                        </p:tgtEl>
+                                        <p:attrNameLst>
+                                          <p:attrName>style.visibility</p:attrName>
+                                        </p:attrNameLst>
+                                      </p:cBhvr>
+                                      <p:to>
+                                        <p:strVal val="visible"/>
+                                      </p:to>
+                                    </p:set>
+                                    <p:animEffect transition="in" filter="fade">
+                                      <p:cBhvr>
+                                        <p:cTn id="7" dur="500"/>
+                                        <p:tgtEl>
+                                          <p:spTgt spid="3"/>
+                                        </p:tgtEl>
+                                      </p:cBhvr>
+                                    </p:animEffect>
+                                  </p:childTnLst>
+                                </p:cTn>
+                              </p:par>
+                              <p:par>
+                                <p:cTn id="8" presetID="42" presetClass="entr" presetSubtype="0" fill="hold" nodeType="withEffect">
+                                  <p:stCondLst>
+                                    <p:cond delay="0"/>
+                                  </p:stCondLst>
+                                  <p:childTnLst>
+                                    <p:set>
+                                      <p:cBhvr>
+                                        <p:cTn id="9" dur="1" fill="hold">
+                                          <p:stCondLst>
+                                            <p:cond delay="0"/>
+                                          </p:stCondLst>
+                                        </p:cTn>
+                                        <p:tgtEl>
+                                          <p:spTgt spid="5"/>
+                                        </p:tgtEl>
+                                        <p:attrNameLst>
+                                          <p:attrName>style.visibility</p:attrName>
+                                        </p:attrNameLst>
+                                      </p:cBhvr>
+                                      <p:to>
+                                        <p:strVal val="visible"/>
+                                      </p:to>
+                                    </p:set>
+                                    <p:animEffect transition="in" filter="fade">
+                                      <p:cBhvr>
+                                        <p:cTn id="10" dur="1000"/>
+                                        <p:tgtEl>
+                                          <p:spTgt spid="5"/>
+                                        </p:tgtEl>
+                                      </p:cBhvr>
+                                    </p:animEffect>
+                                    <p:anim calcmode="lin" valueType="num">
+                                      <p:cBhvr>
+                                        <p:cTn id="11" dur="1000" fill="hold"/>
+                                        <p:tgtEl>
+                                          <p:spTgt spid="5"/>
+                                        </p:tgtEl>
+                                        <p:attrNameLst>
+                                          <p:attrName>ppt_x</p:attrName>
+                                        </p:attrNameLst>
+                                      </p:cBhvr>
+                                      <p:tavLst>
+                                        <p:tav tm="0">
+                                          <p:val>
+                                            <p:strVal val="#ppt_x"/>
+                                          </p:val>
+                                        </p:tav>
+                                        <p:tav tm="100000">
+                                          <p:val>
+                                            <p:strVal val="#ppt_x"/>
+                                          </p:val>
+                                        </p:tav>
+                                      </p:tavLst>
+                                    </p:anim>
+                                    <p:anim calcmode="lin" valueType="num">
+                                      <p:cBhvr>
+                                        <p:cTn id="12" dur="1000" fill="hold"/>
+                                        <p:tgtEl>
+                                          <p:spTgt spid="5"/>
+                                        </p:tgtEl>
+                                        <p:attrNameLst>
+                                          <p:attrName>ppt_y</p:attrName>
+                                        </p:attrNameLst>
+                                      </p:cBhvr>
+                                      <p:tavLst>
+                                        <p:tav tm="0">
+                                          <p:val>
+                                            <p:strVal val="#ppt_y+.1"/>
+                                          </p:val>
+                                        </p:tav>
+                                        <p:tav tm="100000">
+                                          <p:val>
+                                            <p:strVal val="#ppt_y"/>
+                                          </p:val>
+                                        </p:tav>
+                                      </p:tavLst>
+                                    </p:anim>
+                                  </p:childTnLst>
+                                </p:cTn>
+                              </p:par>
+                              <p:par>
+                                <p:cTn id="13" presetID="10" presetClass="entr" presetSubtype="0" fill="hold" grpId="0" nodeType="withEffect">
+                                  <p:stCondLst>
+                                    <p:cond delay="0"/>
+                                  </p:stCondLst>
+                                  <p:childTnLst>
+                                    <p:set>
+                                      <p:cBhvr>
+                                        <p:cTn id="14" dur="1" fill="hold">
+                                          <p:stCondLst>
+                                            <p:cond delay="0"/>
+                                          </p:stCondLst>
+                                        </p:cTn>
+                                        <p:tgtEl>
+                                          <p:spTgt spid="2"/>
+                                        </p:tgtEl>
+                                        <p:attrNameLst>
+                                          <p:attrName>style.visibility</p:attrName>
+                                        </p:attrNameLst>
+                                      </p:cBhvr>
+                                      <p:to>
+                                        <p:strVal val="visible"/>
+                                      </p:to>
+                                    </p:set>
+                                    <p:animEffect transition="in" filter="fade">
+                                      <p:cBhvr>
+                                        <p:cTn id="15" dur="500"/>
+                                        <p:tgtEl>
+                                          <p:spTgt spid="2"/>
+                                        </p:tgtEl>
+                                      </p:cBhvr>
+                                    </p:animEffect>
+                                  </p:childTnLst>
+                                </p:cTn>
+                              </p:par>
+                            </p:childTnLst>
+                          </p:cTn>
+                        </p:par>
+                      </p:childTnLst>
+                    </p:cTn>
+                  </p:par>
+                </p:childTnLst>
+              </p:cTn>
+              <p:prevCondLst>
+                <p:cond evt="onPrev" delay="0">
+                  <p:tgtEl>
+                    <p:sldTgt/>
+                  </p:tgtEl>
+                </p:cond>
+              </p:prevCondLst>
+              <p:nextCondLst>
+                <p:cond evt="onNext" delay="0">
+                  <p:tgtEl>
+                    <p:sldTgt/>
+                  </p:tgtEl>
+                </p:cond>
+              </p:nextCondLst>
+            </p:seq>
+          </p:childTnLst>
+        </p:cTn>
+      </p:par>
+    </p:tnLst>
+    <p:bldLst>
+      <p:bldP spid="2" grpId="0"/>
+      <p:bldP spid="3" grpId="0"/>
+    </p:bldLst>
+  </p:timing>
+</p:sld>
+</file>
+
+<file path=ppt/slides/slide12.xml><?xml version="1.0" encoding="utf-8"?>
+<p:sld xmlns:a="http://schemas.openxmlformats.org/drawingml/2006/main" xmlns:r="http://schemas.openxmlformats.org/officeDocument/2006/relationships" xmlns:p="http://schemas.openxmlformats.org/presentationml/2006/main">
+  <p:cSld>
+    <p:spTree>
+      <p:nvGrpSpPr>
+        <p:cNvPr id="1" name=""/>
+        <p:cNvGrpSpPr/>
+        <p:nvPr/>
+      </p:nvGrpSpPr>
+      <p:grpSpPr>
+        <a:xfrm>
+          <a:off x="0" y="0"/>
+          <a:ext cx="0" cy="0"/>
+          <a:chOff x="0" y="0"/>
+          <a:chExt cx="0" cy="0"/>
+        </a:xfrm>
+      </p:grpSpPr>
+      <p:pic>
+        <p:nvPicPr>
+          <p:cNvPr id="3" name="Picture 2" descr="A blue and white text on a black background&#10;&#10;AI-generated content may be incorrect.">
+            <a:extLst>
+              <a:ext uri="{FF2B5EF4-FFF2-40B4-BE49-F238E27FC236}">
+                <a16:creationId xmlns:a16="http://schemas.microsoft.com/office/drawing/2014/main" id="{3C086FBD-ADDD-3147-FBBA-352D3772CE48}"/>
+              </a:ext>
+            </a:extLst>
+          </p:cNvPr>
+          <p:cNvPicPr>
+            <a:picLocks noChangeAspect="1"/>
+          </p:cNvPicPr>
+          <p:nvPr/>
+        </p:nvPicPr>
+        <p:blipFill>
+          <a:blip r:embed="rId2">
+            <a:extLst>
+              <a:ext uri="{28A0092B-C50C-407E-A947-70E740481C1C}">
+                <a14:useLocalDpi xmlns:a14="http://schemas.microsoft.com/office/drawing/2010/main" val="0"/>
+              </a:ext>
+            </a:extLst>
+          </a:blip>
+          <a:stretch>
+            <a:fillRect/>
+          </a:stretch>
+        </p:blipFill>
+        <p:spPr>
+          <a:xfrm>
+            <a:off x="-78060" y="-79485"/>
+            <a:ext cx="12270060" cy="6937486"/>
+          </a:xfrm>
+          <a:prstGeom prst="rect">
+            <a:avLst/>
+          </a:prstGeom>
+        </p:spPr>
+      </p:pic>
+    </p:spTree>
+    <p:extLst>
+      <p:ext uri="{BB962C8B-B14F-4D97-AF65-F5344CB8AC3E}">
+        <p14:creationId xmlns:p14="http://schemas.microsoft.com/office/powerpoint/2010/main" val="4281072889"/>
+      </p:ext>
+    </p:extLst>
+  </p:cSld>
+  <p:clrMapOvr>
+    <a:masterClrMapping/>
+  </p:clrMapOvr>
+  <p:timing>
+    <p:tnLst>
+      <p:par>
+        <p:cTn id="1" dur="indefinite" restart="never" nodeType="tmRoot">
+          <p:childTnLst>
+            <p:seq concurrent="1" nextAc="seek">
+              <p:cTn id="2" dur="indefinite" nodeType="mainSeq">
+                <p:childTnLst>
+                  <p:par>
+                    <p:cTn id="3" fill="hold">
+                      <p:stCondLst>
+                        <p:cond delay="indefinite"/>
+                      </p:stCondLst>
+                      <p:childTnLst>
+                        <p:par>
+                          <p:cTn id="4" fill="hold">
+                            <p:stCondLst>
+                              <p:cond delay="0"/>
+                            </p:stCondLst>
+                            <p:childTnLst>
+                              <p:par>
+                                <p:cTn id="5" presetID="16" presetClass="entr" presetSubtype="21" fill="hold" nodeType="clickEffect">
+                                  <p:stCondLst>
+                                    <p:cond delay="0"/>
+                                  </p:stCondLst>
+                                  <p:childTnLst>
+                                    <p:set>
+                                      <p:cBhvr>
+                                        <p:cTn id="6" dur="1" fill="hold">
+                                          <p:stCondLst>
+                                            <p:cond delay="0"/>
+                                          </p:stCondLst>
+                                        </p:cTn>
+                                        <p:tgtEl>
+                                          <p:spTgt spid="3"/>
+                                        </p:tgtEl>
+                                        <p:attrNameLst>
+                                          <p:attrName>style.visibility</p:attrName>
+                                        </p:attrNameLst>
+                                      </p:cBhvr>
+                                      <p:to>
+                                        <p:strVal val="visible"/>
+                                      </p:to>
+                                    </p:set>
+                                    <p:animEffect transition="in" filter="barn(inVertical)">
+                                      <p:cBhvr>
+                                        <p:cTn id="7" dur="500"/>
+                                        <p:tgtEl>
+                                          <p:spTgt spid="3"/>
+                                        </p:tgtEl>
+                                      </p:cBhvr>
+                                    </p:animEffect>
+                                  </p:childTnLst>
+                                </p:cTn>
+                              </p:par>
+                            </p:childTnLst>
+                          </p:cTn>
+                        </p:par>
+                      </p:childTnLst>
+                    </p:cTn>
+                  </p:par>
+                </p:childTnLst>
+              </p:cTn>
+              <p:prevCondLst>
+                <p:cond evt="onPrev" delay="0">
+                  <p:tgtEl>
+                    <p:sldTgt/>
+                  </p:tgtEl>
+                </p:cond>
+              </p:prevCondLst>
+              <p:nextCondLst>
+                <p:cond evt="onNext" delay="0">
+                  <p:tgtEl>
+                    <p:sldTgt/>
+                  </p:tgtEl>
+                </p:cond>
+              </p:nextCondLst>
+            </p:seq>
+          </p:childTnLst>
+        </p:cTn>
+      </p:par>
+    </p:tnLst>
+  </p:timing>
 </p:sld>
 </file>
 
@@ -5825,6 +6657,220 @@
   <p:clrMapOvr>
     <a:masterClrMapping/>
   </p:clrMapOvr>
+  <p:timing>
+    <p:tnLst>
+      <p:par>
+        <p:cTn id="1" dur="indefinite" restart="never" nodeType="tmRoot">
+          <p:childTnLst>
+            <p:seq concurrent="1" nextAc="seek">
+              <p:cTn id="2" dur="indefinite" nodeType="mainSeq">
+                <p:childTnLst>
+                  <p:par>
+                    <p:cTn id="3" fill="hold">
+                      <p:stCondLst>
+                        <p:cond delay="indefinite"/>
+                      </p:stCondLst>
+                      <p:childTnLst>
+                        <p:par>
+                          <p:cTn id="4" fill="hold">
+                            <p:stCondLst>
+                              <p:cond delay="0"/>
+                            </p:stCondLst>
+                            <p:childTnLst>
+                              <p:par>
+                                <p:cTn id="5" presetID="42" presetClass="entr" presetSubtype="0" fill="hold" grpId="0" nodeType="clickEffect">
+                                  <p:stCondLst>
+                                    <p:cond delay="0"/>
+                                  </p:stCondLst>
+                                  <p:childTnLst>
+                                    <p:set>
+                                      <p:cBhvr>
+                                        <p:cTn id="6" dur="1" fill="hold">
+                                          <p:stCondLst>
+                                            <p:cond delay="0"/>
+                                          </p:stCondLst>
+                                        </p:cTn>
+                                        <p:tgtEl>
+                                          <p:spTgt spid="10"/>
+                                        </p:tgtEl>
+                                        <p:attrNameLst>
+                                          <p:attrName>style.visibility</p:attrName>
+                                        </p:attrNameLst>
+                                      </p:cBhvr>
+                                      <p:to>
+                                        <p:strVal val="visible"/>
+                                      </p:to>
+                                    </p:set>
+                                    <p:animEffect transition="in" filter="fade">
+                                      <p:cBhvr>
+                                        <p:cTn id="7" dur="1000"/>
+                                        <p:tgtEl>
+                                          <p:spTgt spid="10"/>
+                                        </p:tgtEl>
+                                      </p:cBhvr>
+                                    </p:animEffect>
+                                    <p:anim calcmode="lin" valueType="num">
+                                      <p:cBhvr>
+                                        <p:cTn id="8" dur="1000" fill="hold"/>
+                                        <p:tgtEl>
+                                          <p:spTgt spid="10"/>
+                                        </p:tgtEl>
+                                        <p:attrNameLst>
+                                          <p:attrName>ppt_x</p:attrName>
+                                        </p:attrNameLst>
+                                      </p:cBhvr>
+                                      <p:tavLst>
+                                        <p:tav tm="0">
+                                          <p:val>
+                                            <p:strVal val="#ppt_x"/>
+                                          </p:val>
+                                        </p:tav>
+                                        <p:tav tm="100000">
+                                          <p:val>
+                                            <p:strVal val="#ppt_x"/>
+                                          </p:val>
+                                        </p:tav>
+                                      </p:tavLst>
+                                    </p:anim>
+                                    <p:anim calcmode="lin" valueType="num">
+                                      <p:cBhvr>
+                                        <p:cTn id="9" dur="1000" fill="hold"/>
+                                        <p:tgtEl>
+                                          <p:spTgt spid="10"/>
+                                        </p:tgtEl>
+                                        <p:attrNameLst>
+                                          <p:attrName>ppt_y</p:attrName>
+                                        </p:attrNameLst>
+                                      </p:cBhvr>
+                                      <p:tavLst>
+                                        <p:tav tm="0">
+                                          <p:val>
+                                            <p:strVal val="#ppt_y+.1"/>
+                                          </p:val>
+                                        </p:tav>
+                                        <p:tav tm="100000">
+                                          <p:val>
+                                            <p:strVal val="#ppt_y"/>
+                                          </p:val>
+                                        </p:tav>
+                                      </p:tavLst>
+                                    </p:anim>
+                                  </p:childTnLst>
+                                </p:cTn>
+                              </p:par>
+                              <p:par>
+                                <p:cTn id="10" presetID="42" presetClass="entr" presetSubtype="0" fill="hold" grpId="0" nodeType="withEffect">
+                                  <p:stCondLst>
+                                    <p:cond delay="0"/>
+                                  </p:stCondLst>
+                                  <p:childTnLst>
+                                    <p:set>
+                                      <p:cBhvr>
+                                        <p:cTn id="11" dur="1" fill="hold">
+                                          <p:stCondLst>
+                                            <p:cond delay="0"/>
+                                          </p:stCondLst>
+                                        </p:cTn>
+                                        <p:tgtEl>
+                                          <p:spTgt spid="11"/>
+                                        </p:tgtEl>
+                                        <p:attrNameLst>
+                                          <p:attrName>style.visibility</p:attrName>
+                                        </p:attrNameLst>
+                                      </p:cBhvr>
+                                      <p:to>
+                                        <p:strVal val="visible"/>
+                                      </p:to>
+                                    </p:set>
+                                    <p:animEffect transition="in" filter="fade">
+                                      <p:cBhvr>
+                                        <p:cTn id="12" dur="1000"/>
+                                        <p:tgtEl>
+                                          <p:spTgt spid="11"/>
+                                        </p:tgtEl>
+                                      </p:cBhvr>
+                                    </p:animEffect>
+                                    <p:anim calcmode="lin" valueType="num">
+                                      <p:cBhvr>
+                                        <p:cTn id="13" dur="1000" fill="hold"/>
+                                        <p:tgtEl>
+                                          <p:spTgt spid="11"/>
+                                        </p:tgtEl>
+                                        <p:attrNameLst>
+                                          <p:attrName>ppt_x</p:attrName>
+                                        </p:attrNameLst>
+                                      </p:cBhvr>
+                                      <p:tavLst>
+                                        <p:tav tm="0">
+                                          <p:val>
+                                            <p:strVal val="#ppt_x"/>
+                                          </p:val>
+                                        </p:tav>
+                                        <p:tav tm="100000">
+                                          <p:val>
+                                            <p:strVal val="#ppt_x"/>
+                                          </p:val>
+                                        </p:tav>
+                                      </p:tavLst>
+                                    </p:anim>
+                                    <p:anim calcmode="lin" valueType="num">
+                                      <p:cBhvr>
+                                        <p:cTn id="14" dur="1000" fill="hold"/>
+                                        <p:tgtEl>
+                                          <p:spTgt spid="11"/>
+                                        </p:tgtEl>
+                                        <p:attrNameLst>
+                                          <p:attrName>ppt_y</p:attrName>
+                                        </p:attrNameLst>
+                                      </p:cBhvr>
+                                      <p:tavLst>
+                                        <p:tav tm="0">
+                                          <p:val>
+                                            <p:strVal val="#ppt_y+.1"/>
+                                          </p:val>
+                                        </p:tav>
+                                        <p:tav tm="100000">
+                                          <p:val>
+                                            <p:strVal val="#ppt_y"/>
+                                          </p:val>
+                                        </p:tav>
+                                      </p:tavLst>
+                                    </p:anim>
+                                  </p:childTnLst>
+                                </p:cTn>
+                              </p:par>
+                            </p:childTnLst>
+                          </p:cTn>
+                        </p:par>
+                      </p:childTnLst>
+                    </p:cTn>
+                  </p:par>
+                </p:childTnLst>
+              </p:cTn>
+              <p:prevCondLst>
+                <p:cond evt="onPrev" delay="0">
+                  <p:tgtEl>
+                    <p:sldTgt/>
+                  </p:tgtEl>
+                </p:cond>
+              </p:prevCondLst>
+              <p:nextCondLst>
+                <p:cond evt="onNext" delay="0">
+                  <p:tgtEl>
+                    <p:sldTgt/>
+                  </p:tgtEl>
+                </p:cond>
+              </p:nextCondLst>
+            </p:seq>
+          </p:childTnLst>
+        </p:cTn>
+      </p:par>
+    </p:tnLst>
+    <p:bldLst>
+      <p:bldP spid="10" grpId="0"/>
+      <p:bldP spid="11" grpId="0"/>
+    </p:bldLst>
+  </p:timing>
 </p:sld>
 </file>
 
@@ -6111,6 +7157,163 @@
   <p:clrMapOvr>
     <a:masterClrMapping/>
   </p:clrMapOvr>
+  <p:timing>
+    <p:tnLst>
+      <p:par>
+        <p:cTn id="1" dur="indefinite" restart="never" nodeType="tmRoot">
+          <p:childTnLst>
+            <p:seq concurrent="1" nextAc="seek">
+              <p:cTn id="2" dur="indefinite" nodeType="mainSeq">
+                <p:childTnLst>
+                  <p:par>
+                    <p:cTn id="3" fill="hold">
+                      <p:stCondLst>
+                        <p:cond delay="indefinite"/>
+                      </p:stCondLst>
+                      <p:childTnLst>
+                        <p:par>
+                          <p:cTn id="4" fill="hold">
+                            <p:stCondLst>
+                              <p:cond delay="0"/>
+                            </p:stCondLst>
+                            <p:childTnLst>
+                              <p:par>
+                                <p:cTn id="5" presetID="10" presetClass="entr" presetSubtype="0" fill="hold" grpId="0" nodeType="clickEffect">
+                                  <p:stCondLst>
+                                    <p:cond delay="0"/>
+                                  </p:stCondLst>
+                                  <p:childTnLst>
+                                    <p:set>
+                                      <p:cBhvr>
+                                        <p:cTn id="6" dur="1" fill="hold">
+                                          <p:stCondLst>
+                                            <p:cond delay="0"/>
+                                          </p:stCondLst>
+                                        </p:cTn>
+                                        <p:tgtEl>
+                                          <p:spTgt spid="7"/>
+                                        </p:tgtEl>
+                                        <p:attrNameLst>
+                                          <p:attrName>style.visibility</p:attrName>
+                                        </p:attrNameLst>
+                                      </p:cBhvr>
+                                      <p:to>
+                                        <p:strVal val="visible"/>
+                                      </p:to>
+                                    </p:set>
+                                    <p:animEffect transition="in" filter="fade">
+                                      <p:cBhvr>
+                                        <p:cTn id="7" dur="500"/>
+                                        <p:tgtEl>
+                                          <p:spTgt spid="7"/>
+                                        </p:tgtEl>
+                                      </p:cBhvr>
+                                    </p:animEffect>
+                                  </p:childTnLst>
+                                </p:cTn>
+                              </p:par>
+                              <p:par>
+                                <p:cTn id="8" presetID="10" presetClass="entr" presetSubtype="0" fill="hold" grpId="0" nodeType="withEffect">
+                                  <p:stCondLst>
+                                    <p:cond delay="0"/>
+                                  </p:stCondLst>
+                                  <p:childTnLst>
+                                    <p:set>
+                                      <p:cBhvr>
+                                        <p:cTn id="9" dur="1" fill="hold">
+                                          <p:stCondLst>
+                                            <p:cond delay="0"/>
+                                          </p:stCondLst>
+                                        </p:cTn>
+                                        <p:tgtEl>
+                                          <p:spTgt spid="10"/>
+                                        </p:tgtEl>
+                                        <p:attrNameLst>
+                                          <p:attrName>style.visibility</p:attrName>
+                                        </p:attrNameLst>
+                                      </p:cBhvr>
+                                      <p:to>
+                                        <p:strVal val="visible"/>
+                                      </p:to>
+                                    </p:set>
+                                    <p:animEffect transition="in" filter="fade">
+                                      <p:cBhvr>
+                                        <p:cTn id="10" dur="500"/>
+                                        <p:tgtEl>
+                                          <p:spTgt spid="10"/>
+                                        </p:tgtEl>
+                                      </p:cBhvr>
+                                    </p:animEffect>
+                                  </p:childTnLst>
+                                </p:cTn>
+                              </p:par>
+                              <p:par>
+                                <p:cTn id="11" presetID="10" presetClass="entr" presetSubtype="0" fill="hold" nodeType="withEffect">
+                                  <p:stCondLst>
+                                    <p:cond delay="0"/>
+                                  </p:stCondLst>
+                                  <p:childTnLst>
+                                    <p:set>
+                                      <p:cBhvr>
+                                        <p:cTn id="12" dur="1" fill="hold">
+                                          <p:stCondLst>
+                                            <p:cond delay="0"/>
+                                          </p:stCondLst>
+                                        </p:cTn>
+                                        <p:tgtEl>
+                                          <p:spTgt spid="9"/>
+                                        </p:tgtEl>
+                                        <p:attrNameLst>
+                                          <p:attrName>style.visibility</p:attrName>
+                                        </p:attrNameLst>
+                                      </p:cBhvr>
+                                      <p:to>
+                                        <p:strVal val="visible"/>
+                                      </p:to>
+                                    </p:set>
+                                    <p:animEffect transition="in" filter="fade">
+                                      <p:cBhvr>
+                                        <p:cTn id="13" dur="500"/>
+                                        <p:tgtEl>
+                                          <p:spTgt spid="9"/>
+                                        </p:tgtEl>
+                                      </p:cBhvr>
+                                    </p:animEffect>
+                                  </p:childTnLst>
+                                </p:cTn>
+                              </p:par>
+                            </p:childTnLst>
+                          </p:cTn>
+                        </p:par>
+                      </p:childTnLst>
+                    </p:cTn>
+                  </p:par>
+                </p:childTnLst>
+              </p:cTn>
+              <p:prevCondLst>
+                <p:cond evt="onPrev" delay="0">
+                  <p:tgtEl>
+                    <p:sldTgt/>
+                  </p:tgtEl>
+                </p:cond>
+              </p:prevCondLst>
+              <p:nextCondLst>
+                <p:cond evt="onNext" delay="0">
+                  <p:tgtEl>
+                    <p:sldTgt/>
+                  </p:tgtEl>
+                </p:cond>
+              </p:nextCondLst>
+            </p:seq>
+          </p:childTnLst>
+        </p:cTn>
+      </p:par>
+    </p:tnLst>
+    <p:bldLst>
+      <p:bldP spid="7" grpId="0"/>
+      <p:bldP spid="10" grpId="0"/>
+    </p:bldLst>
+  </p:timing>
 </p:sld>
 </file>
 
@@ -6294,6 +7497,162 @@
   <p:clrMapOvr>
     <a:masterClrMapping/>
   </p:clrMapOvr>
+  <p:timing>
+    <p:tnLst>
+      <p:par>
+        <p:cTn id="1" dur="indefinite" restart="never" nodeType="tmRoot">
+          <p:childTnLst>
+            <p:seq concurrent="1" nextAc="seek">
+              <p:cTn id="2" dur="indefinite" nodeType="mainSeq">
+                <p:childTnLst>
+                  <p:par>
+                    <p:cTn id="3" fill="hold">
+                      <p:stCondLst>
+                        <p:cond delay="indefinite"/>
+                      </p:stCondLst>
+                      <p:childTnLst>
+                        <p:par>
+                          <p:cTn id="4" fill="hold">
+                            <p:stCondLst>
+                              <p:cond delay="0"/>
+                            </p:stCondLst>
+                            <p:childTnLst>
+                              <p:par>
+                                <p:cTn id="5" presetID="10" presetClass="entr" presetSubtype="0" fill="hold" grpId="0" nodeType="clickEffect">
+                                  <p:stCondLst>
+                                    <p:cond delay="0"/>
+                                  </p:stCondLst>
+                                  <p:childTnLst>
+                                    <p:set>
+                                      <p:cBhvr>
+                                        <p:cTn id="6" dur="1" fill="hold">
+                                          <p:stCondLst>
+                                            <p:cond delay="0"/>
+                                          </p:stCondLst>
+                                        </p:cTn>
+                                        <p:tgtEl>
+                                          <p:spTgt spid="2"/>
+                                        </p:tgtEl>
+                                        <p:attrNameLst>
+                                          <p:attrName>style.visibility</p:attrName>
+                                        </p:attrNameLst>
+                                      </p:cBhvr>
+                                      <p:to>
+                                        <p:strVal val="visible"/>
+                                      </p:to>
+                                    </p:set>
+                                    <p:animEffect transition="in" filter="fade">
+                                      <p:cBhvr>
+                                        <p:cTn id="7" dur="500"/>
+                                        <p:tgtEl>
+                                          <p:spTgt spid="2"/>
+                                        </p:tgtEl>
+                                      </p:cBhvr>
+                                    </p:animEffect>
+                                  </p:childTnLst>
+                                </p:cTn>
+                              </p:par>
+                              <p:par>
+                                <p:cTn id="8" presetID="10" presetClass="entr" presetSubtype="0" fill="hold" nodeType="withEffect">
+                                  <p:stCondLst>
+                                    <p:cond delay="0"/>
+                                  </p:stCondLst>
+                                  <p:childTnLst>
+                                    <p:set>
+                                      <p:cBhvr>
+                                        <p:cTn id="9" dur="1" fill="hold">
+                                          <p:stCondLst>
+                                            <p:cond delay="0"/>
+                                          </p:stCondLst>
+                                        </p:cTn>
+                                        <p:tgtEl>
+                                          <p:spTgt spid="4"/>
+                                        </p:tgtEl>
+                                        <p:attrNameLst>
+                                          <p:attrName>style.visibility</p:attrName>
+                                        </p:attrNameLst>
+                                      </p:cBhvr>
+                                      <p:to>
+                                        <p:strVal val="visible"/>
+                                      </p:to>
+                                    </p:set>
+                                    <p:animEffect transition="in" filter="fade">
+                                      <p:cBhvr>
+                                        <p:cTn id="10" dur="500"/>
+                                        <p:tgtEl>
+                                          <p:spTgt spid="4"/>
+                                        </p:tgtEl>
+                                      </p:cBhvr>
+                                    </p:animEffect>
+                                  </p:childTnLst>
+                                </p:cTn>
+                              </p:par>
+                              <p:par>
+                                <p:cTn id="11" presetID="10" presetClass="entr" presetSubtype="0" fill="hold" nodeType="withEffect">
+                                  <p:stCondLst>
+                                    <p:cond delay="0"/>
+                                  </p:stCondLst>
+                                  <p:childTnLst>
+                                    <p:set>
+                                      <p:cBhvr>
+                                        <p:cTn id="12" dur="1" fill="hold">
+                                          <p:stCondLst>
+                                            <p:cond delay="0"/>
+                                          </p:stCondLst>
+                                        </p:cTn>
+                                        <p:tgtEl>
+                                          <p:spTgt spid="7"/>
+                                        </p:tgtEl>
+                                        <p:attrNameLst>
+                                          <p:attrName>style.visibility</p:attrName>
+                                        </p:attrNameLst>
+                                      </p:cBhvr>
+                                      <p:to>
+                                        <p:strVal val="visible"/>
+                                      </p:to>
+                                    </p:set>
+                                    <p:animEffect transition="in" filter="fade">
+                                      <p:cBhvr>
+                                        <p:cTn id="13" dur="500"/>
+                                        <p:tgtEl>
+                                          <p:spTgt spid="7"/>
+                                        </p:tgtEl>
+                                      </p:cBhvr>
+                                    </p:animEffect>
+                                  </p:childTnLst>
+                                </p:cTn>
+                              </p:par>
+                            </p:childTnLst>
+                          </p:cTn>
+                        </p:par>
+                      </p:childTnLst>
+                    </p:cTn>
+                  </p:par>
+                </p:childTnLst>
+              </p:cTn>
+              <p:prevCondLst>
+                <p:cond evt="onPrev" delay="0">
+                  <p:tgtEl>
+                    <p:sldTgt/>
+                  </p:tgtEl>
+                </p:cond>
+              </p:prevCondLst>
+              <p:nextCondLst>
+                <p:cond evt="onNext" delay="0">
+                  <p:tgtEl>
+                    <p:sldTgt/>
+                  </p:tgtEl>
+                </p:cond>
+              </p:nextCondLst>
+            </p:seq>
+          </p:childTnLst>
+        </p:cTn>
+      </p:par>
+    </p:tnLst>
+    <p:bldLst>
+      <p:bldP spid="2" grpId="0"/>
+    </p:bldLst>
+  </p:timing>
 </p:sld>
 </file>
 
@@ -6675,6 +8034,128 @@
   <p:clrMapOvr>
     <a:masterClrMapping/>
   </p:clrMapOvr>
+  <p:timing>
+    <p:tnLst>
+      <p:par>
+        <p:cTn id="1" dur="indefinite" restart="never" nodeType="tmRoot">
+          <p:childTnLst>
+            <p:seq concurrent="1" nextAc="seek">
+              <p:cTn id="2" dur="indefinite" nodeType="mainSeq">
+                <p:childTnLst>
+                  <p:par>
+                    <p:cTn id="3" fill="hold">
+                      <p:stCondLst>
+                        <p:cond delay="indefinite"/>
+                      </p:stCondLst>
+                      <p:childTnLst>
+                        <p:par>
+                          <p:cTn id="4" fill="hold">
+                            <p:stCondLst>
+                              <p:cond delay="0"/>
+                            </p:stCondLst>
+                            <p:childTnLst>
+                              <p:par>
+                                <p:cTn id="5" presetID="10" presetClass="entr" presetSubtype="0" fill="hold" grpId="0" nodeType="clickEffect">
+                                  <p:stCondLst>
+                                    <p:cond delay="0"/>
+                                  </p:stCondLst>
+                                  <p:childTnLst>
+                                    <p:set>
+                                      <p:cBhvr>
+                                        <p:cTn id="6" dur="1" fill="hold">
+                                          <p:stCondLst>
+                                            <p:cond delay="0"/>
+                                          </p:stCondLst>
+                                        </p:cTn>
+                                        <p:tgtEl>
+                                          <p:spTgt spid="2"/>
+                                        </p:tgtEl>
+                                        <p:attrNameLst>
+                                          <p:attrName>style.visibility</p:attrName>
+                                        </p:attrNameLst>
+                                      </p:cBhvr>
+                                      <p:to>
+                                        <p:strVal val="visible"/>
+                                      </p:to>
+                                    </p:set>
+                                    <p:animEffect transition="in" filter="fade">
+                                      <p:cBhvr>
+                                        <p:cTn id="7" dur="500"/>
+                                        <p:tgtEl>
+                                          <p:spTgt spid="2"/>
+                                        </p:tgtEl>
+                                      </p:cBhvr>
+                                    </p:animEffect>
+                                  </p:childTnLst>
+                                </p:cTn>
+                              </p:par>
+                              <p:par>
+                                <p:cTn id="8" presetID="10" presetClass="entr" presetSubtype="0" fill="hold" grpId="0" nodeType="withEffect">
+                                  <p:stCondLst>
+                                    <p:cond delay="0"/>
+                                  </p:stCondLst>
+                                  <p:childTnLst>
+                                    <p:set>
+                                      <p:cBhvr>
+                                        <p:cTn id="9" dur="1" fill="hold">
+                                          <p:stCondLst>
+                                            <p:cond delay="0"/>
+                                          </p:stCondLst>
+                                        </p:cTn>
+                                        <p:tgtEl>
+                                          <p:spTgt spid="6"/>
+                                        </p:tgtEl>
+                                        <p:attrNameLst>
+                                          <p:attrName>style.visibility</p:attrName>
+                                        </p:attrNameLst>
+                                      </p:cBhvr>
+                                      <p:to>
+                                        <p:strVal val="visible"/>
+                                      </p:to>
+                                    </p:set>
+                                    <p:animEffect transition="in" filter="fade">
+                                      <p:cBhvr>
+                                        <p:cTn id="10" dur="500"/>
+                                        <p:tgtEl>
+                                          <p:spTgt spid="6"/>
+                                        </p:tgtEl>
+                                      </p:cBhvr>
+                                    </p:animEffect>
+                                  </p:childTnLst>
+                                </p:cTn>
+                              </p:par>
+                            </p:childTnLst>
+                          </p:cTn>
+                        </p:par>
+                      </p:childTnLst>
+                    </p:cTn>
+                  </p:par>
+                </p:childTnLst>
+              </p:cTn>
+              <p:prevCondLst>
+                <p:cond evt="onPrev" delay="0">
+                  <p:tgtEl>
+                    <p:sldTgt/>
+                  </p:tgtEl>
+                </p:cond>
+              </p:prevCondLst>
+              <p:nextCondLst>
+                <p:cond evt="onNext" delay="0">
+                  <p:tgtEl>
+                    <p:sldTgt/>
+                  </p:tgtEl>
+                </p:cond>
+              </p:nextCondLst>
+            </p:seq>
+          </p:childTnLst>
+        </p:cTn>
+      </p:par>
+    </p:tnLst>
+    <p:bldLst>
+      <p:bldP spid="2" grpId="0"/>
+      <p:bldP spid="6" grpId="0"/>
+    </p:bldLst>
+  </p:timing>
 </p:sld>
 </file>
 
@@ -6822,6 +8303,127 @@
   <p:clrMapOvr>
     <a:masterClrMapping/>
   </p:clrMapOvr>
+  <p:timing>
+    <p:tnLst>
+      <p:par>
+        <p:cTn id="1" dur="indefinite" restart="never" nodeType="tmRoot">
+          <p:childTnLst>
+            <p:seq concurrent="1" nextAc="seek">
+              <p:cTn id="2" dur="indefinite" nodeType="mainSeq">
+                <p:childTnLst>
+                  <p:par>
+                    <p:cTn id="3" fill="hold">
+                      <p:stCondLst>
+                        <p:cond delay="indefinite"/>
+                      </p:stCondLst>
+                      <p:childTnLst>
+                        <p:par>
+                          <p:cTn id="4" fill="hold">
+                            <p:stCondLst>
+                              <p:cond delay="0"/>
+                            </p:stCondLst>
+                            <p:childTnLst>
+                              <p:par>
+                                <p:cTn id="5" presetID="10" presetClass="entr" presetSubtype="0" fill="hold" grpId="0" nodeType="clickEffect">
+                                  <p:stCondLst>
+                                    <p:cond delay="0"/>
+                                  </p:stCondLst>
+                                  <p:childTnLst>
+                                    <p:set>
+                                      <p:cBhvr>
+                                        <p:cTn id="6" dur="1" fill="hold">
+                                          <p:stCondLst>
+                                            <p:cond delay="0"/>
+                                          </p:stCondLst>
+                                        </p:cTn>
+                                        <p:tgtEl>
+                                          <p:spTgt spid="2"/>
+                                        </p:tgtEl>
+                                        <p:attrNameLst>
+                                          <p:attrName>style.visibility</p:attrName>
+                                        </p:attrNameLst>
+                                      </p:cBhvr>
+                                      <p:to>
+                                        <p:strVal val="visible"/>
+                                      </p:to>
+                                    </p:set>
+                                    <p:animEffect transition="in" filter="fade">
+                                      <p:cBhvr>
+                                        <p:cTn id="7" dur="500"/>
+                                        <p:tgtEl>
+                                          <p:spTgt spid="2"/>
+                                        </p:tgtEl>
+                                      </p:cBhvr>
+                                    </p:animEffect>
+                                  </p:childTnLst>
+                                </p:cTn>
+                              </p:par>
+                              <p:par>
+                                <p:cTn id="8" presetID="10" presetClass="entr" presetSubtype="0" fill="hold" nodeType="withEffect">
+                                  <p:stCondLst>
+                                    <p:cond delay="0"/>
+                                  </p:stCondLst>
+                                  <p:childTnLst>
+                                    <p:set>
+                                      <p:cBhvr>
+                                        <p:cTn id="9" dur="1" fill="hold">
+                                          <p:stCondLst>
+                                            <p:cond delay="0"/>
+                                          </p:stCondLst>
+                                        </p:cTn>
+                                        <p:tgtEl>
+                                          <p:spTgt spid="6"/>
+                                        </p:tgtEl>
+                                        <p:attrNameLst>
+                                          <p:attrName>style.visibility</p:attrName>
+                                        </p:attrNameLst>
+                                      </p:cBhvr>
+                                      <p:to>
+                                        <p:strVal val="visible"/>
+                                      </p:to>
+                                    </p:set>
+                                    <p:animEffect transition="in" filter="fade">
+                                      <p:cBhvr>
+                                        <p:cTn id="10" dur="500"/>
+                                        <p:tgtEl>
+                                          <p:spTgt spid="6"/>
+                                        </p:tgtEl>
+                                      </p:cBhvr>
+                                    </p:animEffect>
+                                  </p:childTnLst>
+                                </p:cTn>
+                              </p:par>
+                            </p:childTnLst>
+                          </p:cTn>
+                        </p:par>
+                      </p:childTnLst>
+                    </p:cTn>
+                  </p:par>
+                </p:childTnLst>
+              </p:cTn>
+              <p:prevCondLst>
+                <p:cond evt="onPrev" delay="0">
+                  <p:tgtEl>
+                    <p:sldTgt/>
+                  </p:tgtEl>
+                </p:cond>
+              </p:prevCondLst>
+              <p:nextCondLst>
+                <p:cond evt="onNext" delay="0">
+                  <p:tgtEl>
+                    <p:sldTgt/>
+                  </p:tgtEl>
+                </p:cond>
+              </p:nextCondLst>
+            </p:seq>
+          </p:childTnLst>
+        </p:cTn>
+      </p:par>
+    </p:tnLst>
+    <p:bldLst>
+      <p:bldP spid="2" grpId="0"/>
+    </p:bldLst>
+  </p:timing>
 </p:sld>
 </file>
 
@@ -7188,6 +8790,128 @@
   <p:clrMapOvr>
     <a:masterClrMapping/>
   </p:clrMapOvr>
+  <p:timing>
+    <p:tnLst>
+      <p:par>
+        <p:cTn id="1" dur="indefinite" restart="never" nodeType="tmRoot">
+          <p:childTnLst>
+            <p:seq concurrent="1" nextAc="seek">
+              <p:cTn id="2" dur="indefinite" nodeType="mainSeq">
+                <p:childTnLst>
+                  <p:par>
+                    <p:cTn id="3" fill="hold">
+                      <p:stCondLst>
+                        <p:cond delay="indefinite"/>
+                      </p:stCondLst>
+                      <p:childTnLst>
+                        <p:par>
+                          <p:cTn id="4" fill="hold">
+                            <p:stCondLst>
+                              <p:cond delay="0"/>
+                            </p:stCondLst>
+                            <p:childTnLst>
+                              <p:par>
+                                <p:cTn id="5" presetID="10" presetClass="entr" presetSubtype="0" fill="hold" grpId="0" nodeType="clickEffect">
+                                  <p:stCondLst>
+                                    <p:cond delay="0"/>
+                                  </p:stCondLst>
+                                  <p:childTnLst>
+                                    <p:set>
+                                      <p:cBhvr>
+                                        <p:cTn id="6" dur="1" fill="hold">
+                                          <p:stCondLst>
+                                            <p:cond delay="0"/>
+                                          </p:stCondLst>
+                                        </p:cTn>
+                                        <p:tgtEl>
+                                          <p:spTgt spid="2"/>
+                                        </p:tgtEl>
+                                        <p:attrNameLst>
+                                          <p:attrName>style.visibility</p:attrName>
+                                        </p:attrNameLst>
+                                      </p:cBhvr>
+                                      <p:to>
+                                        <p:strVal val="visible"/>
+                                      </p:to>
+                                    </p:set>
+                                    <p:animEffect transition="in" filter="fade">
+                                      <p:cBhvr>
+                                        <p:cTn id="7" dur="500"/>
+                                        <p:tgtEl>
+                                          <p:spTgt spid="2"/>
+                                        </p:tgtEl>
+                                      </p:cBhvr>
+                                    </p:animEffect>
+                                  </p:childTnLst>
+                                </p:cTn>
+                              </p:par>
+                              <p:par>
+                                <p:cTn id="8" presetID="10" presetClass="entr" presetSubtype="0" fill="hold" grpId="0" nodeType="withEffect">
+                                  <p:stCondLst>
+                                    <p:cond delay="0"/>
+                                  </p:stCondLst>
+                                  <p:childTnLst>
+                                    <p:set>
+                                      <p:cBhvr>
+                                        <p:cTn id="9" dur="1" fill="hold">
+                                          <p:stCondLst>
+                                            <p:cond delay="0"/>
+                                          </p:stCondLst>
+                                        </p:cTn>
+                                        <p:tgtEl>
+                                          <p:spTgt spid="9"/>
+                                        </p:tgtEl>
+                                        <p:attrNameLst>
+                                          <p:attrName>style.visibility</p:attrName>
+                                        </p:attrNameLst>
+                                      </p:cBhvr>
+                                      <p:to>
+                                        <p:strVal val="visible"/>
+                                      </p:to>
+                                    </p:set>
+                                    <p:animEffect transition="in" filter="fade">
+                                      <p:cBhvr>
+                                        <p:cTn id="10" dur="500"/>
+                                        <p:tgtEl>
+                                          <p:spTgt spid="9"/>
+                                        </p:tgtEl>
+                                      </p:cBhvr>
+                                    </p:animEffect>
+                                  </p:childTnLst>
+                                </p:cTn>
+                              </p:par>
+                            </p:childTnLst>
+                          </p:cTn>
+                        </p:par>
+                      </p:childTnLst>
+                    </p:cTn>
+                  </p:par>
+                </p:childTnLst>
+              </p:cTn>
+              <p:prevCondLst>
+                <p:cond evt="onPrev" delay="0">
+                  <p:tgtEl>
+                    <p:sldTgt/>
+                  </p:tgtEl>
+                </p:cond>
+              </p:prevCondLst>
+              <p:nextCondLst>
+                <p:cond evt="onNext" delay="0">
+                  <p:tgtEl>
+                    <p:sldTgt/>
+                  </p:tgtEl>
+                </p:cond>
+              </p:nextCondLst>
+            </p:seq>
+          </p:childTnLst>
+        </p:cTn>
+      </p:par>
+    </p:tnLst>
+    <p:bldLst>
+      <p:bldP spid="2" grpId="0"/>
+      <p:bldP spid="9" grpId="0"/>
+    </p:bldLst>
+  </p:timing>
 </p:sld>
 </file>
 
@@ -7628,6 +9352,127 @@
   <p:clrMapOvr>
     <a:masterClrMapping/>
   </p:clrMapOvr>
+  <p:timing>
+    <p:tnLst>
+      <p:par>
+        <p:cTn id="1" dur="indefinite" restart="never" nodeType="tmRoot">
+          <p:childTnLst>
+            <p:seq concurrent="1" nextAc="seek">
+              <p:cTn id="2" dur="indefinite" nodeType="mainSeq">
+                <p:childTnLst>
+                  <p:par>
+                    <p:cTn id="3" fill="hold">
+                      <p:stCondLst>
+                        <p:cond delay="indefinite"/>
+                      </p:stCondLst>
+                      <p:childTnLst>
+                        <p:par>
+                          <p:cTn id="4" fill="hold">
+                            <p:stCondLst>
+                              <p:cond delay="0"/>
+                            </p:stCondLst>
+                            <p:childTnLst>
+                              <p:par>
+                                <p:cTn id="5" presetID="10" presetClass="entr" presetSubtype="0" fill="hold" grpId="0" nodeType="clickEffect">
+                                  <p:stCondLst>
+                                    <p:cond delay="0"/>
+                                  </p:stCondLst>
+                                  <p:childTnLst>
+                                    <p:set>
+                                      <p:cBhvr>
+                                        <p:cTn id="6" dur="1" fill="hold">
+                                          <p:stCondLst>
+                                            <p:cond delay="0"/>
+                                          </p:stCondLst>
+                                        </p:cTn>
+                                        <p:tgtEl>
+                                          <p:spTgt spid="4"/>
+                                        </p:tgtEl>
+                                        <p:attrNameLst>
+                                          <p:attrName>style.visibility</p:attrName>
+                                        </p:attrNameLst>
+                                      </p:cBhvr>
+                                      <p:to>
+                                        <p:strVal val="visible"/>
+                                      </p:to>
+                                    </p:set>
+                                    <p:animEffect transition="in" filter="fade">
+                                      <p:cBhvr>
+                                        <p:cTn id="7" dur="500"/>
+                                        <p:tgtEl>
+                                          <p:spTgt spid="4"/>
+                                        </p:tgtEl>
+                                      </p:cBhvr>
+                                    </p:animEffect>
+                                  </p:childTnLst>
+                                </p:cTn>
+                              </p:par>
+                              <p:par>
+                                <p:cTn id="8" presetID="10" presetClass="entr" presetSubtype="0" fill="hold" nodeType="withEffect">
+                                  <p:stCondLst>
+                                    <p:cond delay="0"/>
+                                  </p:stCondLst>
+                                  <p:childTnLst>
+                                    <p:set>
+                                      <p:cBhvr>
+                                        <p:cTn id="9" dur="1" fill="hold">
+                                          <p:stCondLst>
+                                            <p:cond delay="0"/>
+                                          </p:stCondLst>
+                                        </p:cTn>
+                                        <p:tgtEl>
+                                          <p:spTgt spid="6"/>
+                                        </p:tgtEl>
+                                        <p:attrNameLst>
+                                          <p:attrName>style.visibility</p:attrName>
+                                        </p:attrNameLst>
+                                      </p:cBhvr>
+                                      <p:to>
+                                        <p:strVal val="visible"/>
+                                      </p:to>
+                                    </p:set>
+                                    <p:animEffect transition="in" filter="fade">
+                                      <p:cBhvr>
+                                        <p:cTn id="10" dur="500"/>
+                                        <p:tgtEl>
+                                          <p:spTgt spid="6"/>
+                                        </p:tgtEl>
+                                      </p:cBhvr>
+                                    </p:animEffect>
+                                  </p:childTnLst>
+                                </p:cTn>
+                              </p:par>
+                            </p:childTnLst>
+                          </p:cTn>
+                        </p:par>
+                      </p:childTnLst>
+                    </p:cTn>
+                  </p:par>
+                </p:childTnLst>
+              </p:cTn>
+              <p:prevCondLst>
+                <p:cond evt="onPrev" delay="0">
+                  <p:tgtEl>
+                    <p:sldTgt/>
+                  </p:tgtEl>
+                </p:cond>
+              </p:prevCondLst>
+              <p:nextCondLst>
+                <p:cond evt="onNext" delay="0">
+                  <p:tgtEl>
+                    <p:sldTgt/>
+                  </p:tgtEl>
+                </p:cond>
+              </p:nextCondLst>
+            </p:seq>
+          </p:childTnLst>
+        </p:cTn>
+      </p:par>
+    </p:tnLst>
+    <p:bldLst>
+      <p:bldP spid="4" grpId="0"/>
+    </p:bldLst>
+  </p:timing>
 </p:sld>
 </file>
 

--- a/source/MySEProject/Documentation/Fusion_CodersPPT.pptx
+++ b/source/MySEProject/Documentation/Fusion_CodersPPT.pptx
@@ -10,13 +10,14 @@
     <p:sldId id="259" r:id="rId4"/>
     <p:sldId id="261" r:id="rId5"/>
     <p:sldId id="262" r:id="rId6"/>
-    <p:sldId id="263" r:id="rId7"/>
-    <p:sldId id="264" r:id="rId8"/>
-    <p:sldId id="265" r:id="rId9"/>
-    <p:sldId id="268" r:id="rId10"/>
+    <p:sldId id="271" r:id="rId7"/>
+    <p:sldId id="263" r:id="rId8"/>
+    <p:sldId id="264" r:id="rId9"/>
+    <p:sldId id="265" r:id="rId10"/>
     <p:sldId id="266" r:id="rId11"/>
-    <p:sldId id="267" r:id="rId12"/>
-    <p:sldId id="270" r:id="rId13"/>
+    <p:sldId id="268" r:id="rId12"/>
+    <p:sldId id="267" r:id="rId13"/>
+    <p:sldId id="270" r:id="rId14"/>
   </p:sldIdLst>
   <p:sldSz cx="12192000" cy="6858000"/>
   <p:notesSz cx="6858000" cy="9144000"/>
@@ -380,7 +381,7 @@
           <a:p>
             <a:fld id="{3341EE12-F28E-4B03-A404-A8FCAE0F6316}" type="datetime1">
               <a:rPr lang="en-US" smtClean="0"/>
-              <a:t>3/22/2025</a:t>
+              <a:t>3/23/2025</a:t>
             </a:fld>
             <a:endParaRPr lang="en-US" dirty="0"/>
           </a:p>
@@ -665,7 +666,7 @@
           <a:p>
             <a:fld id="{B68B8189-0D9C-48A6-9FA3-862227B094CE}" type="datetime1">
               <a:rPr lang="en-US" smtClean="0"/>
-              <a:t>3/22/2025</a:t>
+              <a:t>3/23/2025</a:t>
             </a:fld>
             <a:endParaRPr lang="en-US"/>
           </a:p>
@@ -1029,7 +1030,7 @@
           <a:p>
             <a:fld id="{26ADDCAE-6443-42C3-9C19-F95985500186}" type="datetime1">
               <a:rPr lang="en-US" smtClean="0"/>
-              <a:t>3/22/2025</a:t>
+              <a:t>3/23/2025</a:t>
             </a:fld>
             <a:endParaRPr lang="en-US" dirty="0"/>
           </a:p>
@@ -1291,7 +1292,7 @@
           <a:p>
             <a:fld id="{1962799E-EB8E-4038-8063-81BB57C732D4}" type="datetime1">
               <a:rPr lang="en-US" smtClean="0"/>
-              <a:t>3/22/2025</a:t>
+              <a:t>3/23/2025</a:t>
             </a:fld>
             <a:endParaRPr lang="en-US"/>
           </a:p>
@@ -1721,7 +1722,7 @@
           <a:p>
             <a:fld id="{217A73C3-B243-44D3-809D-EF8FDFBD85D4}" type="datetime1">
               <a:rPr lang="en-US" smtClean="0"/>
-              <a:t>3/22/2025</a:t>
+              <a:t>3/23/2025</a:t>
             </a:fld>
             <a:endParaRPr lang="en-US" dirty="0"/>
           </a:p>
@@ -2052,7 +2053,7 @@
           <a:p>
             <a:fld id="{C9B6D3E3-28E2-4380-A113-67698215C5F8}" type="datetime1">
               <a:rPr lang="en-US" smtClean="0"/>
-              <a:t>3/22/2025</a:t>
+              <a:t>3/23/2025</a:t>
             </a:fld>
             <a:endParaRPr lang="en-US" dirty="0"/>
           </a:p>
@@ -2485,7 +2486,7 @@
           <a:p>
             <a:fld id="{A9EFCB61-04AD-47C9-BF79-2BD8B9CEC07A}" type="datetime1">
               <a:rPr lang="en-US" smtClean="0"/>
-              <a:t>3/22/2025</a:t>
+              <a:t>3/23/2025</a:t>
             </a:fld>
             <a:endParaRPr lang="en-US" dirty="0"/>
           </a:p>
@@ -2637,7 +2638,7 @@
           <a:p>
             <a:fld id="{A4535E0C-D585-492F-8146-7493F4086301}" type="datetime1">
               <a:rPr lang="en-US" smtClean="0"/>
-              <a:t>3/22/2025</a:t>
+              <a:t>3/23/2025</a:t>
             </a:fld>
             <a:endParaRPr lang="en-US"/>
           </a:p>
@@ -2800,7 +2801,7 @@
           <a:p>
             <a:fld id="{8CE48390-48B5-49AB-B019-A7C8FB8C31F6}" type="datetime1">
               <a:rPr lang="en-US" smtClean="0"/>
-              <a:t>3/22/2025</a:t>
+              <a:t>3/23/2025</a:t>
             </a:fld>
             <a:endParaRPr lang="en-US"/>
           </a:p>
@@ -3329,7 +3330,7 @@
           <a:p>
             <a:fld id="{962E767E-8A14-4E70-91B9-2101CBC4D7BD}" type="datetime1">
               <a:rPr lang="en-US" smtClean="0"/>
-              <a:t>3/22/2025</a:t>
+              <a:t>3/23/2025</a:t>
             </a:fld>
             <a:endParaRPr lang="en-US" dirty="0"/>
           </a:p>
@@ -3850,7 +3851,7 @@
           <a:p>
             <a:fld id="{01AF0C4B-5A4A-45CA-ABEC-10F107160D33}" type="datetime1">
               <a:rPr lang="en-US" smtClean="0"/>
-              <a:t>3/22/2025</a:t>
+              <a:t>3/23/2025</a:t>
             </a:fld>
             <a:endParaRPr lang="en-US" dirty="0"/>
           </a:p>
@@ -4400,7 +4401,7 @@
           <a:p>
             <a:fld id="{6989806E-8E94-473C-AEE7-BE6F15F85533}" type="datetime1">
               <a:rPr lang="en-US" smtClean="0"/>
-              <a:t>3/22/2025</a:t>
+              <a:t>3/23/2025</a:t>
             </a:fld>
             <a:endParaRPr lang="en-US" dirty="0"/>
           </a:p>
@@ -4919,7 +4920,7 @@
           <p:nvPr/>
         </p:nvPicPr>
         <p:blipFill>
-          <a:blip r:embed="rId2">
+          <a:blip r:embed="rId3">
             <a:extLst>
               <a:ext uri="{28A0092B-C50C-407E-A947-70E740481C1C}">
                 <a14:useLocalDpi xmlns:a14="http://schemas.microsoft.com/office/drawing/2010/main" val="0"/>
@@ -4955,7 +4956,7 @@
           <p:nvPr/>
         </p:nvPicPr>
         <p:blipFill>
-          <a:blip r:embed="rId3">
+          <a:blip r:embed="rId4">
             <a:extLst>
               <a:ext uri="{28A0092B-C50C-407E-A947-70E740481C1C}">
                 <a14:useLocalDpi xmlns:a14="http://schemas.microsoft.com/office/drawing/2010/main" val="0"/>
@@ -4977,6 +4978,9 @@
         </p:spPr>
       </p:pic>
     </p:spTree>
+    <p:custDataLst>
+      <p:tags r:id="rId1"/>
+    </p:custDataLst>
     <p:extLst>
       <p:ext uri="{BB962C8B-B14F-4D97-AF65-F5344CB8AC3E}">
         <p14:creationId xmlns:p14="http://schemas.microsoft.com/office/powerpoint/2010/main" val="3641864967"/>
@@ -5145,7 +5149,7 @@
           <p:nvPr/>
         </p:nvPicPr>
         <p:blipFill>
-          <a:blip r:embed="rId2">
+          <a:blip r:embed="rId3">
             <a:extLst>
               <a:ext uri="{28A0092B-C50C-407E-A947-70E740481C1C}">
                 <a14:useLocalDpi xmlns:a14="http://schemas.microsoft.com/office/drawing/2010/main" val="0"/>
@@ -5429,7 +5433,7 @@
           <p:nvPr/>
         </p:nvPicPr>
         <p:blipFill>
-          <a:blip r:embed="rId3">
+          <a:blip r:embed="rId4">
             <a:extLst>
               <a:ext uri="{28A0092B-C50C-407E-A947-70E740481C1C}">
                 <a14:useLocalDpi xmlns:a14="http://schemas.microsoft.com/office/drawing/2010/main" val="0"/>
@@ -5451,6 +5455,9 @@
         </p:spPr>
       </p:pic>
     </p:spTree>
+    <p:custDataLst>
+      <p:tags r:id="rId1"/>
+    </p:custDataLst>
     <p:extLst>
       <p:ext uri="{BB962C8B-B14F-4D97-AF65-F5344CB8AC3E}">
         <p14:creationId xmlns:p14="http://schemas.microsoft.com/office/powerpoint/2010/main" val="1079327904"/>
@@ -5763,6 +5770,271 @@
   <p:cSld>
     <p:spTree>
       <p:nvGrpSpPr>
+        <p:cNvPr id="1" name=""/>
+        <p:cNvGrpSpPr/>
+        <p:nvPr/>
+      </p:nvGrpSpPr>
+      <p:grpSpPr>
+        <a:xfrm>
+          <a:off x="0" y="0"/>
+          <a:ext cx="0" cy="0"/>
+          <a:chOff x="0" y="0"/>
+          <a:chExt cx="0" cy="0"/>
+        </a:xfrm>
+      </p:grpSpPr>
+      <p:pic>
+        <p:nvPicPr>
+          <p:cNvPr id="3" name="Picture 2" descr="A computer screen with a blue background&#10;&#10;AI-generated content may be incorrect.">
+            <a:extLst>
+              <a:ext uri="{FF2B5EF4-FFF2-40B4-BE49-F238E27FC236}">
+                <a16:creationId xmlns:a16="http://schemas.microsoft.com/office/drawing/2014/main" id="{CCAB805E-8BC0-187C-C05B-C1ABCE3BC391}"/>
+              </a:ext>
+            </a:extLst>
+          </p:cNvPr>
+          <p:cNvPicPr>
+            <a:picLocks noChangeAspect="1"/>
+          </p:cNvPicPr>
+          <p:nvPr/>
+        </p:nvPicPr>
+        <p:blipFill>
+          <a:blip r:embed="rId3">
+            <a:extLst>
+              <a:ext uri="{28A0092B-C50C-407E-A947-70E740481C1C}">
+                <a14:useLocalDpi xmlns:a14="http://schemas.microsoft.com/office/drawing/2010/main" val="0"/>
+              </a:ext>
+            </a:extLst>
+          </a:blip>
+          <a:stretch>
+            <a:fillRect/>
+          </a:stretch>
+        </p:blipFill>
+        <p:spPr>
+          <a:xfrm>
+            <a:off x="0" y="0"/>
+            <a:ext cx="12192000" cy="6958361"/>
+          </a:xfrm>
+          <a:prstGeom prst="rect">
+            <a:avLst/>
+          </a:prstGeom>
+        </p:spPr>
+      </p:pic>
+      <p:sp>
+        <p:nvSpPr>
+          <p:cNvPr id="4" name="TextBox 3">
+            <a:extLst>
+              <a:ext uri="{FF2B5EF4-FFF2-40B4-BE49-F238E27FC236}">
+                <a16:creationId xmlns:a16="http://schemas.microsoft.com/office/drawing/2014/main" id="{CCF86807-66AF-9FB0-9E5C-420F9854BE19}"/>
+              </a:ext>
+            </a:extLst>
+          </p:cNvPr>
+          <p:cNvSpPr txBox="1"/>
+          <p:nvPr/>
+        </p:nvSpPr>
+        <p:spPr>
+          <a:xfrm>
+            <a:off x="591015" y="557560"/>
+            <a:ext cx="5988205" cy="646331"/>
+          </a:xfrm>
+          <a:prstGeom prst="rect">
+            <a:avLst/>
+          </a:prstGeom>
+          <a:noFill/>
+        </p:spPr>
+        <p:txBody>
+          <a:bodyPr wrap="square" rtlCol="0">
+            <a:spAutoFit/>
+          </a:bodyPr>
+          <a:lstStyle/>
+          <a:p>
+            <a:r>
+              <a:rPr lang="en-US" sz="3600" b="1" dirty="0">
+                <a:solidFill>
+                  <a:schemeClr val="bg1"/>
+                </a:solidFill>
+              </a:rPr>
+              <a:t>Output of the Project:</a:t>
+            </a:r>
+          </a:p>
+        </p:txBody>
+      </p:sp>
+      <p:pic>
+        <p:nvPicPr>
+          <p:cNvPr id="6" name="Picture 5" descr="A screenshot of a computer program&#10;&#10;AI-generated content may be incorrect.">
+            <a:extLst>
+              <a:ext uri="{FF2B5EF4-FFF2-40B4-BE49-F238E27FC236}">
+                <a16:creationId xmlns:a16="http://schemas.microsoft.com/office/drawing/2014/main" id="{30AE157F-A35F-E44F-0D11-AAF92BF3F619}"/>
+              </a:ext>
+            </a:extLst>
+          </p:cNvPr>
+          <p:cNvPicPr>
+            <a:picLocks noChangeAspect="1"/>
+          </p:cNvPicPr>
+          <p:nvPr/>
+        </p:nvPicPr>
+        <p:blipFill>
+          <a:blip r:embed="rId4">
+            <a:extLst>
+              <a:ext uri="{28A0092B-C50C-407E-A947-70E740481C1C}">
+                <a14:useLocalDpi xmlns:a14="http://schemas.microsoft.com/office/drawing/2010/main" val="0"/>
+              </a:ext>
+            </a:extLst>
+          </a:blip>
+          <a:stretch>
+            <a:fillRect/>
+          </a:stretch>
+        </p:blipFill>
+        <p:spPr>
+          <a:xfrm>
+            <a:off x="1950697" y="1761451"/>
+            <a:ext cx="8290605" cy="4216617"/>
+          </a:xfrm>
+          <a:prstGeom prst="rect">
+            <a:avLst/>
+          </a:prstGeom>
+        </p:spPr>
+      </p:pic>
+    </p:spTree>
+    <p:custDataLst>
+      <p:tags r:id="rId1"/>
+    </p:custDataLst>
+    <p:extLst>
+      <p:ext uri="{BB962C8B-B14F-4D97-AF65-F5344CB8AC3E}">
+        <p14:creationId xmlns:p14="http://schemas.microsoft.com/office/powerpoint/2010/main" val="1294054836"/>
+      </p:ext>
+    </p:extLst>
+  </p:cSld>
+  <p:clrMapOvr>
+    <a:masterClrMapping/>
+  </p:clrMapOvr>
+  <p:timing>
+    <p:tnLst>
+      <p:par>
+        <p:cTn id="1" dur="indefinite" restart="never" nodeType="tmRoot">
+          <p:childTnLst>
+            <p:seq concurrent="1" nextAc="seek">
+              <p:cTn id="2" dur="indefinite" nodeType="mainSeq">
+                <p:childTnLst>
+                  <p:par>
+                    <p:cTn id="3" fill="hold">
+                      <p:stCondLst>
+                        <p:cond delay="indefinite"/>
+                      </p:stCondLst>
+                      <p:childTnLst>
+                        <p:par>
+                          <p:cTn id="4" fill="hold">
+                            <p:stCondLst>
+                              <p:cond delay="0"/>
+                            </p:stCondLst>
+                            <p:childTnLst>
+                              <p:par>
+                                <p:cTn id="5" presetID="10" presetClass="entr" presetSubtype="0" fill="hold" grpId="0" nodeType="clickEffect">
+                                  <p:stCondLst>
+                                    <p:cond delay="0"/>
+                                  </p:stCondLst>
+                                  <p:childTnLst>
+                                    <p:set>
+                                      <p:cBhvr>
+                                        <p:cTn id="6" dur="1" fill="hold">
+                                          <p:stCondLst>
+                                            <p:cond delay="0"/>
+                                          </p:stCondLst>
+                                        </p:cTn>
+                                        <p:tgtEl>
+                                          <p:spTgt spid="4"/>
+                                        </p:tgtEl>
+                                        <p:attrNameLst>
+                                          <p:attrName>style.visibility</p:attrName>
+                                        </p:attrNameLst>
+                                      </p:cBhvr>
+                                      <p:to>
+                                        <p:strVal val="visible"/>
+                                      </p:to>
+                                    </p:set>
+                                    <p:animEffect transition="in" filter="fade">
+                                      <p:cBhvr>
+                                        <p:cTn id="7" dur="500"/>
+                                        <p:tgtEl>
+                                          <p:spTgt spid="4"/>
+                                        </p:tgtEl>
+                                      </p:cBhvr>
+                                    </p:animEffect>
+                                  </p:childTnLst>
+                                </p:cTn>
+                              </p:par>
+                              <p:par>
+                                <p:cTn id="8" presetID="10" presetClass="entr" presetSubtype="0" fill="hold" nodeType="withEffect">
+                                  <p:stCondLst>
+                                    <p:cond delay="0"/>
+                                  </p:stCondLst>
+                                  <p:childTnLst>
+                                    <p:set>
+                                      <p:cBhvr>
+                                        <p:cTn id="9" dur="1" fill="hold">
+                                          <p:stCondLst>
+                                            <p:cond delay="0"/>
+                                          </p:stCondLst>
+                                        </p:cTn>
+                                        <p:tgtEl>
+                                          <p:spTgt spid="6"/>
+                                        </p:tgtEl>
+                                        <p:attrNameLst>
+                                          <p:attrName>style.visibility</p:attrName>
+                                        </p:attrNameLst>
+                                      </p:cBhvr>
+                                      <p:to>
+                                        <p:strVal val="visible"/>
+                                      </p:to>
+                                    </p:set>
+                                    <p:animEffect transition="in" filter="fade">
+                                      <p:cBhvr>
+                                        <p:cTn id="10" dur="500"/>
+                                        <p:tgtEl>
+                                          <p:spTgt spid="6"/>
+                                        </p:tgtEl>
+                                      </p:cBhvr>
+                                    </p:animEffect>
+                                  </p:childTnLst>
+                                </p:cTn>
+                              </p:par>
+                            </p:childTnLst>
+                          </p:cTn>
+                        </p:par>
+                      </p:childTnLst>
+                    </p:cTn>
+                  </p:par>
+                </p:childTnLst>
+              </p:cTn>
+              <p:prevCondLst>
+                <p:cond evt="onPrev" delay="0">
+                  <p:tgtEl>
+                    <p:sldTgt/>
+                  </p:tgtEl>
+                </p:cond>
+              </p:prevCondLst>
+              <p:nextCondLst>
+                <p:cond evt="onNext" delay="0">
+                  <p:tgtEl>
+                    <p:sldTgt/>
+                  </p:tgtEl>
+                </p:cond>
+              </p:nextCondLst>
+            </p:seq>
+          </p:childTnLst>
+        </p:cTn>
+      </p:par>
+    </p:tnLst>
+    <p:bldLst>
+      <p:bldP spid="4" grpId="0"/>
+    </p:bldLst>
+  </p:timing>
+</p:sld>
+</file>
+
+<file path=ppt/slides/slide12.xml><?xml version="1.0" encoding="utf-8"?>
+<p:sld xmlns:a="http://schemas.openxmlformats.org/drawingml/2006/main" xmlns:r="http://schemas.openxmlformats.org/officeDocument/2006/relationships" xmlns:p="http://schemas.openxmlformats.org/presentationml/2006/main">
+  <p:cSld>
+    <p:spTree>
+      <p:nvGrpSpPr>
         <p:cNvPr id="1" name="">
           <a:extLst>
             <a:ext uri="{FF2B5EF4-FFF2-40B4-BE49-F238E27FC236}">
@@ -6239,7 +6511,7 @@
 </p:sld>
 </file>
 
-<file path=ppt/slides/slide12.xml><?xml version="1.0" encoding="utf-8"?>
+<file path=ppt/slides/slide13.xml><?xml version="1.0" encoding="utf-8"?>
 <p:sld xmlns:a="http://schemas.openxmlformats.org/drawingml/2006/main" xmlns:r="http://schemas.openxmlformats.org/officeDocument/2006/relationships" xmlns:p="http://schemas.openxmlformats.org/presentationml/2006/main">
   <p:cSld>
     <p:spTree>
@@ -6420,7 +6692,7 @@
           <p:nvPr/>
         </p:nvPicPr>
         <p:blipFill>
-          <a:blip r:embed="rId2">
+          <a:blip r:embed="rId3">
             <a:extLst>
               <a:ext uri="{28A0092B-C50C-407E-A947-70E740481C1C}">
                 <a14:useLocalDpi xmlns:a14="http://schemas.microsoft.com/office/drawing/2010/main" val="0"/>
@@ -6648,6 +6920,9 @@
         </p:txBody>
       </p:sp>
     </p:spTree>
+    <p:custDataLst>
+      <p:tags r:id="rId1"/>
+    </p:custDataLst>
     <p:extLst>
       <p:ext uri="{BB962C8B-B14F-4D97-AF65-F5344CB8AC3E}">
         <p14:creationId xmlns:p14="http://schemas.microsoft.com/office/powerpoint/2010/main" val="1611073301"/>
@@ -6906,7 +7181,7 @@
           <p:nvPr/>
         </p:nvPicPr>
         <p:blipFill>
-          <a:blip r:embed="rId2">
+          <a:blip r:embed="rId3">
             <a:extLst>
               <a:ext uri="{28A0092B-C50C-407E-A947-70E740481C1C}">
                 <a14:useLocalDpi xmlns:a14="http://schemas.microsoft.com/office/drawing/2010/main" val="0"/>
@@ -6981,7 +7256,7 @@
           <p:nvPr/>
         </p:nvPicPr>
         <p:blipFill>
-          <a:blip r:embed="rId3">
+          <a:blip r:embed="rId4">
             <a:extLst>
               <a:ext uri="{28A0092B-C50C-407E-A947-70E740481C1C}">
                 <a14:useLocalDpi xmlns:a14="http://schemas.microsoft.com/office/drawing/2010/main" val="0"/>
@@ -7148,6 +7423,9 @@
         </p:txBody>
       </p:sp>
     </p:spTree>
+    <p:custDataLst>
+      <p:tags r:id="rId1"/>
+    </p:custDataLst>
     <p:extLst>
       <p:ext uri="{BB962C8B-B14F-4D97-AF65-F5344CB8AC3E}">
         <p14:creationId xmlns:p14="http://schemas.microsoft.com/office/powerpoint/2010/main" val="697871414"/>
@@ -7355,7 +7633,7 @@
           <p:nvPr/>
         </p:nvPicPr>
         <p:blipFill>
-          <a:blip r:embed="rId2">
+          <a:blip r:embed="rId3">
             <a:extLst>
               <a:ext uri="{28A0092B-C50C-407E-A947-70E740481C1C}">
                 <a14:useLocalDpi xmlns:a14="http://schemas.microsoft.com/office/drawing/2010/main" val="0"/>
@@ -7421,42 +7699,6 @@
             <a:extLst>
               <a:ext uri="{FF2B5EF4-FFF2-40B4-BE49-F238E27FC236}">
                 <a16:creationId xmlns:a16="http://schemas.microsoft.com/office/drawing/2014/main" id="{ED90DF35-8D26-A2D5-B479-00E553777F13}"/>
-              </a:ext>
-            </a:extLst>
-          </p:cNvPr>
-          <p:cNvPicPr>
-            <a:picLocks noChangeAspect="1"/>
-          </p:cNvPicPr>
-          <p:nvPr/>
-        </p:nvPicPr>
-        <p:blipFill>
-          <a:blip r:embed="rId3">
-            <a:extLst>
-              <a:ext uri="{28A0092B-C50C-407E-A947-70E740481C1C}">
-                <a14:useLocalDpi xmlns:a14="http://schemas.microsoft.com/office/drawing/2010/main" val="0"/>
-              </a:ext>
-            </a:extLst>
-          </a:blip>
-          <a:stretch>
-            <a:fillRect/>
-          </a:stretch>
-        </p:blipFill>
-        <p:spPr>
-          <a:xfrm>
-            <a:off x="413408" y="1622330"/>
-            <a:ext cx="5374075" cy="5046099"/>
-          </a:xfrm>
-          <a:prstGeom prst="rect">
-            <a:avLst/>
-          </a:prstGeom>
-        </p:spPr>
-      </p:pic>
-      <p:pic>
-        <p:nvPicPr>
-          <p:cNvPr id="7" name="Picture 6" descr="A computer screen shot of a program code&#10;&#10;AI-generated content may be incorrect.">
-            <a:extLst>
-              <a:ext uri="{FF2B5EF4-FFF2-40B4-BE49-F238E27FC236}">
-                <a16:creationId xmlns:a16="http://schemas.microsoft.com/office/drawing/2014/main" id="{D96C60AF-067B-A92D-CE79-0A1AD812765A}"/>
               </a:ext>
             </a:extLst>
           </p:cNvPr>
@@ -7479,15 +7721,54 @@
         </p:blipFill>
         <p:spPr>
           <a:xfrm>
-            <a:off x="6200891" y="1622329"/>
-            <a:ext cx="5374075" cy="5046100"/>
+            <a:off x="413408" y="1622330"/>
+            <a:ext cx="5374075" cy="5046099"/>
           </a:xfrm>
           <a:prstGeom prst="rect">
             <a:avLst/>
           </a:prstGeom>
         </p:spPr>
       </p:pic>
+      <p:pic>
+        <p:nvPicPr>
+          <p:cNvPr id="7" name="Picture 6" descr="A computer screen shot of a program code&#10;&#10;AI-generated content may be incorrect.">
+            <a:extLst>
+              <a:ext uri="{FF2B5EF4-FFF2-40B4-BE49-F238E27FC236}">
+                <a16:creationId xmlns:a16="http://schemas.microsoft.com/office/drawing/2014/main" id="{D96C60AF-067B-A92D-CE79-0A1AD812765A}"/>
+              </a:ext>
+            </a:extLst>
+          </p:cNvPr>
+          <p:cNvPicPr>
+            <a:picLocks noChangeAspect="1"/>
+          </p:cNvPicPr>
+          <p:nvPr/>
+        </p:nvPicPr>
+        <p:blipFill>
+          <a:blip r:embed="rId5">
+            <a:extLst>
+              <a:ext uri="{28A0092B-C50C-407E-A947-70E740481C1C}">
+                <a14:useLocalDpi xmlns:a14="http://schemas.microsoft.com/office/drawing/2010/main" val="0"/>
+              </a:ext>
+            </a:extLst>
+          </a:blip>
+          <a:stretch>
+            <a:fillRect/>
+          </a:stretch>
+        </p:blipFill>
+        <p:spPr>
+          <a:xfrm>
+            <a:off x="6200891" y="1622329"/>
+            <a:ext cx="5374075" cy="5046100"/>
+          </a:xfrm>
+          <a:prstGeom prst="rect">
+            <a:avLst/>
+          </a:prstGeom>
+        </p:spPr>
+      </p:pic>
     </p:spTree>
+    <p:custDataLst>
+      <p:tags r:id="rId1"/>
+    </p:custDataLst>
     <p:extLst>
       <p:ext uri="{BB962C8B-B14F-4D97-AF65-F5344CB8AC3E}">
         <p14:creationId xmlns:p14="http://schemas.microsoft.com/office/powerpoint/2010/main" val="332038390"/>
@@ -7694,7 +7975,7 @@
           <p:nvPr/>
         </p:nvPicPr>
         <p:blipFill>
-          <a:blip r:embed="rId2">
+          <a:blip r:embed="rId3">
             <a:extLst>
               <a:ext uri="{28A0092B-C50C-407E-A947-70E740481C1C}">
                 <a14:useLocalDpi xmlns:a14="http://schemas.microsoft.com/office/drawing/2010/main" val="0"/>
@@ -8025,6 +8306,9 @@
         </p:txBody>
       </p:sp>
     </p:spTree>
+    <p:custDataLst>
+      <p:tags r:id="rId1"/>
+    </p:custDataLst>
     <p:extLst>
       <p:ext uri="{BB962C8B-B14F-4D97-AF65-F5344CB8AC3E}">
         <p14:creationId xmlns:p14="http://schemas.microsoft.com/office/powerpoint/2010/main" val="2208408078"/>
@@ -8164,6 +8448,224 @@
   <p:cSld>
     <p:spTree>
       <p:nvGrpSpPr>
+        <p:cNvPr id="1" name=""/>
+        <p:cNvGrpSpPr/>
+        <p:nvPr/>
+      </p:nvGrpSpPr>
+      <p:grpSpPr>
+        <a:xfrm>
+          <a:off x="0" y="0"/>
+          <a:ext cx="0" cy="0"/>
+          <a:chOff x="0" y="0"/>
+          <a:chExt cx="0" cy="0"/>
+        </a:xfrm>
+      </p:grpSpPr>
+      <p:pic>
+        <p:nvPicPr>
+          <p:cNvPr id="5" name="Picture 4" descr="A computer screen with a blue background&#10;&#10;AI-generated content may be incorrect.">
+            <a:extLst>
+              <a:ext uri="{FF2B5EF4-FFF2-40B4-BE49-F238E27FC236}">
+                <a16:creationId xmlns:a16="http://schemas.microsoft.com/office/drawing/2014/main" id="{B23F72BB-F009-97BF-88F2-F3EEF026B664}"/>
+              </a:ext>
+            </a:extLst>
+          </p:cNvPr>
+          <p:cNvPicPr>
+            <a:picLocks noChangeAspect="1"/>
+          </p:cNvPicPr>
+          <p:nvPr/>
+        </p:nvPicPr>
+        <p:blipFill>
+          <a:blip r:embed="rId2">
+            <a:extLst>
+              <a:ext uri="{28A0092B-C50C-407E-A947-70E740481C1C}">
+                <a14:useLocalDpi xmlns:a14="http://schemas.microsoft.com/office/drawing/2010/main" val="0"/>
+              </a:ext>
+            </a:extLst>
+          </a:blip>
+          <a:stretch>
+            <a:fillRect/>
+          </a:stretch>
+        </p:blipFill>
+        <p:spPr>
+          <a:xfrm>
+            <a:off x="0" y="0"/>
+            <a:ext cx="12192000" cy="6858000"/>
+          </a:xfrm>
+          <a:prstGeom prst="rect">
+            <a:avLst/>
+          </a:prstGeom>
+        </p:spPr>
+      </p:pic>
+      <p:sp>
+        <p:nvSpPr>
+          <p:cNvPr id="7" name="TextBox 6">
+            <a:extLst>
+              <a:ext uri="{FF2B5EF4-FFF2-40B4-BE49-F238E27FC236}">
+                <a16:creationId xmlns:a16="http://schemas.microsoft.com/office/drawing/2014/main" id="{CE394CDB-A17F-3551-3653-44B864F97C95}"/>
+              </a:ext>
+            </a:extLst>
+          </p:cNvPr>
+          <p:cNvSpPr txBox="1"/>
+          <p:nvPr/>
+        </p:nvSpPr>
+        <p:spPr>
+          <a:xfrm>
+            <a:off x="256478" y="211201"/>
+            <a:ext cx="9846525" cy="646331"/>
+          </a:xfrm>
+          <a:prstGeom prst="rect">
+            <a:avLst/>
+          </a:prstGeom>
+          <a:noFill/>
+        </p:spPr>
+        <p:txBody>
+          <a:bodyPr wrap="square">
+            <a:spAutoFit/>
+          </a:bodyPr>
+          <a:lstStyle/>
+          <a:p>
+            <a:r>
+              <a:rPr lang="en-US" sz="3600" b="1" dirty="0">
+                <a:solidFill>
+                  <a:schemeClr val="bg1"/>
+                </a:solidFill>
+              </a:rPr>
+              <a:t>Image Processing Transformations Output</a:t>
+            </a:r>
+            <a:endParaRPr lang="en-US" sz="3600" dirty="0">
+              <a:solidFill>
+                <a:schemeClr val="bg1"/>
+              </a:solidFill>
+            </a:endParaRPr>
+          </a:p>
+        </p:txBody>
+      </p:sp>
+      <p:pic>
+        <p:nvPicPr>
+          <p:cNvPr id="9" name="Picture 8" descr="A white background with black text&#10;&#10;AI-generated content may be incorrect.">
+            <a:extLst>
+              <a:ext uri="{FF2B5EF4-FFF2-40B4-BE49-F238E27FC236}">
+                <a16:creationId xmlns:a16="http://schemas.microsoft.com/office/drawing/2014/main" id="{70397984-115F-1556-6F2B-CECDC7C260E8}"/>
+              </a:ext>
+            </a:extLst>
+          </p:cNvPr>
+          <p:cNvPicPr>
+            <a:picLocks noChangeAspect="1"/>
+          </p:cNvPicPr>
+          <p:nvPr/>
+        </p:nvPicPr>
+        <p:blipFill>
+          <a:blip r:embed="rId3">
+            <a:extLst>
+              <a:ext uri="{28A0092B-C50C-407E-A947-70E740481C1C}">
+                <a14:useLocalDpi xmlns:a14="http://schemas.microsoft.com/office/drawing/2010/main" val="0"/>
+              </a:ext>
+            </a:extLst>
+          </a:blip>
+          <a:stretch>
+            <a:fillRect/>
+          </a:stretch>
+        </p:blipFill>
+        <p:spPr>
+          <a:xfrm>
+            <a:off x="376470" y="1684589"/>
+            <a:ext cx="3113862" cy="3488821"/>
+          </a:xfrm>
+          <a:prstGeom prst="rect">
+            <a:avLst/>
+          </a:prstGeom>
+        </p:spPr>
+      </p:pic>
+      <p:pic>
+        <p:nvPicPr>
+          <p:cNvPr id="11" name="Picture 10" descr="A white card with black text&#10;&#10;AI-generated content may be incorrect.">
+            <a:extLst>
+              <a:ext uri="{FF2B5EF4-FFF2-40B4-BE49-F238E27FC236}">
+                <a16:creationId xmlns:a16="http://schemas.microsoft.com/office/drawing/2014/main" id="{B2C13DD7-3E21-E4CA-F986-D28D271F4FC2}"/>
+              </a:ext>
+            </a:extLst>
+          </p:cNvPr>
+          <p:cNvPicPr>
+            <a:picLocks noChangeAspect="1"/>
+          </p:cNvPicPr>
+          <p:nvPr/>
+        </p:nvPicPr>
+        <p:blipFill>
+          <a:blip r:embed="rId4">
+            <a:extLst>
+              <a:ext uri="{28A0092B-C50C-407E-A947-70E740481C1C}">
+                <a14:useLocalDpi xmlns:a14="http://schemas.microsoft.com/office/drawing/2010/main" val="0"/>
+              </a:ext>
+            </a:extLst>
+          </a:blip>
+          <a:stretch>
+            <a:fillRect/>
+          </a:stretch>
+        </p:blipFill>
+        <p:spPr>
+          <a:xfrm>
+            <a:off x="4027463" y="1684589"/>
+            <a:ext cx="3555367" cy="3400367"/>
+          </a:xfrm>
+          <a:prstGeom prst="rect">
+            <a:avLst/>
+          </a:prstGeom>
+        </p:spPr>
+      </p:pic>
+      <p:pic>
+        <p:nvPicPr>
+          <p:cNvPr id="13" name="Picture 12" descr="A black text on a white background&#10;&#10;AI-generated content may be incorrect.">
+            <a:extLst>
+              <a:ext uri="{FF2B5EF4-FFF2-40B4-BE49-F238E27FC236}">
+                <a16:creationId xmlns:a16="http://schemas.microsoft.com/office/drawing/2014/main" id="{C3C839B1-841F-873E-3496-AEB3E032CEF7}"/>
+              </a:ext>
+            </a:extLst>
+          </p:cNvPr>
+          <p:cNvPicPr>
+            <a:picLocks noChangeAspect="1"/>
+          </p:cNvPicPr>
+          <p:nvPr/>
+        </p:nvPicPr>
+        <p:blipFill>
+          <a:blip r:embed="rId5">
+            <a:extLst>
+              <a:ext uri="{28A0092B-C50C-407E-A947-70E740481C1C}">
+                <a14:useLocalDpi xmlns:a14="http://schemas.microsoft.com/office/drawing/2010/main" val="0"/>
+              </a:ext>
+            </a:extLst>
+          </a:blip>
+          <a:stretch>
+            <a:fillRect/>
+          </a:stretch>
+        </p:blipFill>
+        <p:spPr>
+          <a:xfrm>
+            <a:off x="8337395" y="1528651"/>
+            <a:ext cx="2887824" cy="3858322"/>
+          </a:xfrm>
+          <a:prstGeom prst="rect">
+            <a:avLst/>
+          </a:prstGeom>
+        </p:spPr>
+      </p:pic>
+    </p:spTree>
+    <p:extLst>
+      <p:ext uri="{BB962C8B-B14F-4D97-AF65-F5344CB8AC3E}">
+        <p14:creationId xmlns:p14="http://schemas.microsoft.com/office/powerpoint/2010/main" val="2052731438"/>
+      </p:ext>
+    </p:extLst>
+  </p:cSld>
+  <p:clrMapOvr>
+    <a:masterClrMapping/>
+  </p:clrMapOvr>
+</p:sld>
+</file>
+
+<file path=ppt/slides/slide7.xml><?xml version="1.0" encoding="utf-8"?>
+<p:sld xmlns:a="http://schemas.openxmlformats.org/drawingml/2006/main" xmlns:r="http://schemas.openxmlformats.org/officeDocument/2006/relationships" xmlns:p="http://schemas.openxmlformats.org/presentationml/2006/main">
+  <p:cSld>
+    <p:spTree>
+      <p:nvGrpSpPr>
         <p:cNvPr id="1" name="">
           <a:extLst>
             <a:ext uri="{FF2B5EF4-FFF2-40B4-BE49-F238E27FC236}">
@@ -8197,7 +8699,7 @@
           <p:nvPr/>
         </p:nvPicPr>
         <p:blipFill>
-          <a:blip r:embed="rId2">
+          <a:blip r:embed="rId3">
             <a:extLst>
               <a:ext uri="{28A0092B-C50C-407E-A947-70E740481C1C}">
                 <a14:useLocalDpi xmlns:a14="http://schemas.microsoft.com/office/drawing/2010/main" val="0"/>
@@ -8272,7 +8774,7 @@
           <p:nvPr/>
         </p:nvPicPr>
         <p:blipFill>
-          <a:blip r:embed="rId3">
+          <a:blip r:embed="rId4">
             <a:extLst>
               <a:ext uri="{28A0092B-C50C-407E-A947-70E740481C1C}">
                 <a14:useLocalDpi xmlns:a14="http://schemas.microsoft.com/office/drawing/2010/main" val="0"/>
@@ -8294,6 +8796,9 @@
         </p:spPr>
       </p:pic>
     </p:spTree>
+    <p:custDataLst>
+      <p:tags r:id="rId1"/>
+    </p:custDataLst>
     <p:extLst>
       <p:ext uri="{BB962C8B-B14F-4D97-AF65-F5344CB8AC3E}">
         <p14:creationId xmlns:p14="http://schemas.microsoft.com/office/powerpoint/2010/main" val="4273845599"/>
@@ -8427,7 +8932,7 @@
 </p:sld>
 </file>
 
-<file path=ppt/slides/slide7.xml><?xml version="1.0" encoding="utf-8"?>
+<file path=ppt/slides/slide8.xml><?xml version="1.0" encoding="utf-8"?>
 <p:sld xmlns:a="http://schemas.openxmlformats.org/drawingml/2006/main" xmlns:r="http://schemas.openxmlformats.org/officeDocument/2006/relationships" xmlns:p="http://schemas.openxmlformats.org/presentationml/2006/main">
   <p:cSld>
     <p:spTree>
@@ -8465,7 +8970,7 @@
           <p:nvPr/>
         </p:nvPicPr>
         <p:blipFill>
-          <a:blip r:embed="rId2">
+          <a:blip r:embed="rId3">
             <a:extLst>
               <a:ext uri="{28A0092B-C50C-407E-A947-70E740481C1C}">
                 <a14:useLocalDpi xmlns:a14="http://schemas.microsoft.com/office/drawing/2010/main" val="0"/>
@@ -8781,6 +9286,9 @@
         </p:txBody>
       </p:sp>
     </p:spTree>
+    <p:custDataLst>
+      <p:tags r:id="rId1"/>
+    </p:custDataLst>
     <p:extLst>
       <p:ext uri="{BB962C8B-B14F-4D97-AF65-F5344CB8AC3E}">
         <p14:creationId xmlns:p14="http://schemas.microsoft.com/office/powerpoint/2010/main" val="1406709416"/>
@@ -8915,7 +9423,7 @@
 </p:sld>
 </file>
 
-<file path=ppt/slides/slide8.xml><?xml version="1.0" encoding="utf-8"?>
+<file path=ppt/slides/slide9.xml><?xml version="1.0" encoding="utf-8"?>
 <p:sld xmlns:a="http://schemas.openxmlformats.org/drawingml/2006/main" xmlns:r="http://schemas.openxmlformats.org/officeDocument/2006/relationships" xmlns:p="http://schemas.openxmlformats.org/presentationml/2006/main">
   <p:cSld>
     <p:spTree>
@@ -9214,266 +9722,58 @@
 </p:sld>
 </file>
 
-<file path=ppt/slides/slide9.xml><?xml version="1.0" encoding="utf-8"?>
-<p:sld xmlns:a="http://schemas.openxmlformats.org/drawingml/2006/main" xmlns:r="http://schemas.openxmlformats.org/officeDocument/2006/relationships" xmlns:p="http://schemas.openxmlformats.org/presentationml/2006/main">
-  <p:cSld>
-    <p:spTree>
-      <p:nvGrpSpPr>
-        <p:cNvPr id="1" name=""/>
-        <p:cNvGrpSpPr/>
-        <p:nvPr/>
-      </p:nvGrpSpPr>
-      <p:grpSpPr>
-        <a:xfrm>
-          <a:off x="0" y="0"/>
-          <a:ext cx="0" cy="0"/>
-          <a:chOff x="0" y="0"/>
-          <a:chExt cx="0" cy="0"/>
-        </a:xfrm>
-      </p:grpSpPr>
-      <p:pic>
-        <p:nvPicPr>
-          <p:cNvPr id="3" name="Picture 2" descr="A computer screen with a blue background&#10;&#10;AI-generated content may be incorrect.">
-            <a:extLst>
-              <a:ext uri="{FF2B5EF4-FFF2-40B4-BE49-F238E27FC236}">
-                <a16:creationId xmlns:a16="http://schemas.microsoft.com/office/drawing/2014/main" id="{CCAB805E-8BC0-187C-C05B-C1ABCE3BC391}"/>
-              </a:ext>
-            </a:extLst>
-          </p:cNvPr>
-          <p:cNvPicPr>
-            <a:picLocks noChangeAspect="1"/>
-          </p:cNvPicPr>
-          <p:nvPr/>
-        </p:nvPicPr>
-        <p:blipFill>
-          <a:blip r:embed="rId2">
-            <a:extLst>
-              <a:ext uri="{28A0092B-C50C-407E-A947-70E740481C1C}">
-                <a14:useLocalDpi xmlns:a14="http://schemas.microsoft.com/office/drawing/2010/main" val="0"/>
-              </a:ext>
-            </a:extLst>
-          </a:blip>
-          <a:stretch>
-            <a:fillRect/>
-          </a:stretch>
-        </p:blipFill>
-        <p:spPr>
-          <a:xfrm>
-            <a:off x="0" y="0"/>
-            <a:ext cx="12192000" cy="6958361"/>
-          </a:xfrm>
-          <a:prstGeom prst="rect">
-            <a:avLst/>
-          </a:prstGeom>
-        </p:spPr>
-      </p:pic>
-      <p:sp>
-        <p:nvSpPr>
-          <p:cNvPr id="4" name="TextBox 3">
-            <a:extLst>
-              <a:ext uri="{FF2B5EF4-FFF2-40B4-BE49-F238E27FC236}">
-                <a16:creationId xmlns:a16="http://schemas.microsoft.com/office/drawing/2014/main" id="{CCF86807-66AF-9FB0-9E5C-420F9854BE19}"/>
-              </a:ext>
-            </a:extLst>
-          </p:cNvPr>
-          <p:cNvSpPr txBox="1"/>
-          <p:nvPr/>
-        </p:nvSpPr>
-        <p:spPr>
-          <a:xfrm>
-            <a:off x="591015" y="557560"/>
-            <a:ext cx="5988205" cy="646331"/>
-          </a:xfrm>
-          <a:prstGeom prst="rect">
-            <a:avLst/>
-          </a:prstGeom>
-          <a:noFill/>
-        </p:spPr>
-        <p:txBody>
-          <a:bodyPr wrap="square" rtlCol="0">
-            <a:spAutoFit/>
-          </a:bodyPr>
-          <a:lstStyle/>
-          <a:p>
-            <a:r>
-              <a:rPr lang="en-US" sz="3600" b="1" dirty="0">
-                <a:solidFill>
-                  <a:schemeClr val="bg1"/>
-                </a:solidFill>
-              </a:rPr>
-              <a:t>Output of the Project:</a:t>
-            </a:r>
-          </a:p>
-        </p:txBody>
-      </p:sp>
-      <p:pic>
-        <p:nvPicPr>
-          <p:cNvPr id="6" name="Picture 5" descr="A screenshot of a computer program&#10;&#10;AI-generated content may be incorrect.">
-            <a:extLst>
-              <a:ext uri="{FF2B5EF4-FFF2-40B4-BE49-F238E27FC236}">
-                <a16:creationId xmlns:a16="http://schemas.microsoft.com/office/drawing/2014/main" id="{30AE157F-A35F-E44F-0D11-AAF92BF3F619}"/>
-              </a:ext>
-            </a:extLst>
-          </p:cNvPr>
-          <p:cNvPicPr>
-            <a:picLocks noChangeAspect="1"/>
-          </p:cNvPicPr>
-          <p:nvPr/>
-        </p:nvPicPr>
-        <p:blipFill>
-          <a:blip r:embed="rId3">
-            <a:extLst>
-              <a:ext uri="{28A0092B-C50C-407E-A947-70E740481C1C}">
-                <a14:useLocalDpi xmlns:a14="http://schemas.microsoft.com/office/drawing/2010/main" val="0"/>
-              </a:ext>
-            </a:extLst>
-          </a:blip>
-          <a:stretch>
-            <a:fillRect/>
-          </a:stretch>
-        </p:blipFill>
-        <p:spPr>
-          <a:xfrm>
-            <a:off x="1950697" y="1761451"/>
-            <a:ext cx="8290605" cy="4216617"/>
-          </a:xfrm>
-          <a:prstGeom prst="rect">
-            <a:avLst/>
-          </a:prstGeom>
-        </p:spPr>
-      </p:pic>
-    </p:spTree>
-    <p:extLst>
-      <p:ext uri="{BB962C8B-B14F-4D97-AF65-F5344CB8AC3E}">
-        <p14:creationId xmlns:p14="http://schemas.microsoft.com/office/powerpoint/2010/main" val="1294054836"/>
-      </p:ext>
-    </p:extLst>
-  </p:cSld>
-  <p:clrMapOvr>
-    <a:masterClrMapping/>
-  </p:clrMapOvr>
-  <p:timing>
-    <p:tnLst>
-      <p:par>
-        <p:cTn id="1" dur="indefinite" restart="never" nodeType="tmRoot">
-          <p:childTnLst>
-            <p:seq concurrent="1" nextAc="seek">
-              <p:cTn id="2" dur="indefinite" nodeType="mainSeq">
-                <p:childTnLst>
-                  <p:par>
-                    <p:cTn id="3" fill="hold">
-                      <p:stCondLst>
-                        <p:cond delay="indefinite"/>
-                      </p:stCondLst>
-                      <p:childTnLst>
-                        <p:par>
-                          <p:cTn id="4" fill="hold">
-                            <p:stCondLst>
-                              <p:cond delay="0"/>
-                            </p:stCondLst>
-                            <p:childTnLst>
-                              <p:par>
-                                <p:cTn id="5" presetID="10" presetClass="entr" presetSubtype="0" fill="hold" grpId="0" nodeType="clickEffect">
-                                  <p:stCondLst>
-                                    <p:cond delay="0"/>
-                                  </p:stCondLst>
-                                  <p:childTnLst>
-                                    <p:set>
-                                      <p:cBhvr>
-                                        <p:cTn id="6" dur="1" fill="hold">
-                                          <p:stCondLst>
-                                            <p:cond delay="0"/>
-                                          </p:stCondLst>
-                                        </p:cTn>
-                                        <p:tgtEl>
-                                          <p:spTgt spid="4"/>
-                                        </p:tgtEl>
-                                        <p:attrNameLst>
-                                          <p:attrName>style.visibility</p:attrName>
-                                        </p:attrNameLst>
-                                      </p:cBhvr>
-                                      <p:to>
-                                        <p:strVal val="visible"/>
-                                      </p:to>
-                                    </p:set>
-                                    <p:animEffect transition="in" filter="fade">
-                                      <p:cBhvr>
-                                        <p:cTn id="7" dur="500"/>
-                                        <p:tgtEl>
-                                          <p:spTgt spid="4"/>
-                                        </p:tgtEl>
-                                      </p:cBhvr>
-                                    </p:animEffect>
-                                  </p:childTnLst>
-                                </p:cTn>
-                              </p:par>
-                              <p:par>
-                                <p:cTn id="8" presetID="10" presetClass="entr" presetSubtype="0" fill="hold" nodeType="withEffect">
-                                  <p:stCondLst>
-                                    <p:cond delay="0"/>
-                                  </p:stCondLst>
-                                  <p:childTnLst>
-                                    <p:set>
-                                      <p:cBhvr>
-                                        <p:cTn id="9" dur="1" fill="hold">
-                                          <p:stCondLst>
-                                            <p:cond delay="0"/>
-                                          </p:stCondLst>
-                                        </p:cTn>
-                                        <p:tgtEl>
-                                          <p:spTgt spid="6"/>
-                                        </p:tgtEl>
-                                        <p:attrNameLst>
-                                          <p:attrName>style.visibility</p:attrName>
-                                        </p:attrNameLst>
-                                      </p:cBhvr>
-                                      <p:to>
-                                        <p:strVal val="visible"/>
-                                      </p:to>
-                                    </p:set>
-                                    <p:animEffect transition="in" filter="fade">
-                                      <p:cBhvr>
-                                        <p:cTn id="10" dur="500"/>
-                                        <p:tgtEl>
-                                          <p:spTgt spid="6"/>
-                                        </p:tgtEl>
-                                      </p:cBhvr>
-                                    </p:animEffect>
-                                  </p:childTnLst>
-                                </p:cTn>
-                              </p:par>
-                            </p:childTnLst>
-                          </p:cTn>
-                        </p:par>
-                      </p:childTnLst>
-                    </p:cTn>
-                  </p:par>
-                </p:childTnLst>
-              </p:cTn>
-              <p:prevCondLst>
-                <p:cond evt="onPrev" delay="0">
-                  <p:tgtEl>
-                    <p:sldTgt/>
-                  </p:tgtEl>
-                </p:cond>
-              </p:prevCondLst>
-              <p:nextCondLst>
-                <p:cond evt="onNext" delay="0">
-                  <p:tgtEl>
-                    <p:sldTgt/>
-                  </p:tgtEl>
-                </p:cond>
-              </p:nextCondLst>
-            </p:seq>
-          </p:childTnLst>
-        </p:cTn>
-      </p:par>
-    </p:tnLst>
-    <p:bldLst>
-      <p:bldP spid="4" grpId="0"/>
-    </p:bldLst>
-  </p:timing>
-</p:sld>
+<file path=ppt/tags/tag1.xml><?xml version="1.0" encoding="utf-8"?>
+<p:tagLst xmlns:a="http://schemas.openxmlformats.org/drawingml/2006/main" xmlns:r="http://schemas.openxmlformats.org/officeDocument/2006/relationships" xmlns:p="http://schemas.openxmlformats.org/presentationml/2006/main">
+  <p:tag name="TIMING" val="|1.3"/>
+</p:tagLst>
+</file>
+
+<file path=ppt/tags/tag2.xml><?xml version="1.0" encoding="utf-8"?>
+<p:tagLst xmlns:a="http://schemas.openxmlformats.org/drawingml/2006/main" xmlns:r="http://schemas.openxmlformats.org/officeDocument/2006/relationships" xmlns:p="http://schemas.openxmlformats.org/presentationml/2006/main">
+  <p:tag name="TIMING" val="|0.3"/>
+</p:tagLst>
+</file>
+
+<file path=ppt/tags/tag3.xml><?xml version="1.0" encoding="utf-8"?>
+<p:tagLst xmlns:a="http://schemas.openxmlformats.org/drawingml/2006/main" xmlns:r="http://schemas.openxmlformats.org/officeDocument/2006/relationships" xmlns:p="http://schemas.openxmlformats.org/presentationml/2006/main">
+  <p:tag name="TIMING" val="|0"/>
+</p:tagLst>
+</file>
+
+<file path=ppt/tags/tag4.xml><?xml version="1.0" encoding="utf-8"?>
+<p:tagLst xmlns:a="http://schemas.openxmlformats.org/drawingml/2006/main" xmlns:r="http://schemas.openxmlformats.org/officeDocument/2006/relationships" xmlns:p="http://schemas.openxmlformats.org/presentationml/2006/main">
+  <p:tag name="TIMING" val="|0.5"/>
+</p:tagLst>
+</file>
+
+<file path=ppt/tags/tag5.xml><?xml version="1.0" encoding="utf-8"?>
+<p:tagLst xmlns:a="http://schemas.openxmlformats.org/drawingml/2006/main" xmlns:r="http://schemas.openxmlformats.org/officeDocument/2006/relationships" xmlns:p="http://schemas.openxmlformats.org/presentationml/2006/main">
+  <p:tag name="TIMING" val="|0.4"/>
+</p:tagLst>
+</file>
+
+<file path=ppt/tags/tag6.xml><?xml version="1.0" encoding="utf-8"?>
+<p:tagLst xmlns:a="http://schemas.openxmlformats.org/drawingml/2006/main" xmlns:r="http://schemas.openxmlformats.org/officeDocument/2006/relationships" xmlns:p="http://schemas.openxmlformats.org/presentationml/2006/main">
+  <p:tag name="TIMING" val="|1.4"/>
+</p:tagLst>
+</file>
+
+<file path=ppt/tags/tag7.xml><?xml version="1.0" encoding="utf-8"?>
+<p:tagLst xmlns:a="http://schemas.openxmlformats.org/drawingml/2006/main" xmlns:r="http://schemas.openxmlformats.org/officeDocument/2006/relationships" xmlns:p="http://schemas.openxmlformats.org/presentationml/2006/main">
+  <p:tag name="TIMING" val="|0.9"/>
+</p:tagLst>
+</file>
+
+<file path=ppt/tags/tag8.xml><?xml version="1.0" encoding="utf-8"?>
+<p:tagLst xmlns:a="http://schemas.openxmlformats.org/drawingml/2006/main" xmlns:r="http://schemas.openxmlformats.org/officeDocument/2006/relationships" xmlns:p="http://schemas.openxmlformats.org/presentationml/2006/main">
+  <p:tag name="TIMING" val="|0.6"/>
+</p:tagLst>
+</file>
+
+<file path=ppt/tags/tag9.xml><?xml version="1.0" encoding="utf-8"?>
+<p:tagLst xmlns:a="http://schemas.openxmlformats.org/drawingml/2006/main" xmlns:r="http://schemas.openxmlformats.org/officeDocument/2006/relationships" xmlns:p="http://schemas.openxmlformats.org/presentationml/2006/main">
+  <p:tag name="TIMING" val="|0.6"/>
+</p:tagLst>
 </file>
 
 <file path=ppt/theme/theme1.xml><?xml version="1.0" encoding="utf-8"?>
